--- a/presentation/QWeave_Presentation.pptx
+++ b/presentation/QWeave_Presentation.pptx
@@ -4,21 +4,24 @@
   <p:sldMasterIdLst>
     <p:sldMasterId id="2147483648" r:id="rId1"/>
   </p:sldMasterIdLst>
+  <p:notesMasterIdLst>
+    <p:notesMasterId r:id="rId14"/>
+  </p:notesMasterIdLst>
   <p:sldIdLst>
-    <p:sldId id="256" r:id="rId7"/>
-    <p:sldId id="257" r:id="rId9"/>
-    <p:sldId id="258" r:id="rId10"/>
-    <p:sldId id="259" r:id="rId11"/>
-    <p:sldId id="260" r:id="rId12"/>
-    <p:sldId id="261" r:id="rId13"/>
-    <p:sldId id="262" r:id="rId14"/>
-    <p:sldId id="263" r:id="rId15"/>
-    <p:sldId id="264" r:id="rId16"/>
-    <p:sldId id="265" r:id="rId17"/>
-    <p:sldId id="266" r:id="rId18"/>
-    <p:sldId id="267" r:id="rId19"/>
+    <p:sldId id="256" r:id="rId2"/>
+    <p:sldId id="257" r:id="rId3"/>
+    <p:sldId id="258" r:id="rId4"/>
+    <p:sldId id="259" r:id="rId5"/>
+    <p:sldId id="260" r:id="rId6"/>
+    <p:sldId id="261" r:id="rId7"/>
+    <p:sldId id="262" r:id="rId8"/>
+    <p:sldId id="263" r:id="rId9"/>
+    <p:sldId id="264" r:id="rId10"/>
+    <p:sldId id="265" r:id="rId11"/>
+    <p:sldId id="266" r:id="rId12"/>
+    <p:sldId id="267" r:id="rId13"/>
   </p:sldIdLst>
-  <p:sldSz cx="12191695" cy="6858000" type="screen4x3"/>
+  <p:sldSz cx="12192000" cy="6858000"/>
   <p:notesSz cx="6858000" cy="9144000"/>
   <p:defaultTextStyle>
     <a:defPPr>
@@ -115,11 +118,27 @@
       </a:defRPr>
     </a:lvl9pPr>
   </p:defaultTextStyle>
+  <p:extLst>
+    <p:ext uri="{EFAFB233-063F-42B5-8137-9DF3F51BA10A}">
+      <p15:sldGuideLst xmlns:p15="http://schemas.microsoft.com/office/powerpoint/2012/main">
+        <p15:guide id="1" orient="horz" pos="2160">
+          <p15:clr>
+            <a:srgbClr val="A4A3A4"/>
+          </p15:clr>
+        </p15:guide>
+        <p15:guide id="2" pos="2880">
+          <p15:clr>
+            <a:srgbClr val="A4A3A4"/>
+          </p15:clr>
+        </p15:guide>
+      </p15:sldGuideLst>
+    </p:ext>
+  </p:extLst>
 </p:presentation>
 </file>
 
 <file path=ppt/notesMasters/notesMaster1.xml><?xml version="1.0" encoding="utf-8"?>
-<p:notesMaster xmlns:a="http://schemas.openxmlformats.org/drawingml/2006/main" xmlns:p="http://schemas.openxmlformats.org/presentationml/2006/main" xmlns:r="http://schemas.openxmlformats.org/officeDocument/2006/relationships">
+<p:notesMaster xmlns:a="http://schemas.openxmlformats.org/drawingml/2006/main" xmlns:r="http://schemas.openxmlformats.org/officeDocument/2006/relationships" xmlns:p="http://schemas.openxmlformats.org/presentationml/2006/main">
   <p:cSld>
     <p:bg>
       <p:bgRef idx="1001">
@@ -140,241 +159,16 @@
           <a:chExt cx="0" cy="0"/>
         </a:xfrm>
       </p:grpSpPr>
-      <p:sp>
-        <p:nvSpPr>
-          <p:cNvPr id="2" name="Header Placeholder 1"/>
-          <p:cNvSpPr>
-            <a:spLocks noGrp="1"/>
-          </p:cNvSpPr>
-          <p:nvPr>
-            <p:ph type="hdr" sz="quarter"/>
-          </p:nvPr>
-        </p:nvSpPr>
-        <p:spPr>
-          <a:xfrm>
-            <a:off x="0" y="0"/>
-            <a:ext cx="2971800" cy="457200"/>
-          </a:xfrm>
-          <a:prstGeom prst="rect">
-            <a:avLst/>
-          </a:prstGeom>
-        </p:spPr>
-        <p:txBody>
-          <a:bodyPr vert="horz" lIns="91440" tIns="45720" rIns="91440" bIns="45720" rtlCol="0"/>
-          <a:lstStyle>
-            <a:lvl1pPr algn="l">
-              <a:defRPr sz="1200"/>
-            </a:lvl1pPr>
-          </a:lstStyle>
-          <a:p>
-            <a:endParaRPr lang="en-US"/>
-          </a:p>
-        </p:txBody>
-      </p:sp>
-      <p:sp>
-        <p:nvSpPr>
-          <p:cNvPr id="3" name="Date Placeholder 2"/>
-          <p:cNvSpPr>
-            <a:spLocks noGrp="1"/>
-          </p:cNvSpPr>
-          <p:nvPr>
-            <p:ph type="dt" idx="1"/>
-          </p:nvPr>
-        </p:nvSpPr>
-        <p:spPr>
-          <a:xfrm>
-            <a:off x="3884613" y="0"/>
-            <a:ext cx="2971800" cy="457200"/>
-          </a:xfrm>
-          <a:prstGeom prst="rect">
-            <a:avLst/>
-          </a:prstGeom>
-        </p:spPr>
-        <p:txBody>
-          <a:bodyPr vert="horz" lIns="91440" tIns="45720" rIns="91440" bIns="45720" rtlCol="0"/>
-          <a:lstStyle>
-            <a:lvl1pPr algn="r">
-              <a:defRPr sz="1200"/>
-            </a:lvl1pPr>
-          </a:lstStyle>
-          <a:p>
-            <a:fld id="{0F89C1C7-3DCD-1040-A9CF-14679D8B5DDD}" type="datetimeFigureOut">
-              <a:rPr lang="en-US" smtClean="0"/>
-              <a:t>10/17/16</a:t>
-            </a:fld>
-            <a:endParaRPr lang="en-US"/>
-          </a:p>
-        </p:txBody>
-      </p:sp>
-      <p:sp>
-        <p:nvSpPr>
-          <p:cNvPr id="4" name="Slide Image Placeholder 3"/>
-          <p:cNvSpPr>
-            <a:spLocks noGrp="1" noRot="1" noChangeAspect="1"/>
-          </p:cNvSpPr>
-          <p:nvPr>
-            <p:ph type="sldImg" idx="2"/>
-          </p:nvPr>
-        </p:nvSpPr>
-        <p:spPr>
-          <a:xfrm>
-            <a:off x="1143000" y="685800"/>
-            <a:ext cx="4572000" cy="3429000"/>
-          </a:xfrm>
-          <a:prstGeom prst="rect">
-            <a:avLst/>
-          </a:prstGeom>
-          <a:noFill/>
-          <a:ln w="12700">
-            <a:solidFill>
-              <a:prstClr val="black"/>
-            </a:solidFill>
-          </a:ln>
-        </p:spPr>
-        <p:txBody>
-          <a:bodyPr vert="horz" lIns="91440" tIns="45720" rIns="91440" bIns="45720" rtlCol="0" anchor="ctr"/>
-          <a:lstStyle/>
-          <a:p>
-            <a:endParaRPr lang="en-US"/>
-          </a:p>
-        </p:txBody>
-      </p:sp>
-      <p:sp>
-        <p:nvSpPr>
-          <p:cNvPr id="5" name="Notes Placeholder 4"/>
-          <p:cNvSpPr>
-            <a:spLocks noGrp="1"/>
-          </p:cNvSpPr>
-          <p:nvPr>
-            <p:ph type="body" sz="quarter" idx="3"/>
-          </p:nvPr>
-        </p:nvSpPr>
-        <p:spPr>
-          <a:xfrm>
-            <a:off x="685800" y="4343400"/>
-            <a:ext cx="5486400" cy="4114800"/>
-          </a:xfrm>
-          <a:prstGeom prst="rect">
-            <a:avLst/>
-          </a:prstGeom>
-        </p:spPr>
-        <p:txBody>
-          <a:bodyPr vert="horz" lIns="91440" tIns="45720" rIns="91440" bIns="45720" rtlCol="0"/>
-          <a:lstStyle/>
-          <a:p>
-            <a:pPr lvl="0"/>
-            <a:r>
-              <a:rPr lang="en-US" smtClean="0"/>
-              <a:t>Click to edit Master text styles</a:t>
-            </a:r>
-          </a:p>
-          <a:p>
-            <a:pPr lvl="1"/>
-            <a:r>
-              <a:rPr lang="en-US" smtClean="0"/>
-              <a:t>Second level</a:t>
-            </a:r>
-          </a:p>
-          <a:p>
-            <a:pPr lvl="2"/>
-            <a:r>
-              <a:rPr lang="en-US" smtClean="0"/>
-              <a:t>Third level</a:t>
-            </a:r>
-          </a:p>
-          <a:p>
-            <a:pPr lvl="3"/>
-            <a:r>
-              <a:rPr lang="en-US" smtClean="0"/>
-              <a:t>Fourth level</a:t>
-            </a:r>
-          </a:p>
-          <a:p>
-            <a:pPr lvl="4"/>
-            <a:r>
-              <a:rPr lang="en-US" smtClean="0"/>
-              <a:t>Fifth level</a:t>
-            </a:r>
-            <a:endParaRPr lang="en-US"/>
-          </a:p>
-        </p:txBody>
-      </p:sp>
-      <p:sp>
-        <p:nvSpPr>
-          <p:cNvPr id="6" name="Footer Placeholder 5"/>
-          <p:cNvSpPr>
-            <a:spLocks noGrp="1"/>
-          </p:cNvSpPr>
-          <p:nvPr>
-            <p:ph type="ftr" sz="quarter" idx="4"/>
-          </p:nvPr>
-        </p:nvSpPr>
-        <p:spPr>
-          <a:xfrm>
-            <a:off x="0" y="8685213"/>
-            <a:ext cx="2971800" cy="457200"/>
-          </a:xfrm>
-          <a:prstGeom prst="rect">
-            <a:avLst/>
-          </a:prstGeom>
-        </p:spPr>
-        <p:txBody>
-          <a:bodyPr vert="horz" lIns="91440" tIns="45720" rIns="91440" bIns="45720" rtlCol="0" anchor="b"/>
-          <a:lstStyle>
-            <a:lvl1pPr algn="l">
-              <a:defRPr sz="1200"/>
-            </a:lvl1pPr>
-          </a:lstStyle>
-          <a:p>
-            <a:endParaRPr lang="en-US"/>
-          </a:p>
-        </p:txBody>
-      </p:sp>
-      <p:sp>
-        <p:nvSpPr>
-          <p:cNvPr id="7" name="Slide Number Placeholder 6"/>
-          <p:cNvSpPr>
-            <a:spLocks noGrp="1"/>
-          </p:cNvSpPr>
-          <p:nvPr>
-            <p:ph type="sldNum" sz="quarter" idx="5"/>
-          </p:nvPr>
-        </p:nvSpPr>
-        <p:spPr>
-          <a:xfrm>
-            <a:off x="3884613" y="8685213"/>
-            <a:ext cx="2971800" cy="457200"/>
-          </a:xfrm>
-          <a:prstGeom prst="rect">
-            <a:avLst/>
-          </a:prstGeom>
-        </p:spPr>
-        <p:txBody>
-          <a:bodyPr vert="horz" lIns="91440" tIns="45720" rIns="91440" bIns="45720" rtlCol="0" anchor="b"/>
-          <a:lstStyle>
-            <a:lvl1pPr algn="r">
-              <a:defRPr sz="1200"/>
-            </a:lvl1pPr>
-          </a:lstStyle>
-          <a:p>
-            <a:fld id="{BB5E49A5-4136-284D-997B-48E1D791AD67}" type="slidenum">
-              <a:rPr lang="en-US" smtClean="0"/>
-              <a:t>‹#›</a:t>
-            </a:fld>
-            <a:endParaRPr lang="en-US"/>
-          </a:p>
-        </p:txBody>
-      </p:sp>
     </p:spTree>
     <p:extLst>
       <p:ext uri="{BB962C8B-B14F-4D97-AF65-F5344CB8AC3E}">
-        <p14:creationId xmlns:p14="http://schemas.microsoft.com/office/powerpoint/2010/main" val="2623252185"/>
+        <p14:creationId xmlns:p14="http://schemas.microsoft.com/office/powerpoint/2010/main" val="1120758657"/>
       </p:ext>
     </p:extLst>
   </p:cSld>
   <p:clrMap bg1="lt1" tx1="dk1" bg2="lt2" tx2="dk2" accent1="accent1" accent2="accent2" accent3="accent3" accent4="accent4" accent5="accent5" accent6="accent6" hlink="hlink" folHlink="folHlink"/>
   <p:notesStyle>
-    <a:lvl1pPr marL="0" algn="l" defTabSz="457200" rtl="0" eaLnBrk="1" latinLnBrk="0" hangingPunct="1">
+    <a:lvl1pPr marL="0" algn="l" defTabSz="914400" rtl="0" eaLnBrk="1" latinLnBrk="0" hangingPunct="1">
       <a:defRPr sz="1200" kern="1200">
         <a:solidFill>
           <a:schemeClr val="tx1"/>
@@ -384,7 +178,7 @@
         <a:cs typeface="+mn-cs"/>
       </a:defRPr>
     </a:lvl1pPr>
-    <a:lvl2pPr marL="457200" algn="l" defTabSz="457200" rtl="0" eaLnBrk="1" latinLnBrk="0" hangingPunct="1">
+    <a:lvl2pPr marL="457200" algn="l" defTabSz="914400" rtl="0" eaLnBrk="1" latinLnBrk="0" hangingPunct="1">
       <a:defRPr sz="1200" kern="1200">
         <a:solidFill>
           <a:schemeClr val="tx1"/>
@@ -394,7 +188,7 @@
         <a:cs typeface="+mn-cs"/>
       </a:defRPr>
     </a:lvl2pPr>
-    <a:lvl3pPr marL="914400" algn="l" defTabSz="457200" rtl="0" eaLnBrk="1" latinLnBrk="0" hangingPunct="1">
+    <a:lvl3pPr marL="914400" algn="l" defTabSz="914400" rtl="0" eaLnBrk="1" latinLnBrk="0" hangingPunct="1">
       <a:defRPr sz="1200" kern="1200">
         <a:solidFill>
           <a:schemeClr val="tx1"/>
@@ -404,7 +198,7 @@
         <a:cs typeface="+mn-cs"/>
       </a:defRPr>
     </a:lvl3pPr>
-    <a:lvl4pPr marL="1371600" algn="l" defTabSz="457200" rtl="0" eaLnBrk="1" latinLnBrk="0" hangingPunct="1">
+    <a:lvl4pPr marL="1371600" algn="l" defTabSz="914400" rtl="0" eaLnBrk="1" latinLnBrk="0" hangingPunct="1">
       <a:defRPr sz="1200" kern="1200">
         <a:solidFill>
           <a:schemeClr val="tx1"/>
@@ -414,7 +208,7 @@
         <a:cs typeface="+mn-cs"/>
       </a:defRPr>
     </a:lvl4pPr>
-    <a:lvl5pPr marL="1828800" algn="l" defTabSz="457200" rtl="0" eaLnBrk="1" latinLnBrk="0" hangingPunct="1">
+    <a:lvl5pPr marL="1828800" algn="l" defTabSz="914400" rtl="0" eaLnBrk="1" latinLnBrk="0" hangingPunct="1">
       <a:defRPr sz="1200" kern="1200">
         <a:solidFill>
           <a:schemeClr val="tx1"/>
@@ -424,7 +218,7 @@
         <a:cs typeface="+mn-cs"/>
       </a:defRPr>
     </a:lvl5pPr>
-    <a:lvl6pPr marL="2286000" algn="l" defTabSz="457200" rtl="0" eaLnBrk="1" latinLnBrk="0" hangingPunct="1">
+    <a:lvl6pPr marL="2286000" algn="l" defTabSz="914400" rtl="0" eaLnBrk="1" latinLnBrk="0" hangingPunct="1">
       <a:defRPr sz="1200" kern="1200">
         <a:solidFill>
           <a:schemeClr val="tx1"/>
@@ -434,7 +228,7 @@
         <a:cs typeface="+mn-cs"/>
       </a:defRPr>
     </a:lvl6pPr>
-    <a:lvl7pPr marL="2743200" algn="l" defTabSz="457200" rtl="0" eaLnBrk="1" latinLnBrk="0" hangingPunct="1">
+    <a:lvl7pPr marL="2743200" algn="l" defTabSz="914400" rtl="0" eaLnBrk="1" latinLnBrk="0" hangingPunct="1">
       <a:defRPr sz="1200" kern="1200">
         <a:solidFill>
           <a:schemeClr val="tx1"/>
@@ -444,7 +238,7 @@
         <a:cs typeface="+mn-cs"/>
       </a:defRPr>
     </a:lvl7pPr>
-    <a:lvl8pPr marL="3200400" algn="l" defTabSz="457200" rtl="0" eaLnBrk="1" latinLnBrk="0" hangingPunct="1">
+    <a:lvl8pPr marL="3200400" algn="l" defTabSz="914400" rtl="0" eaLnBrk="1" latinLnBrk="0" hangingPunct="1">
       <a:defRPr sz="1200" kern="1200">
         <a:solidFill>
           <a:schemeClr val="tx1"/>
@@ -454,7 +248,7 @@
         <a:cs typeface="+mn-cs"/>
       </a:defRPr>
     </a:lvl8pPr>
-    <a:lvl9pPr marL="3657600" algn="l" defTabSz="457200" rtl="0" eaLnBrk="1" latinLnBrk="0" hangingPunct="1">
+    <a:lvl9pPr marL="3657600" algn="l" defTabSz="914400" rtl="0" eaLnBrk="1" latinLnBrk="0" hangingPunct="1">
       <a:defRPr sz="1200" kern="1200">
         <a:solidFill>
           <a:schemeClr val="tx1"/>
@@ -469,7 +263,7 @@
 </file>
 
 <file path=ppt/notesSlides/notesSlide1.xml><?xml version="1.0" encoding="utf-8"?>
-<p:notes xmlns:a="http://schemas.openxmlformats.org/drawingml/2006/main" xmlns:p="http://schemas.openxmlformats.org/presentationml/2006/main" xmlns:r="http://schemas.openxmlformats.org/officeDocument/2006/relationships">
+<p:notes xmlns:a="http://schemas.openxmlformats.org/drawingml/2006/main" xmlns:r="http://schemas.openxmlformats.org/officeDocument/2006/relationships" xmlns:p="http://schemas.openxmlformats.org/presentationml/2006/main">
   <p:cSld>
     <p:spTree>
       <p:nvGrpSpPr>
@@ -489,7 +283,7 @@
         <p:nvSpPr>
           <p:cNvPr id="2" name="Slide Image Placeholder 1"/>
           <p:cNvSpPr>
-            <a:spLocks noGrp="1"/>
+            <a:spLocks noGrp="1" noRot="1" noChangeAspect="1"/>
           </p:cNvSpPr>
           <p:nvPr>
             <p:ph type="sldImg" idx="2"/>
@@ -504,7 +298,7 @@
             <a:spLocks noGrp="1"/>
           </p:cNvSpPr>
           <p:nvPr>
-            <p:ph type="body" idx="3" sz="quarter"/>
+            <p:ph type="body" sz="quarter" idx="3"/>
           </p:nvPr>
         </p:nvSpPr>
         <p:spPr/>
@@ -536,7 +330,9 @@
               <a:t>Hello everyone. Today we are presenting QWeave, our submission for the Qiskit Fall Fest 2026 Hyperbolic Futures challenge, hosted by quanTA at the University of Saskatchewan. Our team consists of Aaron Huang, Calvin Cheng, and myself, Bhaskar Mahajan. In near-term quantum processors, establishing long-distance entanglement requires routing qubits across noisy hardware. Our project investigates whether encoding quantum information across multiple disjoint hardware paths—known as QMRP—and taking advantage of hyperbolic chip geometry can protect Bell state fidelity against industry-standard compilers like Qiskit's SABRE.</a:t>
             </a:r>
           </a:p>
-          <a:p/>
+          <a:p>
+            <a:endParaRPr/>
+          </a:p>
           <a:p>
             <a:r>
               <a:t>=====================================================</a:t>
@@ -557,7 +353,9 @@
               <a:t>Keep opening confident, crisp, and under 30 seconds.</a:t>
             </a:r>
           </a:p>
-          <a:p/>
+          <a:p>
+            <a:endParaRPr/>
+          </a:p>
           <a:p>
             <a:r>
               <a:t>=====================================================</a:t>
@@ -592,7 +390,7 @@
             <a:spLocks noGrp="1"/>
           </p:cNvSpPr>
           <p:nvPr>
-            <p:ph type="sldNum" idx="5" sz="quarter"/>
+            <p:ph type="sldNum" sz="quarter" idx="5"/>
           </p:nvPr>
         </p:nvSpPr>
         <p:spPr/>
@@ -606,7 +404,7 @@
 </file>
 
 <file path=ppt/notesSlides/notesSlide10.xml><?xml version="1.0" encoding="utf-8"?>
-<p:notes xmlns:a="http://schemas.openxmlformats.org/drawingml/2006/main" xmlns:p="http://schemas.openxmlformats.org/presentationml/2006/main" xmlns:r="http://schemas.openxmlformats.org/officeDocument/2006/relationships">
+<p:notes xmlns:a="http://schemas.openxmlformats.org/drawingml/2006/main" xmlns:r="http://schemas.openxmlformats.org/officeDocument/2006/relationships" xmlns:p="http://schemas.openxmlformats.org/presentationml/2006/main">
   <p:cSld>
     <p:spTree>
       <p:nvGrpSpPr>
@@ -626,7 +424,7 @@
         <p:nvSpPr>
           <p:cNvPr id="2" name="Slide Image Placeholder 1"/>
           <p:cNvSpPr>
-            <a:spLocks noGrp="1"/>
+            <a:spLocks noGrp="1" noRot="1" noChangeAspect="1"/>
           </p:cNvSpPr>
           <p:nvPr>
             <p:ph type="sldImg" idx="2"/>
@@ -641,7 +439,7 @@
             <a:spLocks noGrp="1"/>
           </p:cNvSpPr>
           <p:nvPr>
-            <p:ph type="body" idx="3" sz="quarter"/>
+            <p:ph type="body" sz="quarter" idx="3"/>
           </p:nvPr>
         </p:nvSpPr>
         <p:spPr/>
@@ -673,7 +471,9 @@
               <a:t>Why didn't QMRP beat SABRE? The answer lies in the quantum noise physics of what this code detects versus what it misses. Within its own circuit, postselection works as mathematically designed: on the Hyperbolic chip, raw unpostselected fidelity is 0.8564. When we discard the 9.3% failing shots, fidelity jumps to 0.9208—a lift of over 6 percentage points! It successfully purifies single Pauli X bit-flips. However, this simple repetition code has fundamental blind spots: First, it is completely blind to phase-flip (Z) errors. Z errors commute right through CNOT gates and leave the syndrome at 0. Second, the stationary reference qubit at Port A sits idle waiting for both rails to travel, accumulating thermal relaxation. And third, the extra CNOT gates used to encode and decode introduce new faults directly into the state.</a:t>
             </a:r>
           </a:p>
-          <a:p/>
+          <a:p>
+            <a:endParaRPr/>
+          </a:p>
           <a:p>
             <a:r>
               <a:t>=====================================================</a:t>
@@ -694,7 +494,9 @@
               <a:t>Fulfills Deliverable 04. Bit-flips (X) are caught, but phase dephasing (Z) slips right past undetected.</a:t>
             </a:r>
           </a:p>
-          <a:p/>
+          <a:p>
+            <a:endParaRPr/>
+          </a:p>
           <a:p>
             <a:r>
               <a:t>=====================================================</a:t>
@@ -729,7 +531,7 @@
             <a:spLocks noGrp="1"/>
           </p:cNvSpPr>
           <p:nvPr>
-            <p:ph type="sldNum" idx="5" sz="quarter"/>
+            <p:ph type="sldNum" sz="quarter" idx="5"/>
           </p:nvPr>
         </p:nvSpPr>
         <p:spPr/>
@@ -743,7 +545,7 @@
 </file>
 
 <file path=ppt/notesSlides/notesSlide11.xml><?xml version="1.0" encoding="utf-8"?>
-<p:notes xmlns:a="http://schemas.openxmlformats.org/drawingml/2006/main" xmlns:p="http://schemas.openxmlformats.org/presentationml/2006/main" xmlns:r="http://schemas.openxmlformats.org/officeDocument/2006/relationships">
+<p:notes xmlns:a="http://schemas.openxmlformats.org/drawingml/2006/main" xmlns:r="http://schemas.openxmlformats.org/officeDocument/2006/relationships" xmlns:p="http://schemas.openxmlformats.org/presentationml/2006/main">
   <p:cSld>
     <p:spTree>
       <p:nvGrpSpPr>
@@ -763,7 +565,7 @@
         <p:nvSpPr>
           <p:cNvPr id="2" name="Slide Image Placeholder 1"/>
           <p:cNvSpPr>
-            <a:spLocks noGrp="1"/>
+            <a:spLocks noGrp="1" noRot="1" noChangeAspect="1"/>
           </p:cNvSpPr>
           <p:nvPr>
             <p:ph type="sldImg" idx="2"/>
@@ -778,7 +580,7 @@
             <a:spLocks noGrp="1"/>
           </p:cNvSpPr>
           <p:nvPr>
-            <p:ph type="body" idx="3" sz="quarter"/>
+            <p:ph type="body" sz="quarter" idx="3"/>
           </p:nvPr>
         </p:nvSpPr>
         <p:spPr/>
@@ -810,7 +612,9 @@
               <a:t>Based on our results, here is our key recommendation for future quantum cloud systems: Cloud compilers should NEVER enable multipath repetition protection as a default transport mechanism. Instead, compilers should implement a Geometry- and Distance-Aware Selective Routing Policy: For distances of 4 hops or fewer, compilers should strictly enforce single-path noise-adaptive routing like SABRE. Multipath postselection should only be exposed as an opt-in pass for long-distance transport on high-connectivity architectures like hyperbolic lattices, provided the user can tolerate a 10 to 15 percent shot discard penalty. This ensures that users only pay the gate and shot-yield overhead when physical geometry genuinely warrants it.</a:t>
             </a:r>
           </a:p>
-          <a:p/>
+          <a:p>
+            <a:endParaRPr/>
+          </a:p>
           <a:p>
             <a:r>
               <a:t>=====================================================</a:t>
@@ -831,7 +635,9 @@
               <a:t>Fulfills Deliverable 05 (Hardware or Software Recommendation). Deliver with confidence.</a:t>
             </a:r>
           </a:p>
-          <a:p/>
+          <a:p>
+            <a:endParaRPr/>
+          </a:p>
           <a:p>
             <a:r>
               <a:t>=====================================================</a:t>
@@ -866,7 +672,7 @@
             <a:spLocks noGrp="1"/>
           </p:cNvSpPr>
           <p:nvPr>
-            <p:ph type="sldNum" idx="5" sz="quarter"/>
+            <p:ph type="sldNum" sz="quarter" idx="5"/>
           </p:nvPr>
         </p:nvSpPr>
         <p:spPr/>
@@ -880,7 +686,7 @@
 </file>
 
 <file path=ppt/notesSlides/notesSlide12.xml><?xml version="1.0" encoding="utf-8"?>
-<p:notes xmlns:a="http://schemas.openxmlformats.org/drawingml/2006/main" xmlns:p="http://schemas.openxmlformats.org/presentationml/2006/main" xmlns:r="http://schemas.openxmlformats.org/officeDocument/2006/relationships">
+<p:notes xmlns:a="http://schemas.openxmlformats.org/drawingml/2006/main" xmlns:r="http://schemas.openxmlformats.org/officeDocument/2006/relationships" xmlns:p="http://schemas.openxmlformats.org/presentationml/2006/main">
   <p:cSld>
     <p:spTree>
       <p:nvGrpSpPr>
@@ -900,7 +706,7 @@
         <p:nvSpPr>
           <p:cNvPr id="2" name="Slide Image Placeholder 1"/>
           <p:cNvSpPr>
-            <a:spLocks noGrp="1"/>
+            <a:spLocks noGrp="1" noRot="1" noChangeAspect="1"/>
           </p:cNvSpPr>
           <p:nvPr>
             <p:ph type="sldImg" idx="2"/>
@@ -915,7 +721,7 @@
             <a:spLocks noGrp="1"/>
           </p:cNvSpPr>
           <p:nvPr>
-            <p:ph type="body" idx="3" sz="quarter"/>
+            <p:ph type="body" sz="quarter" idx="3"/>
           </p:nvPr>
         </p:nvSpPr>
         <p:spPr/>
@@ -947,7 +753,9 @@
               <a:t>Looking forward, we aim to extend this work to dual-syndrome CSS surface codes that protect against both bit-flips and phase-flips during routing, and test arbitrary multi-qubit circuits. We want to thank our host quanTA, Professor Steven Rayan, and the organizers. Thank you so much, and we welcome any questions!</a:t>
             </a:r>
           </a:p>
-          <a:p/>
+          <a:p>
+            <a:endParaRPr/>
+          </a:p>
           <a:p>
             <a:r>
               <a:t>=====================================================</a:t>
@@ -968,7 +776,9 @@
               <a:t>Conclude with energy and open for questions. Total presentation time is 8 minutes 35 seconds.</a:t>
             </a:r>
           </a:p>
-          <a:p/>
+          <a:p>
+            <a:endParaRPr/>
+          </a:p>
           <a:p>
             <a:r>
               <a:t>=====================================================</a:t>
@@ -1003,7 +813,7 @@
             <a:spLocks noGrp="1"/>
           </p:cNvSpPr>
           <p:nvPr>
-            <p:ph type="sldNum" idx="5" sz="quarter"/>
+            <p:ph type="sldNum" sz="quarter" idx="5"/>
           </p:nvPr>
         </p:nvSpPr>
         <p:spPr/>
@@ -1017,7 +827,7 @@
 </file>
 
 <file path=ppt/notesSlides/notesSlide2.xml><?xml version="1.0" encoding="utf-8"?>
-<p:notes xmlns:a="http://schemas.openxmlformats.org/drawingml/2006/main" xmlns:p="http://schemas.openxmlformats.org/presentationml/2006/main" xmlns:r="http://schemas.openxmlformats.org/officeDocument/2006/relationships">
+<p:notes xmlns:a="http://schemas.openxmlformats.org/drawingml/2006/main" xmlns:r="http://schemas.openxmlformats.org/officeDocument/2006/relationships" xmlns:p="http://schemas.openxmlformats.org/presentationml/2006/main">
   <p:cSld>
     <p:spTree>
       <p:nvGrpSpPr>
@@ -1037,7 +847,7 @@
         <p:nvSpPr>
           <p:cNvPr id="2" name="Slide Image Placeholder 1"/>
           <p:cNvSpPr>
-            <a:spLocks noGrp="1"/>
+            <a:spLocks noGrp="1" noRot="1" noChangeAspect="1"/>
           </p:cNvSpPr>
           <p:nvPr>
             <p:ph type="sldImg" idx="2"/>
@@ -1052,7 +862,7 @@
             <a:spLocks noGrp="1"/>
           </p:cNvSpPr>
           <p:nvPr>
-            <p:ph type="body" idx="3" sz="quarter"/>
+            <p:ph type="body" sz="quarter" idx="3"/>
           </p:nvPr>
         </p:nvSpPr>
         <p:spPr/>
@@ -1084,7 +894,9 @@
               <a:t>On physical quantum chips, qubits can only interact with adjacent neighbors. If we want to entangle two distant ports, the compiler must insert SWAP gates to move the quantum state across intermediate sites. However, every SWAP requires three physical CNOT gates. On near-term hardware with 1% gate error rates, routing a qubit just 4 or 5 hops away causes severe fidelity decay. The challenge explores a compelling idea: what if we split the traveling qubit across two parallel, disjoint paths using a two-qubit repetition code, and discard shots whenever an error is detected at the destination? And can novel hyperbolic processor geometries make this multipath approach practical?</a:t>
             </a:r>
           </a:p>
-          <a:p/>
+          <a:p>
+            <a:endParaRPr/>
+          </a:p>
           <a:p>
             <a:r>
               <a:t>=====================================================</a:t>
@@ -1105,7 +917,9 @@
               <a:t>Intuition: SWAPs are noisy because each takes 3 CNOTs. QMRP sends 2 copies down separate paths to catch bit-flips.</a:t>
             </a:r>
           </a:p>
-          <a:p/>
+          <a:p>
+            <a:endParaRPr/>
+          </a:p>
           <a:p>
             <a:r>
               <a:t>=====================================================</a:t>
@@ -1140,7 +954,7 @@
             <a:spLocks noGrp="1"/>
           </p:cNvSpPr>
           <p:nvPr>
-            <p:ph type="sldNum" idx="5" sz="quarter"/>
+            <p:ph type="sldNum" sz="quarter" idx="5"/>
           </p:nvPr>
         </p:nvSpPr>
         <p:spPr/>
@@ -1154,7 +968,7 @@
 </file>
 
 <file path=ppt/notesSlides/notesSlide3.xml><?xml version="1.0" encoding="utf-8"?>
-<p:notes xmlns:a="http://schemas.openxmlformats.org/drawingml/2006/main" xmlns:p="http://schemas.openxmlformats.org/presentationml/2006/main" xmlns:r="http://schemas.openxmlformats.org/officeDocument/2006/relationships">
+<p:notes xmlns:a="http://schemas.openxmlformats.org/drawingml/2006/main" xmlns:r="http://schemas.openxmlformats.org/officeDocument/2006/relationships" xmlns:p="http://schemas.openxmlformats.org/presentationml/2006/main">
   <p:cSld>
     <p:spTree>
       <p:nvGrpSpPr>
@@ -1174,7 +988,7 @@
         <p:nvSpPr>
           <p:cNvPr id="2" name="Slide Image Placeholder 1"/>
           <p:cNvSpPr>
-            <a:spLocks noGrp="1"/>
+            <a:spLocks noGrp="1" noRot="1" noChangeAspect="1"/>
           </p:cNvSpPr>
           <p:nvPr>
             <p:ph type="sldImg" idx="2"/>
@@ -1189,7 +1003,7 @@
             <a:spLocks noGrp="1"/>
           </p:cNvSpPr>
           <p:nvPr>
-            <p:ph type="body" idx="3" sz="quarter"/>
+            <p:ph type="body" sz="quarter" idx="3"/>
           </p:nvPr>
         </p:nvSpPr>
         <p:spPr/>
@@ -1221,7 +1035,9 @@
               <a:t>To evaluate this question systematically, we built a fully reproducible benchmark suite powered by Qiskit. We used Qiskit Aer with realistic calibration noise models, including IBM's 127-qubit FakeSherbrooke and seeded GenericBackendV2 instances. All circuits were compiled to superconducting native gates—Rz, √X, and CX—using Qiskit's PassManager at optimization level 3. Crucially, before executing any noisy shot measurements, every compiled circuit underwent an exact mathematical statevector audit. All circuits achieved an exact ideal Bell fidelity of 1.000000, confirming zero compilation bugs before introducing noise.</a:t>
             </a:r>
           </a:p>
-          <a:p/>
+          <a:p>
+            <a:endParaRPr/>
+          </a:p>
           <a:p>
             <a:r>
               <a:t>=====================================================</a:t>
@@ -1242,7 +1058,9 @@
               <a:t>Fulfills Deliverable 01. Emphasize that statevector verification proved 100% ideal correctness before noise was added.</a:t>
             </a:r>
           </a:p>
-          <a:p/>
+          <a:p>
+            <a:endParaRPr/>
+          </a:p>
           <a:p>
             <a:r>
               <a:t>=====================================================</a:t>
@@ -1277,7 +1095,7 @@
             <a:spLocks noGrp="1"/>
           </p:cNvSpPr>
           <p:nvPr>
-            <p:ph type="sldNum" idx="5" sz="quarter"/>
+            <p:ph type="sldNum" sz="quarter" idx="5"/>
           </p:nvPr>
         </p:nvSpPr>
         <p:spPr/>
@@ -1291,7 +1109,7 @@
 </file>
 
 <file path=ppt/notesSlides/notesSlide4.xml><?xml version="1.0" encoding="utf-8"?>
-<p:notes xmlns:a="http://schemas.openxmlformats.org/drawingml/2006/main" xmlns:p="http://schemas.openxmlformats.org/presentationml/2006/main" xmlns:r="http://schemas.openxmlformats.org/officeDocument/2006/relationships">
+<p:notes xmlns:a="http://schemas.openxmlformats.org/drawingml/2006/main" xmlns:r="http://schemas.openxmlformats.org/officeDocument/2006/relationships" xmlns:p="http://schemas.openxmlformats.org/presentationml/2006/main">
   <p:cSld>
     <p:spTree>
       <p:nvGrpSpPr>
@@ -1311,7 +1129,7 @@
         <p:nvSpPr>
           <p:cNvPr id="2" name="Slide Image Placeholder 1"/>
           <p:cNvSpPr>
-            <a:spLocks noGrp="1"/>
+            <a:spLocks noGrp="1" noRot="1" noChangeAspect="1"/>
           </p:cNvSpPr>
           <p:nvPr>
             <p:ph type="sldImg" idx="2"/>
@@ -1326,7 +1144,7 @@
             <a:spLocks noGrp="1"/>
           </p:cNvSpPr>
           <p:nvPr>
-            <p:ph type="body" idx="3" sz="quarter"/>
+            <p:ph type="body" sz="quarter" idx="3"/>
           </p:nvPr>
         </p:nvSpPr>
         <p:spPr/>
@@ -1358,7 +1176,9 @@
               <a:t>Here is our approach: Quantum Multipath Routing Protection. Instead of sending a single qubit down one noisy line of SWAPs, we encode it across two physical rails using a CNOT gate. Both rails travel along completely separate hardware paths to Port B. At the destination, a decoding CNOT checks if they still match. If a bit-flip error hit either rail during transit, the syndrome ancilla flips to 1, and we discard that shot. We measure fidelity across three bases—XX, YY, and ZZ—using the standard Bell formula: (1 + XX - YY + ZZ)/4. Crucially, we also optimized compiler movement: because empty routing ancillas start in clean zero states, moving a qubit into an empty wire only takes two CNOTs instead of three, cutting routing noise by up to 50%.</a:t>
             </a:r>
           </a:p>
-          <a:p/>
+          <a:p>
+            <a:endParaRPr/>
+          </a:p>
           <a:p>
             <a:r>
               <a:t>=====================================================</a:t>
@@ -1379,7 +1199,9 @@
               <a:t>Intuition: F = (1 + XX - YY + ZZ)/4. Ideal = 1.0. Noise pushes numbers toward 0. Parity throws away bit-flip errors.</a:t>
             </a:r>
           </a:p>
-          <a:p/>
+          <a:p>
+            <a:endParaRPr/>
+          </a:p>
           <a:p>
             <a:r>
               <a:t>=====================================================</a:t>
@@ -1414,7 +1236,7 @@
             <a:spLocks noGrp="1"/>
           </p:cNvSpPr>
           <p:nvPr>
-            <p:ph type="sldNum" idx="5" sz="quarter"/>
+            <p:ph type="sldNum" sz="quarter" idx="5"/>
           </p:nvPr>
         </p:nvSpPr>
         <p:spPr/>
@@ -1428,7 +1250,7 @@
 </file>
 
 <file path=ppt/notesSlides/notesSlide5.xml><?xml version="1.0" encoding="utf-8"?>
-<p:notes xmlns:a="http://schemas.openxmlformats.org/drawingml/2006/main" xmlns:p="http://schemas.openxmlformats.org/presentationml/2006/main" xmlns:r="http://schemas.openxmlformats.org/officeDocument/2006/relationships">
+<p:notes xmlns:a="http://schemas.openxmlformats.org/drawingml/2006/main" xmlns:r="http://schemas.openxmlformats.org/officeDocument/2006/relationships" xmlns:p="http://schemas.openxmlformats.org/presentationml/2006/main">
   <p:cSld>
     <p:spTree>
       <p:nvGrpSpPr>
@@ -1448,7 +1270,7 @@
         <p:nvSpPr>
           <p:cNvPr id="2" name="Slide Image Placeholder 1"/>
           <p:cNvSpPr>
-            <a:spLocks noGrp="1"/>
+            <a:spLocks noGrp="1" noRot="1" noChangeAspect="1"/>
           </p:cNvSpPr>
           <p:nvPr>
             <p:ph type="sldImg" idx="2"/>
@@ -1463,7 +1285,7 @@
             <a:spLocks noGrp="1"/>
           </p:cNvSpPr>
           <p:nvPr>
-            <p:ph type="body" idx="3" sz="quarter"/>
+            <p:ph type="body" sz="quarter" idx="3"/>
           </p:nvPr>
         </p:nvSpPr>
         <p:spPr/>
@@ -1495,7 +1317,9 @@
               <a:t>Our first benchmark processor is the 2016 Five-Node reference. In the original 2016 tree topology, there is only one acyclic path between ports 0 and 4, making disjoint multipath routing topologically impossible. To test QMRP at 5-qubit scale, we used a 5-node cycle topology. This creates two disjoint paths: Path 1 goes 0 to 1 to 4, while Path 2 goes 0 to 1 to 2 to 3 to 4. As shown in the transpiled circuit below, baselines require just 1 SWAP at depth 8 using 3 physical qubits. QMRP requires 2 SWAPs at depth 11, utilizing all 5 physical qubits with a 98% acceptance yield.</a:t>
             </a:r>
           </a:p>
-          <a:p/>
+          <a:p>
+            <a:endParaRPr/>
+          </a:p>
           <a:p>
             <a:r>
               <a:t>=====================================================</a:t>
@@ -1516,7 +1340,9 @@
               <a:t>Fulfills Deliverable 02 for Processor 1. Ample space for both the 5-node graph and its transpiled circuit.</a:t>
             </a:r>
           </a:p>
-          <a:p/>
+          <a:p>
+            <a:endParaRPr/>
+          </a:p>
           <a:p>
             <a:r>
               <a:t>=====================================================</a:t>
@@ -1551,7 +1377,7 @@
             <a:spLocks noGrp="1"/>
           </p:cNvSpPr>
           <p:nvPr>
-            <p:ph type="sldNum" idx="5" sz="quarter"/>
+            <p:ph type="sldNum" sz="quarter" idx="5"/>
           </p:nvPr>
         </p:nvSpPr>
         <p:spPr/>
@@ -1565,7 +1391,7 @@
 </file>
 
 <file path=ppt/notesSlides/notesSlide6.xml><?xml version="1.0" encoding="utf-8"?>
-<p:notes xmlns:a="http://schemas.openxmlformats.org/drawingml/2006/main" xmlns:p="http://schemas.openxmlformats.org/presentationml/2006/main" xmlns:r="http://schemas.openxmlformats.org/officeDocument/2006/relationships">
+<p:notes xmlns:a="http://schemas.openxmlformats.org/drawingml/2006/main" xmlns:r="http://schemas.openxmlformats.org/officeDocument/2006/relationships" xmlns:p="http://schemas.openxmlformats.org/presentationml/2006/main">
   <p:cSld>
     <p:spTree>
       <p:nvGrpSpPr>
@@ -1585,7 +1411,7 @@
         <p:nvSpPr>
           <p:cNvPr id="2" name="Slide Image Placeholder 1"/>
           <p:cNvSpPr>
-            <a:spLocks noGrp="1"/>
+            <a:spLocks noGrp="1" noRot="1" noChangeAspect="1"/>
           </p:cNvSpPr>
           <p:nvPr>
             <p:ph type="sldImg" idx="2"/>
@@ -1600,7 +1426,7 @@
             <a:spLocks noGrp="1"/>
           </p:cNvSpPr>
           <p:nvPr>
-            <p:ph type="body" idx="3" sz="quarter"/>
+            <p:ph type="body" sz="quarter" idx="3"/>
           </p:nvPr>
         </p:nvSpPr>
         <p:spPr/>
@@ -1632,7 +1458,9 @@
               <a:t>Our second processor is IBM's 127-qubit Heavy-Hex architecture, using calibration data from FakeSherbrooke. This represents commercial superconducting processors, characterized by low node degree—mostly degree 2 and 3. Between ports 0 and 14, this low connectivity creates a severe planar bottleneck: forcing two disjoint paths pushes the second rail far into peripheral qubits, requiring 8 SWAPs instead of 4. While SABRE optimizes circuit depth down to 30, QMRP's depth balloons to 113, and shot yield drops to 87.4%.</a:t>
             </a:r>
           </a:p>
-          <a:p/>
+          <a:p>
+            <a:endParaRPr/>
+          </a:p>
           <a:p>
             <a:r>
               <a:t>=====================================================</a:t>
@@ -1653,7 +1481,9 @@
               <a:t>Fulfills Deliverable 02 for Processor 2. Highlights the planar routing bottleneck of IBM Heavy-Hex chips.</a:t>
             </a:r>
           </a:p>
-          <a:p/>
+          <a:p>
+            <a:endParaRPr/>
+          </a:p>
           <a:p>
             <a:r>
               <a:t>=====================================================</a:t>
@@ -1688,7 +1518,7 @@
             <a:spLocks noGrp="1"/>
           </p:cNvSpPr>
           <p:nvPr>
-            <p:ph type="sldNum" idx="5" sz="quarter"/>
+            <p:ph type="sldNum" sz="quarter" idx="5"/>
           </p:nvPr>
         </p:nvSpPr>
         <p:spPr/>
@@ -1702,7 +1532,7 @@
 </file>
 
 <file path=ppt/notesSlides/notesSlide7.xml><?xml version="1.0" encoding="utf-8"?>
-<p:notes xmlns:a="http://schemas.openxmlformats.org/drawingml/2006/main" xmlns:p="http://schemas.openxmlformats.org/presentationml/2006/main" xmlns:r="http://schemas.openxmlformats.org/officeDocument/2006/relationships">
+<p:notes xmlns:a="http://schemas.openxmlformats.org/drawingml/2006/main" xmlns:r="http://schemas.openxmlformats.org/officeDocument/2006/relationships" xmlns:p="http://schemas.openxmlformats.org/presentationml/2006/main">
   <p:cSld>
     <p:spTree>
       <p:nvGrpSpPr>
@@ -1722,7 +1552,7 @@
         <p:nvSpPr>
           <p:cNvPr id="2" name="Slide Image Placeholder 1"/>
           <p:cNvSpPr>
-            <a:spLocks noGrp="1"/>
+            <a:spLocks noGrp="1" noRot="1" noChangeAspect="1"/>
           </p:cNvSpPr>
           <p:nvPr>
             <p:ph type="sldImg" idx="2"/>
@@ -1737,7 +1567,7 @@
             <a:spLocks noGrp="1"/>
           </p:cNvSpPr>
           <p:nvPr>
-            <p:ph type="body" idx="3" sz="quarter"/>
+            <p:ph type="body" sz="quarter" idx="3"/>
           </p:nvPr>
         </p:nvSpPr>
         <p:spPr/>
@@ -1769,7 +1599,9 @@
               <a:t>Our third processor is the star of the challenge: an 85-qubit Hyperbolic {7,3} lattice, generated using the open-source HYPERTILING library developed by Ahmed Adel Mahmoud and Professor Steven Rayan at quanTA. Hyperbolic geometry has negative spatial curvature: area expands exponentially with radius rather than quadratically. This creates abundant, short alternative paths between distant ports 0 and 84, making it theoretically ideal for multipath routing. On this chip, SABRE achieved the highest overall fidelity of 0.9258 at depth 22. QMRP achieved 0.9208 at depth 93 with 90.7% yield.</a:t>
             </a:r>
           </a:p>
-          <a:p/>
+          <a:p>
+            <a:endParaRPr/>
+          </a:p>
           <a:p>
             <a:r>
               <a:t>=====================================================</a:t>
@@ -1790,7 +1622,9 @@
               <a:t>Fulfills Deliverable 02 for Processor 3. Emphasize that hyperbolic geometry solves spatial congestion.</a:t>
             </a:r>
           </a:p>
-          <a:p/>
+          <a:p>
+            <a:endParaRPr/>
+          </a:p>
           <a:p>
             <a:r>
               <a:t>=====================================================</a:t>
@@ -1825,7 +1659,7 @@
             <a:spLocks noGrp="1"/>
           </p:cNvSpPr>
           <p:nvPr>
-            <p:ph type="sldNum" idx="5" sz="quarter"/>
+            <p:ph type="sldNum" sz="quarter" idx="5"/>
           </p:nvPr>
         </p:nvSpPr>
         <p:spPr/>
@@ -1839,7 +1673,7 @@
 </file>
 
 <file path=ppt/notesSlides/notesSlide8.xml><?xml version="1.0" encoding="utf-8"?>
-<p:notes xmlns:a="http://schemas.openxmlformats.org/drawingml/2006/main" xmlns:p="http://schemas.openxmlformats.org/presentationml/2006/main" xmlns:r="http://schemas.openxmlformats.org/officeDocument/2006/relationships">
+<p:notes xmlns:a="http://schemas.openxmlformats.org/drawingml/2006/main" xmlns:r="http://schemas.openxmlformats.org/officeDocument/2006/relationships" xmlns:p="http://schemas.openxmlformats.org/presentationml/2006/main">
   <p:cSld>
     <p:spTree>
       <p:nvGrpSpPr>
@@ -1859,7 +1693,7 @@
         <p:nvSpPr>
           <p:cNvPr id="2" name="Slide Image Placeholder 1"/>
           <p:cNvSpPr>
-            <a:spLocks noGrp="1"/>
+            <a:spLocks noGrp="1" noRot="1" noChangeAspect="1"/>
           </p:cNvSpPr>
           <p:nvPr>
             <p:ph type="sldImg" idx="2"/>
@@ -1874,7 +1708,7 @@
             <a:spLocks noGrp="1"/>
           </p:cNvSpPr>
           <p:nvPr>
-            <p:ph type="body" idx="3" sz="quarter"/>
+            <p:ph type="body" sz="quarter" idx="3"/>
           </p:nvPr>
         </p:nvSpPr>
         <p:spPr/>
@@ -1906,7 +1740,9 @@
               <a:t>To evaluate QMRP fairly, we didn't compare it against a single naive baseline. We tested three distinct routing paradigms: Method A is Shortest Path, minimizing physical hops. Method B is SABRE, Qiskit's state-of-the-art lookahead router designed to minimize circuit depth. Method C is Noise-Aware routing, inspired by the ASPLOS 2019 paper by Murali and collaborators, which steers routes around noisy physical links based on calibration data. We also built a novel Simulation-Assisted variant, C-MC, which pre-screens candidate paths using noisy trial shots on the simulator. On the Hyperbolic lattice, C-MC prevented an overly conservative detour, improving fidelity from 0.9028 up to 0.9185! Benchmarking against multiple competitive baselines is essential: it avoids strawman comparisons and proves whether QMRP offers a genuine advantage.</a:t>
             </a:r>
           </a:p>
-          <a:p/>
+          <a:p>
+            <a:endParaRPr/>
+          </a:p>
           <a:p>
             <a:r>
               <a:t>=====================================================</a:t>
@@ -1927,7 +1763,9 @@
               <a:t>Fulfills Deliverable 04 requirement: 'Why multiple baselines were evaluated'. Highlight C-MC trial shot pre-screening.</a:t>
             </a:r>
           </a:p>
-          <a:p/>
+          <a:p>
+            <a:endParaRPr/>
+          </a:p>
           <a:p>
             <a:r>
               <a:t>=====================================================</a:t>
@@ -1962,7 +1800,7 @@
             <a:spLocks noGrp="1"/>
           </p:cNvSpPr>
           <p:nvPr>
-            <p:ph type="sldNum" idx="5" sz="quarter"/>
+            <p:ph type="sldNum" sz="quarter" idx="5"/>
           </p:nvPr>
         </p:nvSpPr>
         <p:spPr/>
@@ -1976,7 +1814,7 @@
 </file>
 
 <file path=ppt/notesSlides/notesSlide9.xml><?xml version="1.0" encoding="utf-8"?>
-<p:notes xmlns:a="http://schemas.openxmlformats.org/drawingml/2006/main" xmlns:p="http://schemas.openxmlformats.org/presentationml/2006/main" xmlns:r="http://schemas.openxmlformats.org/officeDocument/2006/relationships">
+<p:notes xmlns:a="http://schemas.openxmlformats.org/drawingml/2006/main" xmlns:r="http://schemas.openxmlformats.org/officeDocument/2006/relationships" xmlns:p="http://schemas.openxmlformats.org/presentationml/2006/main">
   <p:cSld>
     <p:spTree>
       <p:nvGrpSpPr>
@@ -1996,7 +1834,7 @@
         <p:nvSpPr>
           <p:cNvPr id="2" name="Slide Image Placeholder 1"/>
           <p:cNvSpPr>
-            <a:spLocks noGrp="1"/>
+            <a:spLocks noGrp="1" noRot="1" noChangeAspect="1"/>
           </p:cNvSpPr>
           <p:nvPr>
             <p:ph type="sldImg" idx="2"/>
@@ -2011,7 +1849,7 @@
             <a:spLocks noGrp="1"/>
           </p:cNvSpPr>
           <p:nvPr>
-            <p:ph type="body" idx="3" sz="quarter"/>
+            <p:ph type="body" sz="quarter" idx="3"/>
           </p:nvPr>
         </p:nvSpPr>
         <p:spPr/>
@@ -2043,7 +1881,9 @@
               <a:t>Here are the quantitative results across all core cases audited with 3,072 shots per algorithm: On the Five-Node graph, baselines achieve 0.9751 fidelity with depth 8. QMRP reaches 0.9711 with depth 11 and 98% yield. On IBM Heavy-Hex, SABRE keeps circuit depth down to 30. QMRP reaches 0.7709, but circuit depth balloons to 113, and yield drops to 87.4%. On the Hyperbolic lattice, SABRE achieves the highest overall fidelity of 0.9258 at a minimal depth of 22. Simulation-Assisted Noise-Aware (C-MC) achieved 0.9185, while QMRP achieved 0.9208 at depth 93 with 90.7% acceptance. As explicitly required by the rubric, we tracked physical qubits: QMRP uses 5 qubits on the 5-node chip (100%), 8 qubits on IBM Heavy-Hex (6.3%), and 9 qubits on Hyperbolic (10.6%). Across all processors, QMRP's gate overhead cancels out the postselection gain, failing to beat single-path SABRE.</a:t>
             </a:r>
           </a:p>
-          <a:p/>
+          <a:p>
+            <a:endParaRPr/>
+          </a:p>
           <a:p>
             <a:r>
               <a:t>=====================================================</a:t>
@@ -2064,7 +1904,9 @@
               <a:t>Fulfills Deliverables 03 and 04. Emphasize that confidence intervals for SABRE and QMRP overlap.</a:t>
             </a:r>
           </a:p>
-          <a:p/>
+          <a:p>
+            <a:endParaRPr/>
+          </a:p>
           <a:p>
             <a:r>
               <a:t>=====================================================</a:t>
@@ -2099,7 +1941,7 @@
             <a:spLocks noGrp="1"/>
           </p:cNvSpPr>
           <p:nvPr>
-            <p:ph type="sldNum" idx="5" sz="quarter"/>
+            <p:ph type="sldNum" sz="quarter" idx="5"/>
           </p:nvPr>
         </p:nvSpPr>
         <p:spPr/>
@@ -2150,10 +1992,9 @@
           <a:lstStyle/>
           <a:p>
             <a:r>
-              <a:rPr lang="en-US" smtClean="0"/>
+              <a:rPr lang="en-US"/>
               <a:t>Click to edit Master title style</a:t>
             </a:r>
-            <a:endParaRPr lang="en-US"/>
           </a:p>
         </p:txBody>
       </p:sp>
@@ -2269,10 +2110,9 @@
           </a:lstStyle>
           <a:p>
             <a:r>
-              <a:rPr lang="en-US" smtClean="0"/>
+              <a:rPr lang="en-US"/>
               <a:t>Click to edit Master subtitle style</a:t>
             </a:r>
-            <a:endParaRPr lang="en-US"/>
           </a:p>
         </p:txBody>
       </p:sp>
@@ -2293,7 +2133,7 @@
           <a:p>
             <a:fld id="{5BCAD085-E8A6-8845-BD4E-CB4CCA059FC4}" type="datetimeFigureOut">
               <a:rPr lang="en-US" smtClean="0"/>
-              <a:t>1/27/13</a:t>
+              <a:t>10/14/2026</a:t>
             </a:fld>
             <a:endParaRPr lang="en-US"/>
           </a:p>
@@ -2387,10 +2227,9 @@
           <a:lstStyle/>
           <a:p>
             <a:r>
-              <a:rPr lang="en-US" smtClean="0"/>
+              <a:rPr lang="en-US"/>
               <a:t>Click to edit Master title style</a:t>
             </a:r>
-            <a:endParaRPr lang="en-US"/>
           </a:p>
         </p:txBody>
       </p:sp>
@@ -2411,38 +2250,37 @@
           <a:p>
             <a:pPr lvl="0"/>
             <a:r>
-              <a:rPr lang="en-US" smtClean="0"/>
+              <a:rPr lang="en-US"/>
               <a:t>Click to edit Master text styles</a:t>
             </a:r>
           </a:p>
           <a:p>
             <a:pPr lvl="1"/>
             <a:r>
-              <a:rPr lang="en-US" smtClean="0"/>
+              <a:rPr lang="en-US"/>
               <a:t>Second level</a:t>
             </a:r>
           </a:p>
           <a:p>
             <a:pPr lvl="2"/>
             <a:r>
-              <a:rPr lang="en-US" smtClean="0"/>
+              <a:rPr lang="en-US"/>
               <a:t>Third level</a:t>
             </a:r>
           </a:p>
           <a:p>
             <a:pPr lvl="3"/>
             <a:r>
-              <a:rPr lang="en-US" smtClean="0"/>
+              <a:rPr lang="en-US"/>
               <a:t>Fourth level</a:t>
             </a:r>
           </a:p>
           <a:p>
             <a:pPr lvl="4"/>
             <a:r>
-              <a:rPr lang="en-US" smtClean="0"/>
+              <a:rPr lang="en-US"/>
               <a:t>Fifth level</a:t>
             </a:r>
-            <a:endParaRPr lang="en-US"/>
           </a:p>
         </p:txBody>
       </p:sp>
@@ -2463,7 +2301,7 @@
           <a:p>
             <a:fld id="{5BCAD085-E8A6-8845-BD4E-CB4CCA059FC4}" type="datetimeFigureOut">
               <a:rPr lang="en-US" smtClean="0"/>
-              <a:t>1/27/13</a:t>
+              <a:t>10/14/2026</a:t>
             </a:fld>
             <a:endParaRPr lang="en-US"/>
           </a:p>
@@ -2562,10 +2400,9 @@
           <a:lstStyle/>
           <a:p>
             <a:r>
-              <a:rPr lang="en-US" smtClean="0"/>
+              <a:rPr lang="en-US"/>
               <a:t>Click to edit Master title style</a:t>
             </a:r>
-            <a:endParaRPr lang="en-US"/>
           </a:p>
         </p:txBody>
       </p:sp>
@@ -2591,38 +2428,37 @@
           <a:p>
             <a:pPr lvl="0"/>
             <a:r>
-              <a:rPr lang="en-US" smtClean="0"/>
+              <a:rPr lang="en-US"/>
               <a:t>Click to edit Master text styles</a:t>
             </a:r>
           </a:p>
           <a:p>
             <a:pPr lvl="1"/>
             <a:r>
-              <a:rPr lang="en-US" smtClean="0"/>
+              <a:rPr lang="en-US"/>
               <a:t>Second level</a:t>
             </a:r>
           </a:p>
           <a:p>
             <a:pPr lvl="2"/>
             <a:r>
-              <a:rPr lang="en-US" smtClean="0"/>
+              <a:rPr lang="en-US"/>
               <a:t>Third level</a:t>
             </a:r>
           </a:p>
           <a:p>
             <a:pPr lvl="3"/>
             <a:r>
-              <a:rPr lang="en-US" smtClean="0"/>
+              <a:rPr lang="en-US"/>
               <a:t>Fourth level</a:t>
             </a:r>
           </a:p>
           <a:p>
             <a:pPr lvl="4"/>
             <a:r>
-              <a:rPr lang="en-US" smtClean="0"/>
+              <a:rPr lang="en-US"/>
               <a:t>Fifth level</a:t>
             </a:r>
-            <a:endParaRPr lang="en-US"/>
           </a:p>
         </p:txBody>
       </p:sp>
@@ -2643,7 +2479,7 @@
           <a:p>
             <a:fld id="{5BCAD085-E8A6-8845-BD4E-CB4CCA059FC4}" type="datetimeFigureOut">
               <a:rPr lang="en-US" smtClean="0"/>
-              <a:t>1/27/13</a:t>
+              <a:t>10/14/2026</a:t>
             </a:fld>
             <a:endParaRPr lang="en-US"/>
           </a:p>
@@ -2737,10 +2573,9 @@
           <a:lstStyle/>
           <a:p>
             <a:r>
-              <a:rPr lang="en-US" smtClean="0"/>
+              <a:rPr lang="en-US"/>
               <a:t>Click to edit Master title style</a:t>
             </a:r>
-            <a:endParaRPr lang="en-US"/>
           </a:p>
         </p:txBody>
       </p:sp>
@@ -2761,38 +2596,37 @@
           <a:p>
             <a:pPr lvl="0"/>
             <a:r>
-              <a:rPr lang="en-US" smtClean="0"/>
+              <a:rPr lang="en-US"/>
               <a:t>Click to edit Master text styles</a:t>
             </a:r>
           </a:p>
           <a:p>
             <a:pPr lvl="1"/>
             <a:r>
-              <a:rPr lang="en-US" smtClean="0"/>
+              <a:rPr lang="en-US"/>
               <a:t>Second level</a:t>
             </a:r>
           </a:p>
           <a:p>
             <a:pPr lvl="2"/>
             <a:r>
-              <a:rPr lang="en-US" smtClean="0"/>
+              <a:rPr lang="en-US"/>
               <a:t>Third level</a:t>
             </a:r>
           </a:p>
           <a:p>
             <a:pPr lvl="3"/>
             <a:r>
-              <a:rPr lang="en-US" smtClean="0"/>
+              <a:rPr lang="en-US"/>
               <a:t>Fourth level</a:t>
             </a:r>
           </a:p>
           <a:p>
             <a:pPr lvl="4"/>
             <a:r>
-              <a:rPr lang="en-US" smtClean="0"/>
+              <a:rPr lang="en-US"/>
               <a:t>Fifth level</a:t>
             </a:r>
-            <a:endParaRPr lang="en-US"/>
           </a:p>
         </p:txBody>
       </p:sp>
@@ -2813,7 +2647,7 @@
           <a:p>
             <a:fld id="{5BCAD085-E8A6-8845-BD4E-CB4CCA059FC4}" type="datetimeFigureOut">
               <a:rPr lang="en-US" smtClean="0"/>
-              <a:t>1/27/13</a:t>
+              <a:t>10/14/2026</a:t>
             </a:fld>
             <a:endParaRPr lang="en-US"/>
           </a:p>
@@ -2916,10 +2750,9 @@
           </a:lstStyle>
           <a:p>
             <a:r>
-              <a:rPr lang="en-US" smtClean="0"/>
+              <a:rPr lang="en-US"/>
               <a:t>Click to edit Master title style</a:t>
             </a:r>
-            <a:endParaRPr lang="en-US"/>
           </a:p>
         </p:txBody>
       </p:sp>
@@ -3036,7 +2869,7 @@
           <a:p>
             <a:pPr lvl="0"/>
             <a:r>
-              <a:rPr lang="en-US" smtClean="0"/>
+              <a:rPr lang="en-US"/>
               <a:t>Click to edit Master text styles</a:t>
             </a:r>
           </a:p>
@@ -3059,7 +2892,7 @@
           <a:p>
             <a:fld id="{5BCAD085-E8A6-8845-BD4E-CB4CCA059FC4}" type="datetimeFigureOut">
               <a:rPr lang="en-US" smtClean="0"/>
-              <a:t>1/27/13</a:t>
+              <a:t>10/14/2026</a:t>
             </a:fld>
             <a:endParaRPr lang="en-US"/>
           </a:p>
@@ -3153,10 +2986,9 @@
           <a:lstStyle/>
           <a:p>
             <a:r>
-              <a:rPr lang="en-US" smtClean="0"/>
+              <a:rPr lang="en-US"/>
               <a:t>Click to edit Master title style</a:t>
             </a:r>
-            <a:endParaRPr lang="en-US"/>
           </a:p>
         </p:txBody>
       </p:sp>
@@ -3210,38 +3042,37 @@
           <a:p>
             <a:pPr lvl="0"/>
             <a:r>
-              <a:rPr lang="en-US" smtClean="0"/>
+              <a:rPr lang="en-US"/>
               <a:t>Click to edit Master text styles</a:t>
             </a:r>
           </a:p>
           <a:p>
             <a:pPr lvl="1"/>
             <a:r>
-              <a:rPr lang="en-US" smtClean="0"/>
+              <a:rPr lang="en-US"/>
               <a:t>Second level</a:t>
             </a:r>
           </a:p>
           <a:p>
             <a:pPr lvl="2"/>
             <a:r>
-              <a:rPr lang="en-US" smtClean="0"/>
+              <a:rPr lang="en-US"/>
               <a:t>Third level</a:t>
             </a:r>
           </a:p>
           <a:p>
             <a:pPr lvl="3"/>
             <a:r>
-              <a:rPr lang="en-US" smtClean="0"/>
+              <a:rPr lang="en-US"/>
               <a:t>Fourth level</a:t>
             </a:r>
           </a:p>
           <a:p>
             <a:pPr lvl="4"/>
             <a:r>
-              <a:rPr lang="en-US" smtClean="0"/>
+              <a:rPr lang="en-US"/>
               <a:t>Fifth level</a:t>
             </a:r>
-            <a:endParaRPr lang="en-US"/>
           </a:p>
         </p:txBody>
       </p:sp>
@@ -3295,38 +3126,37 @@
           <a:p>
             <a:pPr lvl="0"/>
             <a:r>
-              <a:rPr lang="en-US" smtClean="0"/>
+              <a:rPr lang="en-US"/>
               <a:t>Click to edit Master text styles</a:t>
             </a:r>
           </a:p>
           <a:p>
             <a:pPr lvl="1"/>
             <a:r>
-              <a:rPr lang="en-US" smtClean="0"/>
+              <a:rPr lang="en-US"/>
               <a:t>Second level</a:t>
             </a:r>
           </a:p>
           <a:p>
             <a:pPr lvl="2"/>
             <a:r>
-              <a:rPr lang="en-US" smtClean="0"/>
+              <a:rPr lang="en-US"/>
               <a:t>Third level</a:t>
             </a:r>
           </a:p>
           <a:p>
             <a:pPr lvl="3"/>
             <a:r>
-              <a:rPr lang="en-US" smtClean="0"/>
+              <a:rPr lang="en-US"/>
               <a:t>Fourth level</a:t>
             </a:r>
           </a:p>
           <a:p>
             <a:pPr lvl="4"/>
             <a:r>
-              <a:rPr lang="en-US" smtClean="0"/>
+              <a:rPr lang="en-US"/>
               <a:t>Fifth level</a:t>
             </a:r>
-            <a:endParaRPr lang="en-US"/>
           </a:p>
         </p:txBody>
       </p:sp>
@@ -3347,7 +3177,7 @@
           <a:p>
             <a:fld id="{5BCAD085-E8A6-8845-BD4E-CB4CCA059FC4}" type="datetimeFigureOut">
               <a:rPr lang="en-US" smtClean="0"/>
-              <a:t>1/27/13</a:t>
+              <a:t>10/14/2026</a:t>
             </a:fld>
             <a:endParaRPr lang="en-US"/>
           </a:p>
@@ -3445,10 +3275,9 @@
           </a:lstStyle>
           <a:p>
             <a:r>
-              <a:rPr lang="en-US" smtClean="0"/>
+              <a:rPr lang="en-US"/>
               <a:t>Click to edit Master title style</a:t>
             </a:r>
-            <a:endParaRPr lang="en-US"/>
           </a:p>
         </p:txBody>
       </p:sp>
@@ -3511,7 +3340,7 @@
           <a:p>
             <a:pPr lvl="0"/>
             <a:r>
-              <a:rPr lang="en-US" smtClean="0"/>
+              <a:rPr lang="en-US"/>
               <a:t>Click to edit Master text styles</a:t>
             </a:r>
           </a:p>
@@ -3567,38 +3396,37 @@
           <a:p>
             <a:pPr lvl="0"/>
             <a:r>
-              <a:rPr lang="en-US" smtClean="0"/>
+              <a:rPr lang="en-US"/>
               <a:t>Click to edit Master text styles</a:t>
             </a:r>
           </a:p>
           <a:p>
             <a:pPr lvl="1"/>
             <a:r>
-              <a:rPr lang="en-US" smtClean="0"/>
+              <a:rPr lang="en-US"/>
               <a:t>Second level</a:t>
             </a:r>
           </a:p>
           <a:p>
             <a:pPr lvl="2"/>
             <a:r>
-              <a:rPr lang="en-US" smtClean="0"/>
+              <a:rPr lang="en-US"/>
               <a:t>Third level</a:t>
             </a:r>
           </a:p>
           <a:p>
             <a:pPr lvl="3"/>
             <a:r>
-              <a:rPr lang="en-US" smtClean="0"/>
+              <a:rPr lang="en-US"/>
               <a:t>Fourth level</a:t>
             </a:r>
           </a:p>
           <a:p>
             <a:pPr lvl="4"/>
             <a:r>
-              <a:rPr lang="en-US" smtClean="0"/>
+              <a:rPr lang="en-US"/>
               <a:t>Fifth level</a:t>
             </a:r>
-            <a:endParaRPr lang="en-US"/>
           </a:p>
         </p:txBody>
       </p:sp>
@@ -3661,7 +3489,7 @@
           <a:p>
             <a:pPr lvl="0"/>
             <a:r>
-              <a:rPr lang="en-US" smtClean="0"/>
+              <a:rPr lang="en-US"/>
               <a:t>Click to edit Master text styles</a:t>
             </a:r>
           </a:p>
@@ -3717,38 +3545,37 @@
           <a:p>
             <a:pPr lvl="0"/>
             <a:r>
-              <a:rPr lang="en-US" smtClean="0"/>
+              <a:rPr lang="en-US"/>
               <a:t>Click to edit Master text styles</a:t>
             </a:r>
           </a:p>
           <a:p>
             <a:pPr lvl="1"/>
             <a:r>
-              <a:rPr lang="en-US" smtClean="0"/>
+              <a:rPr lang="en-US"/>
               <a:t>Second level</a:t>
             </a:r>
           </a:p>
           <a:p>
             <a:pPr lvl="2"/>
             <a:r>
-              <a:rPr lang="en-US" smtClean="0"/>
+              <a:rPr lang="en-US"/>
               <a:t>Third level</a:t>
             </a:r>
           </a:p>
           <a:p>
             <a:pPr lvl="3"/>
             <a:r>
-              <a:rPr lang="en-US" smtClean="0"/>
+              <a:rPr lang="en-US"/>
               <a:t>Fourth level</a:t>
             </a:r>
           </a:p>
           <a:p>
             <a:pPr lvl="4"/>
             <a:r>
-              <a:rPr lang="en-US" smtClean="0"/>
+              <a:rPr lang="en-US"/>
               <a:t>Fifth level</a:t>
             </a:r>
-            <a:endParaRPr lang="en-US"/>
           </a:p>
         </p:txBody>
       </p:sp>
@@ -3769,7 +3596,7 @@
           <a:p>
             <a:fld id="{5BCAD085-E8A6-8845-BD4E-CB4CCA059FC4}" type="datetimeFigureOut">
               <a:rPr lang="en-US" smtClean="0"/>
-              <a:t>1/27/13</a:t>
+              <a:t>10/14/2026</a:t>
             </a:fld>
             <a:endParaRPr lang="en-US"/>
           </a:p>
@@ -3863,10 +3690,9 @@
           <a:lstStyle/>
           <a:p>
             <a:r>
-              <a:rPr lang="en-US" smtClean="0"/>
+              <a:rPr lang="en-US"/>
               <a:t>Click to edit Master title style</a:t>
             </a:r>
-            <a:endParaRPr lang="en-US"/>
           </a:p>
         </p:txBody>
       </p:sp>
@@ -3887,7 +3713,7 @@
           <a:p>
             <a:fld id="{5BCAD085-E8A6-8845-BD4E-CB4CCA059FC4}" type="datetimeFigureOut">
               <a:rPr lang="en-US" smtClean="0"/>
-              <a:t>1/27/13</a:t>
+              <a:t>10/14/2026</a:t>
             </a:fld>
             <a:endParaRPr lang="en-US"/>
           </a:p>
@@ -3982,7 +3808,7 @@
           <a:p>
             <a:fld id="{5BCAD085-E8A6-8845-BD4E-CB4CCA059FC4}" type="datetimeFigureOut">
               <a:rPr lang="en-US" smtClean="0"/>
-              <a:t>1/27/13</a:t>
+              <a:t>10/14/2026</a:t>
             </a:fld>
             <a:endParaRPr lang="en-US"/>
           </a:p>
@@ -4085,10 +3911,9 @@
           </a:lstStyle>
           <a:p>
             <a:r>
-              <a:rPr lang="en-US" smtClean="0"/>
+              <a:rPr lang="en-US"/>
               <a:t>Click to edit Master title style</a:t>
             </a:r>
-            <a:endParaRPr lang="en-US"/>
           </a:p>
         </p:txBody>
       </p:sp>
@@ -4142,38 +3967,37 @@
           <a:p>
             <a:pPr lvl="0"/>
             <a:r>
-              <a:rPr lang="en-US" smtClean="0"/>
+              <a:rPr lang="en-US"/>
               <a:t>Click to edit Master text styles</a:t>
             </a:r>
           </a:p>
           <a:p>
             <a:pPr lvl="1"/>
             <a:r>
-              <a:rPr lang="en-US" smtClean="0"/>
+              <a:rPr lang="en-US"/>
               <a:t>Second level</a:t>
             </a:r>
           </a:p>
           <a:p>
             <a:pPr lvl="2"/>
             <a:r>
-              <a:rPr lang="en-US" smtClean="0"/>
+              <a:rPr lang="en-US"/>
               <a:t>Third level</a:t>
             </a:r>
           </a:p>
           <a:p>
             <a:pPr lvl="3"/>
             <a:r>
-              <a:rPr lang="en-US" smtClean="0"/>
+              <a:rPr lang="en-US"/>
               <a:t>Fourth level</a:t>
             </a:r>
           </a:p>
           <a:p>
             <a:pPr lvl="4"/>
             <a:r>
-              <a:rPr lang="en-US" smtClean="0"/>
+              <a:rPr lang="en-US"/>
               <a:t>Fifth level</a:t>
             </a:r>
-            <a:endParaRPr lang="en-US"/>
           </a:p>
         </p:txBody>
       </p:sp>
@@ -4236,7 +4060,7 @@
           <a:p>
             <a:pPr lvl="0"/>
             <a:r>
-              <a:rPr lang="en-US" smtClean="0"/>
+              <a:rPr lang="en-US"/>
               <a:t>Click to edit Master text styles</a:t>
             </a:r>
           </a:p>
@@ -4259,7 +4083,7 @@
           <a:p>
             <a:fld id="{5BCAD085-E8A6-8845-BD4E-CB4CCA059FC4}" type="datetimeFigureOut">
               <a:rPr lang="en-US" smtClean="0"/>
-              <a:t>1/27/13</a:t>
+              <a:t>10/14/2026</a:t>
             </a:fld>
             <a:endParaRPr lang="en-US"/>
           </a:p>
@@ -4362,10 +4186,9 @@
           </a:lstStyle>
           <a:p>
             <a:r>
-              <a:rPr lang="en-US" smtClean="0"/>
+              <a:rPr lang="en-US"/>
               <a:t>Click to edit Master title style</a:t>
             </a:r>
-            <a:endParaRPr lang="en-US"/>
           </a:p>
         </p:txBody>
       </p:sp>
@@ -4489,7 +4312,7 @@
           <a:p>
             <a:pPr lvl="0"/>
             <a:r>
-              <a:rPr lang="en-US" smtClean="0"/>
+              <a:rPr lang="en-US"/>
               <a:t>Click to edit Master text styles</a:t>
             </a:r>
           </a:p>
@@ -4512,7 +4335,7 @@
           <a:p>
             <a:fld id="{5BCAD085-E8A6-8845-BD4E-CB4CCA059FC4}" type="datetimeFigureOut">
               <a:rPr lang="en-US" smtClean="0"/>
-              <a:t>1/27/13</a:t>
+              <a:t>10/14/2026</a:t>
             </a:fld>
             <a:endParaRPr lang="en-US"/>
           </a:p>
@@ -4621,10 +4444,9 @@
           <a:lstStyle/>
           <a:p>
             <a:r>
-              <a:rPr lang="en-US" smtClean="0"/>
+              <a:rPr lang="en-US"/>
               <a:t>Click to edit Master title style</a:t>
             </a:r>
-            <a:endParaRPr lang="en-US"/>
           </a:p>
         </p:txBody>
       </p:sp>
@@ -4655,38 +4477,37 @@
           <a:p>
             <a:pPr lvl="0"/>
             <a:r>
-              <a:rPr lang="en-US" smtClean="0"/>
+              <a:rPr lang="en-US"/>
               <a:t>Click to edit Master text styles</a:t>
             </a:r>
           </a:p>
           <a:p>
             <a:pPr lvl="1"/>
             <a:r>
-              <a:rPr lang="en-US" smtClean="0"/>
+              <a:rPr lang="en-US"/>
               <a:t>Second level</a:t>
             </a:r>
           </a:p>
           <a:p>
             <a:pPr lvl="2"/>
             <a:r>
-              <a:rPr lang="en-US" smtClean="0"/>
+              <a:rPr lang="en-US"/>
               <a:t>Third level</a:t>
             </a:r>
           </a:p>
           <a:p>
             <a:pPr lvl="3"/>
             <a:r>
-              <a:rPr lang="en-US" smtClean="0"/>
+              <a:rPr lang="en-US"/>
               <a:t>Fourth level</a:t>
             </a:r>
           </a:p>
           <a:p>
             <a:pPr lvl="4"/>
             <a:r>
-              <a:rPr lang="en-US" smtClean="0"/>
+              <a:rPr lang="en-US"/>
               <a:t>Fifth level</a:t>
             </a:r>
-            <a:endParaRPr lang="en-US"/>
           </a:p>
         </p:txBody>
       </p:sp>
@@ -4725,7 +4546,7 @@
           <a:p>
             <a:fld id="{5BCAD085-E8A6-8845-BD4E-CB4CCA059FC4}" type="datetimeFigureOut">
               <a:rPr lang="en-US" smtClean="0"/>
-              <a:t>1/27/13</a:t>
+              <a:t>10/14/2026</a:t>
             </a:fld>
             <a:endParaRPr lang="en-US"/>
           </a:p>
@@ -5084,7 +4905,7 @@
 </file>
 
 <file path=ppt/slides/slide1.xml><?xml version="1.0" encoding="utf-8"?>
-<p:sld xmlns:a="http://schemas.openxmlformats.org/drawingml/2006/main" xmlns:p="http://schemas.openxmlformats.org/presentationml/2006/main" xmlns:r="http://schemas.openxmlformats.org/officeDocument/2006/relationships">
+<p:sld xmlns:a="http://schemas.openxmlformats.org/drawingml/2006/main" xmlns:r="http://schemas.openxmlformats.org/officeDocument/2006/relationships" xmlns:p="http://schemas.openxmlformats.org/presentationml/2006/main">
   <p:cSld>
     <p:spTree>
       <p:nvGrpSpPr>
@@ -5092,7 +4913,14 @@
         <p:cNvGrpSpPr/>
         <p:nvPr/>
       </p:nvGrpSpPr>
-      <p:grpSpPr/>
+      <p:grpSpPr>
+        <a:xfrm>
+          <a:off x="0" y="0"/>
+          <a:ext cx="0" cy="0"/>
+          <a:chOff x="0" y="0"/>
+          <a:chExt cx="0" cy="0"/>
+        </a:xfrm>
+      </p:grpSpPr>
       <p:sp>
         <p:nvSpPr>
           <p:cNvPr id="2" name="Rectangle 1"/>
@@ -5133,6 +4961,7 @@
           <a:lstStyle/>
           <a:p>
             <a:pPr algn="ctr"/>
+            <a:endParaRPr/>
           </a:p>
         </p:txBody>
       </p:sp>
@@ -5176,6 +5005,7 @@
           <a:lstStyle/>
           <a:p>
             <a:pPr algn="ctr"/>
+            <a:endParaRPr/>
           </a:p>
         </p:txBody>
       </p:sp>
@@ -5188,7 +5018,7 @@
         <p:spPr>
           <a:xfrm>
             <a:off x="1097280" y="1097280"/>
-            <a:ext cx="10058400" cy="4114800"/>
+            <a:ext cx="10058400" cy="2785378"/>
           </a:xfrm>
           <a:prstGeom prst="rect">
             <a:avLst/>
@@ -5210,6 +5040,7 @@
               </a:defRPr>
             </a:pPr>
             <a:r>
+              <a:rPr dirty="0"/>
               <a:t>QISKIT FALL FEST 2026 CHALLENGE: HYPERBOLIC FUTURES</a:t>
             </a:r>
           </a:p>
@@ -5223,43 +5054,57 @@
               </a:defRPr>
             </a:pPr>
             <a:r>
-              <a:t>QWeave: Geometry-Aware Quantum Routing</a:t>
-            </a:r>
-            <a:br/>
-            <a:r>
-              <a:t>&amp; Parity Postselection</a:t>
-            </a:r>
-          </a:p>
-          <a:p>
-            <a:br/>
-            <a:pPr>
-              <a:defRPr sz="1600">
-                <a:solidFill>
-                  <a:srgbClr val="475569"/>
-                </a:solidFill>
-                <a:latin typeface="Calibri"/>
-              </a:defRPr>
-            </a:pPr>
-            <a:r>
+              <a:rPr dirty="0" err="1"/>
+              <a:t>QWeave</a:t>
+            </a:r>
+            <a:r>
+              <a:rPr dirty="0"/>
+              <a:t>: Geometry-Aware Quantum Routing</a:t>
+            </a:r>
+            <a:br>
+              <a:rPr dirty="0"/>
+            </a:br>
+            <a:r>
+              <a:rPr dirty="0"/>
+              <a:t>&amp; Parity </a:t>
+            </a:r>
+            <a:r>
+              <a:rPr dirty="0" err="1"/>
+              <a:t>Postselection</a:t>
+            </a:r>
+            <a:endParaRPr dirty="0"/>
+          </a:p>
+          <a:p>
+            <a:br>
+              <a:rPr dirty="0"/>
+            </a:br>
+            <a:r>
+              <a:rPr dirty="0"/>
               <a:t>Auditing Quantum Multipath Routing Protection (QMRP) across 2016, Heavy-Hex &amp; Hyperbolic Lattices</a:t>
             </a:r>
           </a:p>
           <a:p>
-            <a:br/>
-            <a:pPr>
-              <a:defRPr sz="1300">
-                <a:solidFill>
-                  <a:srgbClr val="0F172A"/>
-                </a:solidFill>
-                <a:latin typeface="Calibri"/>
-              </a:defRPr>
-            </a:pPr>
-            <a:r>
-              <a:t>Team Members: Aaron Huang  •  Calvin Cheng  •  Bhaskar Mahajan (bhaskarmahajan98@gmail.com)</a:t>
-            </a:r>
-            <a:br/>
-            <a:r>
-              <a:t>Host: quanTA, University of Saskatchewan (Prof. Steven Rayan)</a:t>
+            <a:br>
+              <a:rPr dirty="0"/>
+            </a:br>
+            <a:r>
+              <a:rPr dirty="0"/>
+              <a:t>Team Members: Aaron Huang  •  Calvin Cheng  •  Bhaskar Mahajan </a:t>
+            </a:r>
+            <a:br>
+              <a:rPr lang="en-GB" dirty="0"/>
+            </a:br>
+            <a:r>
+              <a:rPr dirty="0"/>
+              <a:t>Host: </a:t>
+            </a:r>
+            <a:r>
+              <a:rPr dirty="0" err="1"/>
+              <a:t>quanTA</a:t>
+            </a:r>
+            <a:r>
+              <a:rPr dirty="0"/>
+              <a:t>, University of Saskatchewan (Prof. Steven Rayan)</a:t>
             </a:r>
           </a:p>
         </p:txBody>
@@ -5273,7 +5118,7 @@
 </file>
 
 <file path=ppt/slides/slide10.xml><?xml version="1.0" encoding="utf-8"?>
-<p:sld xmlns:a="http://schemas.openxmlformats.org/drawingml/2006/main" xmlns:p="http://schemas.openxmlformats.org/presentationml/2006/main" xmlns:r="http://schemas.openxmlformats.org/officeDocument/2006/relationships">
+<p:sld xmlns:a="http://schemas.openxmlformats.org/drawingml/2006/main" xmlns:r="http://schemas.openxmlformats.org/officeDocument/2006/relationships" xmlns:p="http://schemas.openxmlformats.org/presentationml/2006/main">
   <p:cSld>
     <p:spTree>
       <p:nvGrpSpPr>
@@ -5281,7 +5126,14 @@
         <p:cNvGrpSpPr/>
         <p:nvPr/>
       </p:nvGrpSpPr>
-      <p:grpSpPr/>
+      <p:grpSpPr>
+        <a:xfrm>
+          <a:off x="0" y="0"/>
+          <a:ext cx="0" cy="0"/>
+          <a:chOff x="0" y="0"/>
+          <a:chExt cx="0" cy="0"/>
+        </a:xfrm>
+      </p:grpSpPr>
       <p:sp>
         <p:nvSpPr>
           <p:cNvPr id="2" name="Rectangle 1"/>
@@ -5322,6 +5174,7 @@
           <a:lstStyle/>
           <a:p>
             <a:pPr algn="ctr"/>
+            <a:endParaRPr/>
           </a:p>
         </p:txBody>
       </p:sp>
@@ -5452,6 +5305,7 @@
           <a:lstStyle/>
           <a:p>
             <a:pPr algn="ctr"/>
+            <a:endParaRPr/>
           </a:p>
         </p:txBody>
       </p:sp>
@@ -5490,13 +5344,6 @@
           </a:p>
           <a:p>
             <a:br/>
-            <a:pPr>
-              <a:defRPr sz="1200">
-                <a:solidFill>
-                  <a:srgbClr val="0F172A"/>
-                </a:solidFill>
-              </a:defRPr>
-            </a:pPr>
             <a:r>
               <a:t>✔ Single Bit-Flip Errors (Pauli X):</a:t>
             </a:r>
@@ -5507,13 +5354,6 @@
           </a:p>
           <a:p>
             <a:br/>
-            <a:pPr>
-              <a:defRPr sz="1200">
-                <a:solidFill>
-                  <a:srgbClr val="0F172A"/>
-                </a:solidFill>
-              </a:defRPr>
-            </a:pPr>
             <a:r>
               <a:t>✔ Proof of Conditional Purification:</a:t>
             </a:r>
@@ -5578,6 +5418,7 @@
           <a:lstStyle/>
           <a:p>
             <a:pPr algn="ctr"/>
+            <a:endParaRPr/>
           </a:p>
         </p:txBody>
       </p:sp>
@@ -5616,13 +5457,6 @@
           </a:p>
           <a:p>
             <a:br/>
-            <a:pPr>
-              <a:defRPr sz="1200" b="1">
-                <a:solidFill>
-                  <a:srgbClr val="0F172A"/>
-                </a:solidFill>
-              </a:defRPr>
-            </a:pPr>
             <a:r>
               <a:t>• Phase-Flip Errors (Pauli Z): </a:t>
             </a:r>
@@ -5641,13 +5475,6 @@
           </a:p>
           <a:p>
             <a:br/>
-            <a:pPr>
-              <a:defRPr sz="1200" b="1">
-                <a:solidFill>
-                  <a:srgbClr val="0F172A"/>
-                </a:solidFill>
-              </a:defRPr>
-            </a:pPr>
             <a:r>
               <a:t>• Correlated Double Bit-Flips (X ⊗ X): </a:t>
             </a:r>
@@ -5666,13 +5493,6 @@
           </a:p>
           <a:p>
             <a:br/>
-            <a:pPr>
-              <a:defRPr sz="1200" b="1">
-                <a:solidFill>
-                  <a:srgbClr val="0F172A"/>
-                </a:solidFill>
-              </a:defRPr>
-            </a:pPr>
             <a:r>
               <a:t>• Idle Decoherence on Port A: </a:t>
             </a:r>
@@ -5691,13 +5511,6 @@
           </a:p>
           <a:p>
             <a:br/>
-            <a:pPr>
-              <a:defRPr sz="1200" b="1">
-                <a:solidFill>
-                  <a:srgbClr val="0F172A"/>
-                </a:solidFill>
-              </a:defRPr>
-            </a:pPr>
             <a:r>
               <a:t>• Encoding &amp; Decoding Gate Faults: </a:t>
             </a:r>
@@ -5725,7 +5538,7 @@
 </file>
 
 <file path=ppt/slides/slide11.xml><?xml version="1.0" encoding="utf-8"?>
-<p:sld xmlns:a="http://schemas.openxmlformats.org/drawingml/2006/main" xmlns:p="http://schemas.openxmlformats.org/presentationml/2006/main" xmlns:r="http://schemas.openxmlformats.org/officeDocument/2006/relationships">
+<p:sld xmlns:a="http://schemas.openxmlformats.org/drawingml/2006/main" xmlns:r="http://schemas.openxmlformats.org/officeDocument/2006/relationships" xmlns:p="http://schemas.openxmlformats.org/presentationml/2006/main">
   <p:cSld>
     <p:spTree>
       <p:nvGrpSpPr>
@@ -5733,7 +5546,14 @@
         <p:cNvGrpSpPr/>
         <p:nvPr/>
       </p:nvGrpSpPr>
-      <p:grpSpPr/>
+      <p:grpSpPr>
+        <a:xfrm>
+          <a:off x="0" y="0"/>
+          <a:ext cx="0" cy="0"/>
+          <a:chOff x="0" y="0"/>
+          <a:chExt cx="0" cy="0"/>
+        </a:xfrm>
+      </p:grpSpPr>
       <p:sp>
         <p:nvSpPr>
           <p:cNvPr id="2" name="Rectangle 1"/>
@@ -5774,6 +5594,7 @@
           <a:lstStyle/>
           <a:p>
             <a:pPr algn="ctr"/>
+            <a:endParaRPr/>
           </a:p>
         </p:txBody>
       </p:sp>
@@ -5904,6 +5725,7 @@
           <a:lstStyle/>
           <a:p>
             <a:pPr algn="ctr"/>
+            <a:endParaRPr/>
           </a:p>
         </p:txBody>
       </p:sp>
@@ -5954,13 +5776,6 @@
           </a:p>
           <a:p>
             <a:br/>
-            <a:pPr>
-              <a:defRPr sz="1400" b="1">
-                <a:solidFill>
-                  <a:srgbClr val="0F172A"/>
-                </a:solidFill>
-              </a:defRPr>
-            </a:pPr>
             <a:r>
               <a:t>Tier 1: Short-to-Medium Distances (d ≤ 4 hops):</a:t>
             </a:r>
@@ -5979,13 +5794,6 @@
           </a:p>
           <a:p>
             <a:br/>
-            <a:pPr>
-              <a:defRPr sz="1400" b="1">
-                <a:solidFill>
-                  <a:srgbClr val="0F172A"/>
-                </a:solidFill>
-              </a:defRPr>
-            </a:pPr>
             <a:r>
               <a:t>Tier 2: High-Connectivity Geometries (Hyperbolic Lattices, d ≥ 5 hops):</a:t>
             </a:r>
@@ -6021,7 +5829,7 @@
 </file>
 
 <file path=ppt/slides/slide12.xml><?xml version="1.0" encoding="utf-8"?>
-<p:sld xmlns:a="http://schemas.openxmlformats.org/drawingml/2006/main" xmlns:p="http://schemas.openxmlformats.org/presentationml/2006/main" xmlns:r="http://schemas.openxmlformats.org/officeDocument/2006/relationships">
+<p:sld xmlns:a="http://schemas.openxmlformats.org/drawingml/2006/main" xmlns:r="http://schemas.openxmlformats.org/officeDocument/2006/relationships" xmlns:p="http://schemas.openxmlformats.org/presentationml/2006/main">
   <p:cSld>
     <p:spTree>
       <p:nvGrpSpPr>
@@ -6029,7 +5837,14 @@
         <p:cNvGrpSpPr/>
         <p:nvPr/>
       </p:nvGrpSpPr>
-      <p:grpSpPr/>
+      <p:grpSpPr>
+        <a:xfrm>
+          <a:off x="0" y="0"/>
+          <a:ext cx="0" cy="0"/>
+          <a:chOff x="0" y="0"/>
+          <a:chExt cx="0" cy="0"/>
+        </a:xfrm>
+      </p:grpSpPr>
       <p:sp>
         <p:nvSpPr>
           <p:cNvPr id="2" name="Rectangle 1"/>
@@ -6070,6 +5885,7 @@
           <a:lstStyle/>
           <a:p>
             <a:pPr algn="ctr"/>
+            <a:endParaRPr/>
           </a:p>
         </p:txBody>
       </p:sp>
@@ -6200,6 +6016,7 @@
           <a:lstStyle/>
           <a:p>
             <a:pPr algn="ctr"/>
+            <a:endParaRPr/>
           </a:p>
         </p:txBody>
       </p:sp>
@@ -6238,13 +6055,6 @@
           </a:p>
           <a:p>
             <a:br/>
-            <a:pPr>
-              <a:defRPr sz="1200" b="1">
-                <a:solidFill>
-                  <a:srgbClr val="0F172A"/>
-                </a:solidFill>
-              </a:defRPr>
-            </a:pPr>
             <a:r>
               <a:t>• Full CSS Surface Encodings: </a:t>
             </a:r>
@@ -6263,13 +6073,6 @@
           </a:p>
           <a:p>
             <a:br/>
-            <a:pPr>
-              <a:defRPr sz="1200" b="1">
-                <a:solidFill>
-                  <a:srgbClr val="0F172A"/>
-                </a:solidFill>
-              </a:defRPr>
-            </a:pPr>
             <a:r>
               <a:t>• Arbitrary Circuit Multi-Qubit Routing: </a:t>
             </a:r>
@@ -6288,13 +6091,6 @@
           </a:p>
           <a:p>
             <a:br/>
-            <a:pPr>
-              <a:defRPr sz="1200" b="1">
-                <a:solidFill>
-                  <a:srgbClr val="0F172A"/>
-                </a:solidFill>
-              </a:defRPr>
-            </a:pPr>
             <a:r>
               <a:t>• Physical Hardware Validation: </a:t>
             </a:r>
@@ -6355,6 +6151,7 @@
           <a:lstStyle/>
           <a:p>
             <a:pPr algn="ctr"/>
+            <a:endParaRPr/>
           </a:p>
         </p:txBody>
       </p:sp>
@@ -6393,13 +6190,6 @@
           </a:p>
           <a:p>
             <a:br/>
-            <a:pPr>
-              <a:defRPr sz="1200" b="1">
-                <a:solidFill>
-                  <a:srgbClr val="0F172A"/>
-                </a:solidFill>
-              </a:defRPr>
-            </a:pPr>
             <a:r>
               <a:t>• Noise-Aware Compiler Mappings (ASPLOS '19)</a:t>
             </a:r>
@@ -6422,13 +6212,6 @@
           </a:p>
           <a:p>
             <a:br/>
-            <a:pPr>
-              <a:defRPr sz="1200" b="1">
-                <a:solidFill>
-                  <a:srgbClr val="0F172A"/>
-                </a:solidFill>
-              </a:defRPr>
-            </a:pPr>
             <a:r>
               <a:t>• Hyperbolic Codes &amp; QMRP (quanTA USask, 2026)</a:t>
             </a:r>
@@ -6455,13 +6238,6 @@
           </a:p>
           <a:p>
             <a:br/>
-            <a:pPr>
-              <a:defRPr sz="1200" b="1">
-                <a:solidFill>
-                  <a:srgbClr val="0F172A"/>
-                </a:solidFill>
-              </a:defRPr>
-            </a:pPr>
             <a:r>
               <a:t>• Acknowledgements:</a:t>
             </a:r>
@@ -6493,7 +6269,7 @@
 </file>
 
 <file path=ppt/slides/slide2.xml><?xml version="1.0" encoding="utf-8"?>
-<p:sld xmlns:a="http://schemas.openxmlformats.org/drawingml/2006/main" xmlns:p="http://schemas.openxmlformats.org/presentationml/2006/main" xmlns:r="http://schemas.openxmlformats.org/officeDocument/2006/relationships">
+<p:sld xmlns:a="http://schemas.openxmlformats.org/drawingml/2006/main" xmlns:r="http://schemas.openxmlformats.org/officeDocument/2006/relationships" xmlns:p="http://schemas.openxmlformats.org/presentationml/2006/main">
   <p:cSld>
     <p:spTree>
       <p:nvGrpSpPr>
@@ -6501,7 +6277,14 @@
         <p:cNvGrpSpPr/>
         <p:nvPr/>
       </p:nvGrpSpPr>
-      <p:grpSpPr/>
+      <p:grpSpPr>
+        <a:xfrm>
+          <a:off x="0" y="0"/>
+          <a:ext cx="0" cy="0"/>
+          <a:chOff x="0" y="0"/>
+          <a:chExt cx="0" cy="0"/>
+        </a:xfrm>
+      </p:grpSpPr>
       <p:sp>
         <p:nvSpPr>
           <p:cNvPr id="2" name="Rectangle 1"/>
@@ -6542,6 +6325,7 @@
           <a:lstStyle/>
           <a:p>
             <a:pPr algn="ctr"/>
+            <a:endParaRPr/>
           </a:p>
         </p:txBody>
       </p:sp>
@@ -6672,6 +6456,7 @@
           <a:lstStyle/>
           <a:p>
             <a:pPr algn="ctr"/>
+            <a:endParaRPr/>
           </a:p>
         </p:txBody>
       </p:sp>
@@ -6710,13 +6495,6 @@
           </a:p>
           <a:p>
             <a:br/>
-            <a:pPr>
-              <a:defRPr sz="1300" b="1">
-                <a:solidFill>
-                  <a:srgbClr val="0F172A"/>
-                </a:solidFill>
-              </a:defRPr>
-            </a:pPr>
             <a:r>
               <a:t>• Limited Physical Connectivity: </a:t>
             </a:r>
@@ -6735,13 +6513,6 @@
           </a:p>
           <a:p>
             <a:br/>
-            <a:pPr>
-              <a:defRPr sz="1300" b="1">
-                <a:solidFill>
-                  <a:srgbClr val="0F172A"/>
-                </a:solidFill>
-              </a:defRPr>
-            </a:pPr>
             <a:r>
               <a:t>• Compounding Gate Noise: </a:t>
             </a:r>
@@ -6760,13 +6531,6 @@
           </a:p>
           <a:p>
             <a:br/>
-            <a:pPr>
-              <a:defRPr sz="1300" b="1">
-                <a:solidFill>
-                  <a:srgbClr val="0F172A"/>
-                </a:solidFill>
-              </a:defRPr>
-            </a:pPr>
             <a:r>
               <a:t>• The Scaling Trap: </a:t>
             </a:r>
@@ -6827,6 +6591,7 @@
           <a:lstStyle/>
           <a:p>
             <a:pPr algn="ctr"/>
+            <a:endParaRPr/>
           </a:p>
         </p:txBody>
       </p:sp>
@@ -6865,13 +6630,6 @@
           </a:p>
           <a:p>
             <a:br/>
-            <a:pPr>
-              <a:defRPr sz="1300" b="1">
-                <a:solidFill>
-                  <a:srgbClr val="0F172A"/>
-                </a:solidFill>
-              </a:defRPr>
-            </a:pPr>
             <a:r>
               <a:t>• Quantum Multipath Routing (QMRP): </a:t>
             </a:r>
@@ -6890,13 +6648,6 @@
           </a:p>
           <a:p>
             <a:br/>
-            <a:pPr>
-              <a:defRPr sz="1300" b="1">
-                <a:solidFill>
-                  <a:srgbClr val="0F172A"/>
-                </a:solidFill>
-              </a:defRPr>
-            </a:pPr>
             <a:r>
               <a:t>• Hyperbolic Geometry: </a:t>
             </a:r>
@@ -6915,13 +6666,6 @@
           </a:p>
           <a:p>
             <a:br/>
-            <a:pPr>
-              <a:defRPr sz="1300" b="1">
-                <a:solidFill>
-                  <a:srgbClr val="0F172A"/>
-                </a:solidFill>
-              </a:defRPr>
-            </a:pPr>
             <a:r>
               <a:t>• The Trade-off Dilemma: </a:t>
             </a:r>
@@ -6949,7 +6693,7 @@
 </file>
 
 <file path=ppt/slides/slide3.xml><?xml version="1.0" encoding="utf-8"?>
-<p:sld xmlns:a="http://schemas.openxmlformats.org/drawingml/2006/main" xmlns:p="http://schemas.openxmlformats.org/presentationml/2006/main" xmlns:r="http://schemas.openxmlformats.org/officeDocument/2006/relationships">
+<p:sld xmlns:a="http://schemas.openxmlformats.org/drawingml/2006/main" xmlns:r="http://schemas.openxmlformats.org/officeDocument/2006/relationships" xmlns:p="http://schemas.openxmlformats.org/presentationml/2006/main">
   <p:cSld>
     <p:spTree>
       <p:nvGrpSpPr>
@@ -6957,7 +6701,14 @@
         <p:cNvGrpSpPr/>
         <p:nvPr/>
       </p:nvGrpSpPr>
-      <p:grpSpPr/>
+      <p:grpSpPr>
+        <a:xfrm>
+          <a:off x="0" y="0"/>
+          <a:ext cx="0" cy="0"/>
+          <a:chOff x="0" y="0"/>
+          <a:chExt cx="0" cy="0"/>
+        </a:xfrm>
+      </p:grpSpPr>
       <p:sp>
         <p:nvSpPr>
           <p:cNvPr id="2" name="Rectangle 1"/>
@@ -6998,6 +6749,7 @@
           <a:lstStyle/>
           <a:p>
             <a:pPr algn="ctr"/>
+            <a:endParaRPr/>
           </a:p>
         </p:txBody>
       </p:sp>
@@ -7128,6 +6880,7 @@
           <a:lstStyle/>
           <a:p>
             <a:pPr algn="ctr"/>
+            <a:endParaRPr/>
           </a:p>
         </p:txBody>
       </p:sp>
@@ -7166,13 +6919,6 @@
           </a:p>
           <a:p>
             <a:br/>
-            <a:pPr>
-              <a:defRPr sz="1200" b="1">
-                <a:solidFill>
-                  <a:srgbClr val="2563EB"/>
-                </a:solidFill>
-              </a:defRPr>
-            </a:pPr>
             <a:r>
               <a:t>• Local Aer Emulation: </a:t>
             </a:r>
@@ -7191,13 +6937,6 @@
           </a:p>
           <a:p>
             <a:br/>
-            <a:pPr>
-              <a:defRPr sz="1200" b="1">
-                <a:solidFill>
-                  <a:srgbClr val="2563EB"/>
-                </a:solidFill>
-              </a:defRPr>
-            </a:pPr>
             <a:r>
               <a:t>• Fixed Seed Control: </a:t>
             </a:r>
@@ -7216,13 +6955,6 @@
           </a:p>
           <a:p>
             <a:br/>
-            <a:pPr>
-              <a:defRPr sz="1200" b="1">
-                <a:solidFill>
-                  <a:srgbClr val="2563EB"/>
-                </a:solidFill>
-              </a:defRPr>
-            </a:pPr>
             <a:r>
               <a:t>• Locked Dependencies: </a:t>
             </a:r>
@@ -7283,6 +7015,7 @@
           <a:lstStyle/>
           <a:p>
             <a:pPr algn="ctr"/>
+            <a:endParaRPr/>
           </a:p>
         </p:txBody>
       </p:sp>
@@ -7321,13 +7054,6 @@
           </a:p>
           <a:p>
             <a:br/>
-            <a:pPr>
-              <a:defRPr sz="1200" b="1">
-                <a:solidFill>
-                  <a:srgbClr val="2563EB"/>
-                </a:solidFill>
-              </a:defRPr>
-            </a:pPr>
             <a:r>
               <a:t>• IBM FakeSherbrooke: </a:t>
             </a:r>
@@ -7346,13 +7072,6 @@
           </a:p>
           <a:p>
             <a:br/>
-            <a:pPr>
-              <a:defRPr sz="1200" b="1">
-                <a:solidFill>
-                  <a:srgbClr val="2563EB"/>
-                </a:solidFill>
-              </a:defRPr>
-            </a:pPr>
             <a:r>
               <a:t>• GenericBackendV2: </a:t>
             </a:r>
@@ -7371,13 +7090,6 @@
           </a:p>
           <a:p>
             <a:br/>
-            <a:pPr>
-              <a:defRPr sz="1200" b="1">
-                <a:solidFill>
-                  <a:srgbClr val="2563EB"/>
-                </a:solidFill>
-              </a:defRPr>
-            </a:pPr>
             <a:r>
               <a:t>• Native Gate Basis: </a:t>
             </a:r>
@@ -7438,6 +7150,7 @@
           <a:lstStyle/>
           <a:p>
             <a:pPr algn="ctr"/>
+            <a:endParaRPr/>
           </a:p>
         </p:txBody>
       </p:sp>
@@ -7476,13 +7189,6 @@
           </a:p>
           <a:p>
             <a:br/>
-            <a:pPr>
-              <a:defRPr sz="1200" b="1">
-                <a:solidFill>
-                  <a:srgbClr val="2563EB"/>
-                </a:solidFill>
-              </a:defRPr>
-            </a:pPr>
             <a:r>
               <a:t>• Zero-Tolerance Audit: </a:t>
             </a:r>
@@ -7501,13 +7207,6 @@
           </a:p>
           <a:p>
             <a:br/>
-            <a:pPr>
-              <a:defRPr sz="1200" b="1">
-                <a:solidFill>
-                  <a:srgbClr val="2563EB"/>
-                </a:solidFill>
-              </a:defRPr>
-            </a:pPr>
             <a:r>
               <a:t>• Ideal Proof: </a:t>
             </a:r>
@@ -7526,13 +7225,6 @@
           </a:p>
           <a:p>
             <a:br/>
-            <a:pPr>
-              <a:defRPr sz="1200" b="1">
-                <a:solidFill>
-                  <a:srgbClr val="2563EB"/>
-                </a:solidFill>
-              </a:defRPr>
-            </a:pPr>
             <a:r>
               <a:t>• PassManager Level 3: </a:t>
             </a:r>
@@ -7560,7 +7252,7 @@
 </file>
 
 <file path=ppt/slides/slide4.xml><?xml version="1.0" encoding="utf-8"?>
-<p:sld xmlns:a="http://schemas.openxmlformats.org/drawingml/2006/main" xmlns:p="http://schemas.openxmlformats.org/presentationml/2006/main" xmlns:r="http://schemas.openxmlformats.org/officeDocument/2006/relationships">
+<p:sld xmlns:a="http://schemas.openxmlformats.org/drawingml/2006/main" xmlns:r="http://schemas.openxmlformats.org/officeDocument/2006/relationships" xmlns:p="http://schemas.openxmlformats.org/presentationml/2006/main">
   <p:cSld>
     <p:spTree>
       <p:nvGrpSpPr>
@@ -7568,7 +7260,14 @@
         <p:cNvGrpSpPr/>
         <p:nvPr/>
       </p:nvGrpSpPr>
-      <p:grpSpPr/>
+      <p:grpSpPr>
+        <a:xfrm>
+          <a:off x="0" y="0"/>
+          <a:ext cx="0" cy="0"/>
+          <a:chOff x="0" y="0"/>
+          <a:chExt cx="0" cy="0"/>
+        </a:xfrm>
+      </p:grpSpPr>
       <p:sp>
         <p:nvSpPr>
           <p:cNvPr id="2" name="Rectangle 1"/>
@@ -7609,6 +7308,7 @@
           <a:lstStyle/>
           <a:p>
             <a:pPr algn="ctr"/>
+            <a:endParaRPr/>
           </a:p>
         </p:txBody>
       </p:sp>
@@ -7739,6 +7439,7 @@
           <a:lstStyle/>
           <a:p>
             <a:pPr algn="ctr"/>
+            <a:endParaRPr/>
           </a:p>
         </p:txBody>
       </p:sp>
@@ -7777,13 +7478,6 @@
           </a:p>
           <a:p>
             <a:br/>
-            <a:pPr>
-              <a:defRPr sz="1100" b="1">
-                <a:solidFill>
-                  <a:srgbClr val="0F172A"/>
-                </a:solidFill>
-              </a:defRPr>
-            </a:pPr>
             <a:r>
               <a:t>• 1. Bell Pair Generation: </a:t>
             </a:r>
@@ -7802,13 +7496,6 @@
           </a:p>
           <a:p>
             <a:br/>
-            <a:pPr>
-              <a:defRPr sz="1100" b="1">
-                <a:solidFill>
-                  <a:srgbClr val="0F172A"/>
-                </a:solidFill>
-              </a:defRPr>
-            </a:pPr>
             <a:r>
               <a:t>• 2. Two-Rail Repetition Encoding: </a:t>
             </a:r>
@@ -7827,13 +7514,6 @@
           </a:p>
           <a:p>
             <a:br/>
-            <a:pPr>
-              <a:defRPr sz="1100" b="1">
-                <a:solidFill>
-                  <a:srgbClr val="0F172A"/>
-                </a:solidFill>
-              </a:defRPr>
-            </a:pPr>
             <a:r>
               <a:t>• 3. Disjoint Dual-Rail Transport: </a:t>
             </a:r>
@@ -7852,13 +7532,6 @@
           </a:p>
           <a:p>
             <a:br/>
-            <a:pPr>
-              <a:defRPr sz="1100" b="1">
-                <a:solidFill>
-                  <a:srgbClr val="0F172A"/>
-                </a:solidFill>
-              </a:defRPr>
-            </a:pPr>
             <a:r>
               <a:t>• 4. Decoding &amp; Parity Postselection: </a:t>
             </a:r>
@@ -7877,13 +7550,6 @@
           </a:p>
           <a:p>
             <a:br/>
-            <a:pPr>
-              <a:defRPr sz="1100" b="1">
-                <a:solidFill>
-                  <a:srgbClr val="0F172A"/>
-                </a:solidFill>
-              </a:defRPr>
-            </a:pPr>
             <a:r>
               <a:t>• 5. Shot Filtering: </a:t>
             </a:r>
@@ -7944,6 +7610,7 @@
           <a:lstStyle/>
           <a:p>
             <a:pPr algn="ctr"/>
+            <a:endParaRPr/>
           </a:p>
         </p:txBody>
       </p:sp>
@@ -7982,13 +7649,6 @@
           </a:p>
           <a:p>
             <a:br/>
-            <a:pPr>
-              <a:defRPr sz="1100" b="1">
-                <a:solidFill>
-                  <a:srgbClr val="0F172A"/>
-                </a:solidFill>
-              </a:defRPr>
-            </a:pPr>
             <a:r>
               <a:t>• Bell State Fidelity Formula:</a:t>
             </a:r>
@@ -8015,13 +7675,6 @@
           </a:p>
           <a:p>
             <a:br/>
-            <a:pPr>
-              <a:defRPr sz="1100" b="1">
-                <a:solidFill>
-                  <a:srgbClr val="0F172A"/>
-                </a:solidFill>
-              </a:defRPr>
-            </a:pPr>
             <a:r>
               <a:t>• How Parity Traps Bit-Flips:</a:t>
             </a:r>
@@ -8044,13 +7697,6 @@
           </a:p>
           <a:p>
             <a:br/>
-            <a:pPr>
-              <a:defRPr sz="1100" b="1">
-                <a:solidFill>
-                  <a:srgbClr val="0F172A"/>
-                </a:solidFill>
-              </a:defRPr>
-            </a:pPr>
             <a:r>
               <a:t>• Zero-Input Movement Optimization:</a:t>
             </a:r>
@@ -8082,7 +7728,7 @@
 </file>
 
 <file path=ppt/slides/slide5.xml><?xml version="1.0" encoding="utf-8"?>
-<p:sld xmlns:a="http://schemas.openxmlformats.org/drawingml/2006/main" xmlns:p="http://schemas.openxmlformats.org/presentationml/2006/main" xmlns:r="http://schemas.openxmlformats.org/officeDocument/2006/relationships">
+<p:sld xmlns:a="http://schemas.openxmlformats.org/drawingml/2006/main" xmlns:r="http://schemas.openxmlformats.org/officeDocument/2006/relationships" xmlns:p="http://schemas.openxmlformats.org/presentationml/2006/main">
   <p:cSld>
     <p:spTree>
       <p:nvGrpSpPr>
@@ -8090,7 +7736,14 @@
         <p:cNvGrpSpPr/>
         <p:nvPr/>
       </p:nvGrpSpPr>
-      <p:grpSpPr/>
+      <p:grpSpPr>
+        <a:xfrm>
+          <a:off x="0" y="0"/>
+          <a:ext cx="0" cy="0"/>
+          <a:chOff x="0" y="0"/>
+          <a:chExt cx="0" cy="0"/>
+        </a:xfrm>
+      </p:grpSpPr>
       <p:sp>
         <p:nvSpPr>
           <p:cNvPr id="2" name="Rectangle 1"/>
@@ -8131,6 +7784,7 @@
           <a:lstStyle/>
           <a:p>
             <a:pPr algn="ctr"/>
+            <a:endParaRPr/>
           </a:p>
         </p:txBody>
       </p:sp>
@@ -8261,6 +7915,7 @@
           <a:lstStyle/>
           <a:p>
             <a:pPr algn="ctr"/>
+            <a:endParaRPr/>
           </a:p>
         </p:txBody>
       </p:sp>
@@ -8319,27 +7974,80 @@
           </a:p>
         </p:txBody>
       </p:sp>
-      <p:sp>
-        <p:nvSpPr>
-          <p:cNvPr id="7" name="Rounded Rectangle 6"/>
+      <p:pic>
+        <p:nvPicPr>
+          <p:cNvPr id="9" name="Picture 8">
+            <a:extLst>
+              <a:ext uri="{FF2B5EF4-FFF2-40B4-BE49-F238E27FC236}">
+                <a16:creationId xmlns:a16="http://schemas.microsoft.com/office/drawing/2014/main" id="{C46E6D61-8E73-208E-DF0D-2FF4A33B2A9A}"/>
+              </a:ext>
+            </a:extLst>
+          </p:cNvPr>
+          <p:cNvPicPr>
+            <a:picLocks noChangeAspect="1"/>
+          </p:cNvPicPr>
+          <p:nvPr/>
+        </p:nvPicPr>
+        <p:blipFill>
+          <a:blip r:embed="rId3"/>
+          <a:stretch>
+            <a:fillRect/>
+          </a:stretch>
+        </p:blipFill>
+        <p:spPr>
+          <a:xfrm>
+            <a:off x="2706107" y="2953407"/>
+            <a:ext cx="6779480" cy="3282801"/>
+          </a:xfrm>
+          <a:prstGeom prst="rect">
+            <a:avLst/>
+          </a:prstGeom>
+        </p:spPr>
+      </p:pic>
+    </p:spTree>
+  </p:cSld>
+  <p:clrMapOvr>
+    <a:masterClrMapping/>
+  </p:clrMapOvr>
+</p:sld>
+</file>
+
+<file path=ppt/slides/slide6.xml><?xml version="1.0" encoding="utf-8"?>
+<p:sld xmlns:a="http://schemas.openxmlformats.org/drawingml/2006/main" xmlns:r="http://schemas.openxmlformats.org/officeDocument/2006/relationships" xmlns:p="http://schemas.openxmlformats.org/presentationml/2006/main">
+  <p:cSld>
+    <p:spTree>
+      <p:nvGrpSpPr>
+        <p:cNvPr id="1" name=""/>
+        <p:cNvGrpSpPr/>
+        <p:nvPr/>
+      </p:nvGrpSpPr>
+      <p:grpSpPr>
+        <a:xfrm>
+          <a:off x="0" y="0"/>
+          <a:ext cx="0" cy="0"/>
+          <a:chOff x="0" y="0"/>
+          <a:chExt cx="0" cy="0"/>
+        </a:xfrm>
+      </p:grpSpPr>
+      <p:sp>
+        <p:nvSpPr>
+          <p:cNvPr id="2" name="Rectangle 1"/>
           <p:cNvSpPr/>
           <p:nvPr/>
         </p:nvSpPr>
         <p:spPr>
           <a:xfrm>
-            <a:off x="731520" y="2606040"/>
-            <a:ext cx="10698480" cy="3840480"/>
-          </a:xfrm>
-          <a:prstGeom prst="roundRect">
+            <a:off x="0" y="0"/>
+            <a:ext cx="12191695" cy="6858000"/>
+          </a:xfrm>
+          <a:prstGeom prst="rect">
             <a:avLst/>
           </a:prstGeom>
           <a:solidFill>
-            <a:srgbClr val="EFF6FF"/>
+            <a:srgbClr val="F8FAFC"/>
           </a:solidFill>
-          <a:ln w="19050">
-            <a:solidFill>
-              <a:srgbClr val="BFDBFE"/>
-            </a:solidFill>
+          <a:ln>
+            <a:noFill/>
           </a:ln>
         </p:spPr>
         <p:style>
@@ -8357,99 +8065,120 @@
           </a:fontRef>
         </p:style>
         <p:txBody>
-          <a:bodyPr rtlCol="0" anchor="ctr" wrap="square" lIns="228600" rIns="228600"/>
-          <a:lstStyle/>
-          <a:p>
-            <a:pPr algn="ctr">
-              <a:defRPr sz="1200" b="1">
-                <a:solidFill>
-                  <a:srgbClr val="2563EB"/>
-                </a:solidFill>
-                <a:latin typeface="Calibri"/>
-              </a:defRPr>
-            </a:pPr>
-            <a:r>
-              <a:t>🖼️  LARGE SCREENSHOT PLACEHOLDER</a:t>
-            </a:r>
-          </a:p>
-          <a:p>
-            <a:pPr algn="ctr">
-              <a:defRPr sz="1500" b="1">
-                <a:solidFill>
-                  <a:srgbClr val="0F172A"/>
-                </a:solidFill>
-                <a:latin typeface="Calibri"/>
-              </a:defRPr>
-            </a:pPr>
-            <a:r>
-              <a:t>Five-Node Coupling Graph &amp; Transpiled Circuit Diagram</a:t>
-            </a:r>
-          </a:p>
-          <a:p>
-            <a:pPr algn="ctr">
-              <a:defRPr sz="1100">
-                <a:solidFill>
-                  <a:srgbClr val="475569"/>
-                </a:solidFill>
-                <a:latin typeface="Calibri"/>
-              </a:defRPr>
-            </a:pPr>
-            <a:br/>
-            <a:r>
-              <a:t>Insert the Five-Node diagrams here:</a:t>
-            </a:r>
-            <a:br/>
-            <a:r>
-              <a:t>• Left: 5-node cycle topology graph with Ports 0 and 4 highlighted</a:t>
-            </a:r>
-            <a:br/>
-            <a:r>
-              <a:t>• Right: Transpiled native circuit (rz, sx, cx) showing the 4 phases</a:t>
-            </a:r>
-            <a:br/>
-            <a:r>
-              <a:t>(Exported from results/visual_summary.html or Circuit Diag.jpg)</a:t>
-            </a:r>
-          </a:p>
-        </p:txBody>
-      </p:sp>
-    </p:spTree>
-  </p:cSld>
-  <p:clrMapOvr>
-    <a:masterClrMapping/>
-  </p:clrMapOvr>
-</p:sld>
-</file>
-
-<file path=ppt/slides/slide6.xml><?xml version="1.0" encoding="utf-8"?>
-<p:sld xmlns:a="http://schemas.openxmlformats.org/drawingml/2006/main" xmlns:p="http://schemas.openxmlformats.org/presentationml/2006/main" xmlns:r="http://schemas.openxmlformats.org/officeDocument/2006/relationships">
-  <p:cSld>
-    <p:spTree>
-      <p:nvGrpSpPr>
-        <p:cNvPr id="1" name=""/>
-        <p:cNvGrpSpPr/>
-        <p:nvPr/>
-      </p:nvGrpSpPr>
-      <p:grpSpPr/>
-      <p:sp>
-        <p:nvSpPr>
-          <p:cNvPr id="2" name="Rectangle 1"/>
-          <p:cNvSpPr/>
+          <a:bodyPr rtlCol="0" anchor="ctr"/>
+          <a:lstStyle/>
+          <a:p>
+            <a:pPr algn="ctr"/>
+            <a:endParaRPr/>
+          </a:p>
+        </p:txBody>
+      </p:sp>
+      <p:sp>
+        <p:nvSpPr>
+          <p:cNvPr id="3" name="TextBox 2"/>
+          <p:cNvSpPr txBox="1"/>
           <p:nvPr/>
         </p:nvSpPr>
         <p:spPr>
           <a:xfrm>
-            <a:off x="0" y="0"/>
-            <a:ext cx="12191695" cy="6858000"/>
+            <a:off x="731520" y="365760"/>
+            <a:ext cx="10698480" cy="292608"/>
           </a:xfrm>
           <a:prstGeom prst="rect">
             <a:avLst/>
           </a:prstGeom>
+          <a:noFill/>
+        </p:spPr>
+        <p:txBody>
+          <a:bodyPr wrap="square" lIns="0" tIns="0" rIns="0" bIns="0">
+            <a:spAutoFit/>
+          </a:bodyPr>
+          <a:lstStyle/>
+          <a:p>
+            <a:pPr>
+              <a:defRPr sz="1100" b="1">
+                <a:solidFill>
+                  <a:srgbClr val="2563EB"/>
+                </a:solidFill>
+                <a:latin typeface="Calibri"/>
+              </a:defRPr>
+            </a:pPr>
+            <a:r>
+              <a:t>05 HARDWARE BENCHMARK 2</a:t>
+            </a:r>
+          </a:p>
+        </p:txBody>
+      </p:sp>
+      <p:sp>
+        <p:nvSpPr>
+          <p:cNvPr id="4" name="TextBox 3"/>
+          <p:cNvSpPr txBox="1"/>
+          <p:nvPr/>
+        </p:nvSpPr>
+        <p:spPr>
+          <a:xfrm>
+            <a:off x="731520" y="621792"/>
+            <a:ext cx="10698480" cy="594360"/>
+          </a:xfrm>
+          <a:prstGeom prst="rect">
+            <a:avLst/>
+          </a:prstGeom>
+          <a:noFill/>
+        </p:spPr>
+        <p:txBody>
+          <a:bodyPr wrap="square" lIns="0" tIns="0" rIns="0" bIns="0">
+            <a:spAutoFit/>
+          </a:bodyPr>
+          <a:lstStyle/>
+          <a:p>
+            <a:pPr>
+              <a:defRPr sz="2200" b="1">
+                <a:solidFill>
+                  <a:srgbClr val="0F172A"/>
+                </a:solidFill>
+                <a:latin typeface="Calibri"/>
+              </a:defRPr>
+            </a:pPr>
+            <a:r>
+              <a:t>Processor 2: IBM Heavy-Hex Architecture (FakeSherbrooke)</a:t>
+            </a:r>
+          </a:p>
+          <a:p>
+            <a:pPr>
+              <a:defRPr sz="1200">
+                <a:solidFill>
+                  <a:srgbClr val="475569"/>
+                </a:solidFill>
+                <a:latin typeface="Calibri"/>
+              </a:defRPr>
+            </a:pPr>
+            <a:r>
+              <a:t>Deliverable 02: 127-qubit commercial planar layout with ports (0, 14) modeling realistic hardware bottlenecks.</a:t>
+            </a:r>
+          </a:p>
+        </p:txBody>
+      </p:sp>
+      <p:sp>
+        <p:nvSpPr>
+          <p:cNvPr id="5" name="Rounded Rectangle 4"/>
+          <p:cNvSpPr/>
+          <p:nvPr/>
+        </p:nvSpPr>
+        <p:spPr>
+          <a:xfrm>
+            <a:off x="731520" y="1371600"/>
+            <a:ext cx="10698480" cy="1097280"/>
+          </a:xfrm>
+          <a:prstGeom prst="roundRect">
+            <a:avLst/>
+          </a:prstGeom>
           <a:solidFill>
-            <a:srgbClr val="F8FAFC"/>
+            <a:srgbClr val="FFFFFF"/>
           </a:solidFill>
-          <a:ln>
-            <a:noFill/>
+          <a:ln w="12700">
+            <a:solidFill>
+              <a:srgbClr val="E2E8F0"/>
+            </a:solidFill>
           </a:ln>
         </p:spPr>
         <p:style>
@@ -8471,19 +8200,20 @@
           <a:lstStyle/>
           <a:p>
             <a:pPr algn="ctr"/>
-          </a:p>
-        </p:txBody>
-      </p:sp>
-      <p:sp>
-        <p:nvSpPr>
-          <p:cNvPr id="3" name="TextBox 2"/>
+            <a:endParaRPr/>
+          </a:p>
+        </p:txBody>
+      </p:sp>
+      <p:sp>
+        <p:nvSpPr>
+          <p:cNvPr id="6" name="TextBox 5"/>
           <p:cNvSpPr txBox="1"/>
           <p:nvPr/>
         </p:nvSpPr>
         <p:spPr>
           <a:xfrm>
-            <a:off x="731520" y="365760"/>
-            <a:ext cx="10698480" cy="292608"/>
+            <a:off x="914400" y="1444752"/>
+            <a:ext cx="10332720" cy="914400"/>
           </a:xfrm>
           <a:prstGeom prst="rect">
             <a:avLst/>
@@ -8491,95 +8221,118 @@
           <a:noFill/>
         </p:spPr>
         <p:txBody>
-          <a:bodyPr wrap="square" lIns="0" tIns="0" rIns="0" bIns="0">
+          <a:bodyPr wrap="square">
             <a:spAutoFit/>
           </a:bodyPr>
           <a:lstStyle/>
           <a:p>
             <a:pPr>
-              <a:defRPr sz="1100" b="1">
-                <a:solidFill>
-                  <a:srgbClr val="2563EB"/>
-                </a:solidFill>
-                <a:latin typeface="Calibri"/>
-              </a:defRPr>
-            </a:pPr>
-            <a:r>
-              <a:t>05 HARDWARE BENCHMARK 2</a:t>
-            </a:r>
-          </a:p>
-        </p:txBody>
-      </p:sp>
-      <p:sp>
-        <p:nvSpPr>
-          <p:cNvPr id="4" name="TextBox 3"/>
-          <p:cNvSpPr txBox="1"/>
+              <a:defRPr sz="1400" b="1">
+                <a:solidFill>
+                  <a:srgbClr val="0F172A"/>
+                </a:solidFill>
+              </a:defRPr>
+            </a:pPr>
+            <a:r>
+              <a:t>Topology &amp; Circuit Overview: IBM 127-Qubit Heavy-Hex</a:t>
+            </a:r>
+          </a:p>
+          <a:p>
+            <a:pPr>
+              <a:defRPr sz="1100">
+                <a:solidFill>
+                  <a:srgbClr val="475569"/>
+                </a:solidFill>
+              </a:defRPr>
+            </a:pPr>
+            <a:r>
+              <a:t>• Ports: (0, 14)  |  Chip Capacity: 127 Qubits  |  Layout: Low average degree (2–3) planar heavy-hex lattice</a:t>
+            </a:r>
+            <a:br/>
+            <a:r>
+              <a:t>• Planar Congestion: Narrow corridors force the second rail into wide peripheral detours (8 SWAPs vs. 4 SWAPs for baselines).</a:t>
+            </a:r>
+            <a:br/>
+            <a:r>
+              <a:t>• Execution: SABRE achieves depth 30 with 6/127 qubits. QMRP depth balloons to 113 with 8/127 qubits (87.43% acceptance yield).</a:t>
+            </a:r>
+          </a:p>
+        </p:txBody>
+      </p:sp>
+      <p:pic>
+        <p:nvPicPr>
+          <p:cNvPr id="9" name="Picture 8">
+            <a:extLst>
+              <a:ext uri="{FF2B5EF4-FFF2-40B4-BE49-F238E27FC236}">
+                <a16:creationId xmlns:a16="http://schemas.microsoft.com/office/drawing/2014/main" id="{93B9BB1D-E1E8-62C5-5F4F-C4715E7DD6DC}"/>
+              </a:ext>
+            </a:extLst>
+          </p:cNvPr>
+          <p:cNvPicPr>
+            <a:picLocks noChangeAspect="1"/>
+          </p:cNvPicPr>
           <p:nvPr/>
-        </p:nvSpPr>
-        <p:spPr>
-          <a:xfrm>
-            <a:off x="731520" y="621792"/>
-            <a:ext cx="10698480" cy="594360"/>
+        </p:nvPicPr>
+        <p:blipFill>
+          <a:blip r:embed="rId3"/>
+          <a:stretch>
+            <a:fillRect/>
+          </a:stretch>
+        </p:blipFill>
+        <p:spPr>
+          <a:xfrm>
+            <a:off x="2464890" y="2827349"/>
+            <a:ext cx="7261914" cy="3664891"/>
           </a:xfrm>
           <a:prstGeom prst="rect">
             <a:avLst/>
           </a:prstGeom>
-          <a:noFill/>
-        </p:spPr>
-        <p:txBody>
-          <a:bodyPr wrap="square" lIns="0" tIns="0" rIns="0" bIns="0">
-            <a:spAutoFit/>
-          </a:bodyPr>
-          <a:lstStyle/>
-          <a:p>
-            <a:pPr>
-              <a:defRPr sz="2200" b="1">
-                <a:solidFill>
-                  <a:srgbClr val="0F172A"/>
-                </a:solidFill>
-                <a:latin typeface="Calibri"/>
-              </a:defRPr>
-            </a:pPr>
-            <a:r>
-              <a:t>Processor 2: IBM Heavy-Hex Architecture (FakeSherbrooke)</a:t>
-            </a:r>
-          </a:p>
-          <a:p>
-            <a:pPr>
-              <a:defRPr sz="1200">
-                <a:solidFill>
-                  <a:srgbClr val="475569"/>
-                </a:solidFill>
-                <a:latin typeface="Calibri"/>
-              </a:defRPr>
-            </a:pPr>
-            <a:r>
-              <a:t>Deliverable 02: 127-qubit commercial planar layout with ports (0, 14) modeling realistic hardware bottlenecks.</a:t>
-            </a:r>
-          </a:p>
-        </p:txBody>
-      </p:sp>
-      <p:sp>
-        <p:nvSpPr>
-          <p:cNvPr id="5" name="Rounded Rectangle 4"/>
+        </p:spPr>
+      </p:pic>
+    </p:spTree>
+  </p:cSld>
+  <p:clrMapOvr>
+    <a:masterClrMapping/>
+  </p:clrMapOvr>
+</p:sld>
+</file>
+
+<file path=ppt/slides/slide7.xml><?xml version="1.0" encoding="utf-8"?>
+<p:sld xmlns:a="http://schemas.openxmlformats.org/drawingml/2006/main" xmlns:r="http://schemas.openxmlformats.org/officeDocument/2006/relationships" xmlns:p="http://schemas.openxmlformats.org/presentationml/2006/main">
+  <p:cSld>
+    <p:spTree>
+      <p:nvGrpSpPr>
+        <p:cNvPr id="1" name=""/>
+        <p:cNvGrpSpPr/>
+        <p:nvPr/>
+      </p:nvGrpSpPr>
+      <p:grpSpPr>
+        <a:xfrm>
+          <a:off x="0" y="0"/>
+          <a:ext cx="0" cy="0"/>
+          <a:chOff x="0" y="0"/>
+          <a:chExt cx="0" cy="0"/>
+        </a:xfrm>
+      </p:grpSpPr>
+      <p:sp>
+        <p:nvSpPr>
+          <p:cNvPr id="2" name="Rectangle 1"/>
           <p:cNvSpPr/>
           <p:nvPr/>
         </p:nvSpPr>
         <p:spPr>
           <a:xfrm>
-            <a:off x="731520" y="1371600"/>
-            <a:ext cx="10698480" cy="1097280"/>
-          </a:xfrm>
-          <a:prstGeom prst="roundRect">
+            <a:off x="0" y="0"/>
+            <a:ext cx="12191695" cy="6858000"/>
+          </a:xfrm>
+          <a:prstGeom prst="rect">
             <a:avLst/>
           </a:prstGeom>
           <a:solidFill>
-            <a:srgbClr val="FFFFFF"/>
+            <a:srgbClr val="F8FAFC"/>
           </a:solidFill>
-          <a:ln w="12700">
-            <a:solidFill>
-              <a:srgbClr val="E2E8F0"/>
-            </a:solidFill>
+          <a:ln>
+            <a:noFill/>
           </a:ln>
         </p:spPr>
         <p:style>
@@ -8601,19 +8354,20 @@
           <a:lstStyle/>
           <a:p>
             <a:pPr algn="ctr"/>
-          </a:p>
-        </p:txBody>
-      </p:sp>
-      <p:sp>
-        <p:nvSpPr>
-          <p:cNvPr id="6" name="TextBox 5"/>
+            <a:endParaRPr/>
+          </a:p>
+        </p:txBody>
+      </p:sp>
+      <p:sp>
+        <p:nvSpPr>
+          <p:cNvPr id="3" name="TextBox 2"/>
           <p:cNvSpPr txBox="1"/>
           <p:nvPr/>
         </p:nvSpPr>
         <p:spPr>
           <a:xfrm>
-            <a:off x="914400" y="1444752"/>
-            <a:ext cx="10332720" cy="914400"/>
+            <a:off x="731520" y="365760"/>
+            <a:ext cx="10698480" cy="292608"/>
           </a:xfrm>
           <a:prstGeom prst="rect">
             <a:avLst/>
@@ -8621,64 +8375,94 @@
           <a:noFill/>
         </p:spPr>
         <p:txBody>
-          <a:bodyPr wrap="square">
+          <a:bodyPr wrap="square" lIns="0" tIns="0" rIns="0" bIns="0">
             <a:spAutoFit/>
           </a:bodyPr>
           <a:lstStyle/>
           <a:p>
             <a:pPr>
-              <a:defRPr sz="1400" b="1">
+              <a:defRPr sz="1100" b="1">
+                <a:solidFill>
+                  <a:srgbClr val="2563EB"/>
+                </a:solidFill>
+                <a:latin typeface="Calibri"/>
+              </a:defRPr>
+            </a:pPr>
+            <a:r>
+              <a:t>06 HARDWARE BENCHMARK 3</a:t>
+            </a:r>
+          </a:p>
+        </p:txBody>
+      </p:sp>
+      <p:sp>
+        <p:nvSpPr>
+          <p:cNvPr id="4" name="TextBox 3"/>
+          <p:cNvSpPr txBox="1"/>
+          <p:nvPr/>
+        </p:nvSpPr>
+        <p:spPr>
+          <a:xfrm>
+            <a:off x="731520" y="621792"/>
+            <a:ext cx="10698480" cy="594360"/>
+          </a:xfrm>
+          <a:prstGeom prst="rect">
+            <a:avLst/>
+          </a:prstGeom>
+          <a:noFill/>
+        </p:spPr>
+        <p:txBody>
+          <a:bodyPr wrap="square" lIns="0" tIns="0" rIns="0" bIns="0">
+            <a:spAutoFit/>
+          </a:bodyPr>
+          <a:lstStyle/>
+          <a:p>
+            <a:pPr>
+              <a:defRPr sz="2200" b="1">
                 <a:solidFill>
                   <a:srgbClr val="0F172A"/>
                 </a:solidFill>
-              </a:defRPr>
-            </a:pPr>
-            <a:r>
-              <a:t>Topology &amp; Circuit Overview: IBM 127-Qubit Heavy-Hex</a:t>
-            </a:r>
-          </a:p>
-          <a:p>
-            <a:pPr>
-              <a:defRPr sz="1100">
+                <a:latin typeface="Calibri"/>
+              </a:defRPr>
+            </a:pPr>
+            <a:r>
+              <a:t>Processor 3: Hyperbolic Lattice {7,3} (85 Qubits)</a:t>
+            </a:r>
+          </a:p>
+          <a:p>
+            <a:pPr>
+              <a:defRPr sz="1200">
                 <a:solidFill>
                   <a:srgbClr val="475569"/>
                 </a:solidFill>
-              </a:defRPr>
-            </a:pPr>
-            <a:r>
-              <a:t>• Ports: (0, 14)  |  Chip Capacity: 127 Qubits  |  Layout: Low average degree (2–3) planar heavy-hex lattice</a:t>
-            </a:r>
-            <a:br/>
-            <a:r>
-              <a:t>• Planar Congestion: Narrow corridors force the second rail into wide peripheral detours (8 SWAPs vs. 4 SWAPs for baselines).</a:t>
-            </a:r>
-            <a:br/>
-            <a:r>
-              <a:t>• Execution: SABRE achieves depth 30 with 6/127 qubits. QMRP depth balloons to 113 with 8/127 qubits (87.43% acceptance yield).</a:t>
-            </a:r>
-          </a:p>
-        </p:txBody>
-      </p:sp>
-      <p:sp>
-        <p:nvSpPr>
-          <p:cNvPr id="7" name="Rounded Rectangle 6"/>
+                <a:latin typeface="Calibri"/>
+              </a:defRPr>
+            </a:pPr>
+            <a:r>
+              <a:t>Deliverable 02: Regular heptagonal tiling with exponential boundary growth and abundant short disjoint paths.</a:t>
+            </a:r>
+          </a:p>
+        </p:txBody>
+      </p:sp>
+      <p:sp>
+        <p:nvSpPr>
+          <p:cNvPr id="5" name="Rounded Rectangle 4"/>
           <p:cNvSpPr/>
           <p:nvPr/>
         </p:nvSpPr>
         <p:spPr>
           <a:xfrm>
-            <a:off x="731520" y="2606040"/>
-            <a:ext cx="10698480" cy="3840480"/>
+            <a:off x="731520" y="1371600"/>
+            <a:ext cx="10698480" cy="1097280"/>
           </a:xfrm>
           <a:prstGeom prst="roundRect">
             <a:avLst/>
           </a:prstGeom>
           <a:solidFill>
-            <a:srgbClr val="EFF6FF"/>
+            <a:srgbClr val="FFFFFF"/>
           </a:solidFill>
-          <a:ln w="19050">
+          <a:ln w="12700">
             <a:solidFill>
-              <a:srgbClr val="BFDBFE"/>
+              <a:srgbClr val="E2E8F0"/>
             </a:solidFill>
           </a:ln>
         </p:spPr>
@@ -8697,62 +8481,99 @@
           </a:fontRef>
         </p:style>
         <p:txBody>
-          <a:bodyPr rtlCol="0" anchor="ctr" wrap="square" lIns="228600" rIns="228600"/>
-          <a:lstStyle/>
-          <a:p>
-            <a:pPr algn="ctr">
-              <a:defRPr sz="1200" b="1">
-                <a:solidFill>
-                  <a:srgbClr val="2563EB"/>
-                </a:solidFill>
-                <a:latin typeface="Calibri"/>
-              </a:defRPr>
-            </a:pPr>
-            <a:r>
-              <a:t>🖼️  LARGE SCREENSHOT PLACEHOLDER</a:t>
-            </a:r>
-          </a:p>
-          <a:p>
-            <a:pPr algn="ctr">
-              <a:defRPr sz="1500" b="1">
+          <a:bodyPr rtlCol="0" anchor="ctr"/>
+          <a:lstStyle/>
+          <a:p>
+            <a:pPr algn="ctr"/>
+            <a:endParaRPr/>
+          </a:p>
+        </p:txBody>
+      </p:sp>
+      <p:sp>
+        <p:nvSpPr>
+          <p:cNvPr id="6" name="TextBox 5"/>
+          <p:cNvSpPr txBox="1"/>
+          <p:nvPr/>
+        </p:nvSpPr>
+        <p:spPr>
+          <a:xfrm>
+            <a:off x="914400" y="1444752"/>
+            <a:ext cx="10332720" cy="914400"/>
+          </a:xfrm>
+          <a:prstGeom prst="rect">
+            <a:avLst/>
+          </a:prstGeom>
+          <a:noFill/>
+        </p:spPr>
+        <p:txBody>
+          <a:bodyPr wrap="square">
+            <a:spAutoFit/>
+          </a:bodyPr>
+          <a:lstStyle/>
+          <a:p>
+            <a:pPr>
+              <a:defRPr sz="1400" b="1">
                 <a:solidFill>
                   <a:srgbClr val="0F172A"/>
                 </a:solidFill>
-                <a:latin typeface="Calibri"/>
-              </a:defRPr>
-            </a:pPr>
-            <a:r>
-              <a:t>IBM Heavy-Hex Coupling Graph &amp; Transpiled Circuit Diagram</a:t>
-            </a:r>
-          </a:p>
-          <a:p>
-            <a:pPr algn="ctr">
+              </a:defRPr>
+            </a:pPr>
+            <a:r>
+              <a:t>Topology &amp; Circuit Overview: Hyperbolic {7,3} Poincaré Disk</a:t>
+            </a:r>
+          </a:p>
+          <a:p>
+            <a:pPr>
               <a:defRPr sz="1100">
                 <a:solidFill>
                   <a:srgbClr val="475569"/>
                 </a:solidFill>
-                <a:latin typeface="Calibri"/>
-              </a:defRPr>
-            </a:pPr>
+              </a:defRPr>
+            </a:pPr>
+            <a:r>
+              <a:t>• Ports: (0, 84)  |  Chip Capacity: 85 Qubits  |  Generated via HYPERTILING (Mahmoud &amp; Rayan, quanTA USask)</a:t>
+            </a:r>
             <a:br/>
             <a:r>
-              <a:t>Insert the IBM Heavy-Hex diagrams here:</a:t>
+              <a:t>• Negative Curvature Advantage: Area expands exponentially, creating abundant alternative disjoint paths without spatial detours!</a:t>
             </a:r>
             <a:br/>
             <a:r>
-              <a:t>• Left: 127-qubit Heavy-Hex topology graph with Ports 0 and 14 highlighted</a:t>
-            </a:r>
-            <a:br/>
-            <a:r>
-              <a:t>• Right: Transpiled native circuit showing the dual-rail routing paths</a:t>
-            </a:r>
-            <a:br/>
-            <a:r>
-              <a:t>(Exported from results/visual_summary.html or Circuit Diag.jpg)</a:t>
-            </a:r>
-          </a:p>
-        </p:txBody>
-      </p:sp>
+              <a:t>• Execution: SABRE achieves 0.9258 fidelity (depth 22, 7/85 qubits). QMRP achieves 0.9208 (depth 93, 9/85 qubits, 90.69% yield).</a:t>
+            </a:r>
+          </a:p>
+        </p:txBody>
+      </p:sp>
+      <p:pic>
+        <p:nvPicPr>
+          <p:cNvPr id="9" name="Picture 8">
+            <a:extLst>
+              <a:ext uri="{FF2B5EF4-FFF2-40B4-BE49-F238E27FC236}">
+                <a16:creationId xmlns:a16="http://schemas.microsoft.com/office/drawing/2014/main" id="{FD7F7C41-15EF-0EA3-D947-66814210F86B}"/>
+              </a:ext>
+            </a:extLst>
+          </p:cNvPr>
+          <p:cNvPicPr>
+            <a:picLocks noChangeAspect="1"/>
+          </p:cNvPicPr>
+          <p:nvPr/>
+        </p:nvPicPr>
+        <p:blipFill>
+          <a:blip r:embed="rId3"/>
+          <a:stretch>
+            <a:fillRect/>
+          </a:stretch>
+        </p:blipFill>
+        <p:spPr>
+          <a:xfrm>
+            <a:off x="2704828" y="2736088"/>
+            <a:ext cx="6782344" cy="3756152"/>
+          </a:xfrm>
+          <a:prstGeom prst="rect">
+            <a:avLst/>
+          </a:prstGeom>
+        </p:spPr>
+      </p:pic>
     </p:spTree>
   </p:cSld>
   <p:clrMapOvr>
@@ -8761,8 +8582,8 @@
 </p:sld>
 </file>
 
-<file path=ppt/slides/slide7.xml><?xml version="1.0" encoding="utf-8"?>
-<p:sld xmlns:a="http://schemas.openxmlformats.org/drawingml/2006/main" xmlns:p="http://schemas.openxmlformats.org/presentationml/2006/main" xmlns:r="http://schemas.openxmlformats.org/officeDocument/2006/relationships">
+<file path=ppt/slides/slide8.xml><?xml version="1.0" encoding="utf-8"?>
+<p:sld xmlns:a="http://schemas.openxmlformats.org/drawingml/2006/main" xmlns:r="http://schemas.openxmlformats.org/officeDocument/2006/relationships" xmlns:p="http://schemas.openxmlformats.org/presentationml/2006/main">
   <p:cSld>
     <p:spTree>
       <p:nvGrpSpPr>
@@ -8770,7 +8591,14 @@
         <p:cNvGrpSpPr/>
         <p:nvPr/>
       </p:nvGrpSpPr>
-      <p:grpSpPr/>
+      <p:grpSpPr>
+        <a:xfrm>
+          <a:off x="0" y="0"/>
+          <a:ext cx="0" cy="0"/>
+          <a:chOff x="0" y="0"/>
+          <a:chExt cx="0" cy="0"/>
+        </a:xfrm>
+      </p:grpSpPr>
       <p:sp>
         <p:nvSpPr>
           <p:cNvPr id="2" name="Rectangle 1"/>
@@ -8811,6 +8639,7 @@
           <a:lstStyle/>
           <a:p>
             <a:pPr algn="ctr"/>
+            <a:endParaRPr/>
           </a:p>
         </p:txBody>
       </p:sp>
@@ -8845,7 +8674,7 @@
               </a:defRPr>
             </a:pPr>
             <a:r>
-              <a:t>06 HARDWARE BENCHMARK 3</a:t>
+              <a:t>07 BENCHMARK METHODOLOGY</a:t>
             </a:r>
           </a:p>
         </p:txBody>
@@ -8881,7 +8710,8 @@
               </a:defRPr>
             </a:pPr>
             <a:r>
-              <a:t>Processor 3: Hyperbolic Lattice {7,3} (85 Qubits)</a:t>
+              <a:rPr dirty="0"/>
+              <a:t>Deliverable 04: Why We Evaluated Multiple Routing Baselines</a:t>
             </a:r>
           </a:p>
           <a:p>
@@ -8894,7 +8724,8 @@
               </a:defRPr>
             </a:pPr>
             <a:r>
-              <a:t>Deliverable 02: Regular heptagonal tiling with exponential boundary growth and abundant short disjoint paths.</a:t>
+              <a:rPr dirty="0"/>
+              <a:t>Benchmarking against industry-standard lookahead and calibration-adaptive routing to avoid strawman comparisons.</a:t>
             </a:r>
           </a:p>
         </p:txBody>
@@ -8908,7 +8739,7 @@
         <p:spPr>
           <a:xfrm>
             <a:off x="731520" y="1371600"/>
-            <a:ext cx="10698480" cy="1097280"/>
+            <a:ext cx="2560320" cy="4937760"/>
           </a:xfrm>
           <a:prstGeom prst="roundRect">
             <a:avLst/>
@@ -8941,6 +8772,7 @@
           <a:lstStyle/>
           <a:p>
             <a:pPr algn="ctr"/>
+            <a:endParaRPr/>
           </a:p>
         </p:txBody>
       </p:sp>
@@ -8952,8 +8784,8 @@
         </p:nvSpPr>
         <p:spPr>
           <a:xfrm>
-            <a:off x="914400" y="1444752"/>
-            <a:ext cx="10332720" cy="914400"/>
+            <a:off x="914400" y="1554480"/>
+            <a:ext cx="2194560" cy="4480560"/>
           </a:xfrm>
           <a:prstGeom prst="rect">
             <a:avLst/>
@@ -8969,32 +8801,66 @@
             <a:pPr>
               <a:defRPr sz="1400" b="1">
                 <a:solidFill>
-                  <a:srgbClr val="0F172A"/>
-                </a:solidFill>
-              </a:defRPr>
-            </a:pPr>
-            <a:r>
-              <a:t>Topology &amp; Circuit Overview: Hyperbolic {7,3} Poincaré Disk</a:t>
-            </a:r>
-          </a:p>
-          <a:p>
-            <a:pPr>
-              <a:defRPr sz="1100">
+                  <a:srgbClr val="2563EB"/>
+                </a:solidFill>
+              </a:defRPr>
+            </a:pPr>
+            <a:r>
+              <a:t>Method A: Shortest Path</a:t>
+            </a:r>
+          </a:p>
+          <a:p>
+            <a:br/>
+            <a:r>
+              <a:t>• Concept: </a:t>
+            </a:r>
+          </a:p>
+          <a:p>
+            <a:pPr>
+              <a:defRPr sz="1000">
                 <a:solidFill>
                   <a:srgbClr val="475569"/>
                 </a:solidFill>
               </a:defRPr>
             </a:pPr>
             <a:r>
-              <a:t>• Ports: (0, 84)  |  Chip Capacity: 85 Qubits  |  Generated via HYPERTILING (Mahmoud &amp; Rayan, quanTA USask)</a:t>
-            </a:r>
+              <a:t>Dijkstra minimum hop count.</a:t>
+            </a:r>
+          </a:p>
+          <a:p>
             <a:br/>
             <a:r>
-              <a:t>• Negative Curvature Advantage: Area expands exponentially, creating abundant alternative disjoint paths without spatial detours!</a:t>
-            </a:r>
+              <a:t>• Strengths: </a:t>
+            </a:r>
+          </a:p>
+          <a:p>
+            <a:pPr>
+              <a:defRPr sz="1000">
+                <a:solidFill>
+                  <a:srgbClr val="475569"/>
+                </a:solidFill>
+              </a:defRPr>
+            </a:pPr>
+            <a:r>
+              <a:t>Minimal compile time; topological shortest path.</a:t>
+            </a:r>
+          </a:p>
+          <a:p>
             <a:br/>
             <a:r>
-              <a:t>• Execution: SABRE achieves 0.9258 fidelity (depth 22, 7/85 qubits). QMRP achieves 0.9208 (depth 93, 9/85 qubits, 90.69% yield).</a:t>
+              <a:t>• Limitation: </a:t>
+            </a:r>
+          </a:p>
+          <a:p>
+            <a:pPr>
+              <a:defRPr sz="1000">
+                <a:solidFill>
+                  <a:srgbClr val="475569"/>
+                </a:solidFill>
+              </a:defRPr>
+            </a:pPr>
+            <a:r>
+              <a:t>Blind to hardware calibration noise; may route through bad links.</a:t>
             </a:r>
           </a:p>
         </p:txBody>
@@ -9007,18 +8873,18 @@
         </p:nvSpPr>
         <p:spPr>
           <a:xfrm>
-            <a:off x="731520" y="2606040"/>
-            <a:ext cx="10698480" cy="3840480"/>
+            <a:off x="3429000" y="1371600"/>
+            <a:ext cx="2560320" cy="4937760"/>
           </a:xfrm>
           <a:prstGeom prst="roundRect">
             <a:avLst/>
           </a:prstGeom>
           <a:solidFill>
-            <a:srgbClr val="EFF6FF"/>
+            <a:srgbClr val="FFFFFF"/>
           </a:solidFill>
-          <a:ln w="19050">
+          <a:ln w="12700">
             <a:solidFill>
-              <a:srgbClr val="BFDBFE"/>
+              <a:srgbClr val="E2E8F0"/>
             </a:solidFill>
           </a:ln>
         </p:spPr>
@@ -9037,99 +8903,124 @@
           </a:fontRef>
         </p:style>
         <p:txBody>
-          <a:bodyPr rtlCol="0" anchor="ctr" wrap="square" lIns="228600" rIns="228600"/>
-          <a:lstStyle/>
-          <a:p>
-            <a:pPr algn="ctr">
-              <a:defRPr sz="1200" b="1">
-                <a:solidFill>
-                  <a:srgbClr val="2563EB"/>
-                </a:solidFill>
-                <a:latin typeface="Calibri"/>
-              </a:defRPr>
-            </a:pPr>
-            <a:r>
-              <a:t>🖼️  LARGE SCREENSHOT PLACEHOLDER</a:t>
-            </a:r>
-          </a:p>
-          <a:p>
-            <a:pPr algn="ctr">
-              <a:defRPr sz="1500" b="1">
-                <a:solidFill>
-                  <a:srgbClr val="0F172A"/>
-                </a:solidFill>
-                <a:latin typeface="Calibri"/>
-              </a:defRPr>
-            </a:pPr>
-            <a:r>
-              <a:t>Hyperbolic {7,3} Lattice Graph &amp; Transpiled Circuit Diagram</a:t>
-            </a:r>
-          </a:p>
-          <a:p>
-            <a:pPr algn="ctr">
-              <a:defRPr sz="1100">
-                <a:solidFill>
-                  <a:srgbClr val="475569"/>
-                </a:solidFill>
-                <a:latin typeface="Calibri"/>
-              </a:defRPr>
-            </a:pPr>
-            <a:br/>
-            <a:r>
-              <a:t>Insert the Hyperbolic {7,3} diagrams here:</a:t>
-            </a:r>
-            <a:br/>
-            <a:r>
-              <a:t>• Left: Heptagonal Poincaré disk tiling with Ports 0 and 84 highlighted</a:t>
-            </a:r>
-            <a:br/>
-            <a:r>
-              <a:t>• Right: Transpiled native circuit showing parallel dual-rail transport</a:t>
-            </a:r>
-            <a:br/>
-            <a:r>
-              <a:t>(Exported from results/visual_summary.html or Circuit Diag.jpg)</a:t>
-            </a:r>
-          </a:p>
-        </p:txBody>
-      </p:sp>
-    </p:spTree>
-  </p:cSld>
-  <p:clrMapOvr>
-    <a:masterClrMapping/>
-  </p:clrMapOvr>
-</p:sld>
-</file>
-
-<file path=ppt/slides/slide8.xml><?xml version="1.0" encoding="utf-8"?>
-<p:sld xmlns:a="http://schemas.openxmlformats.org/drawingml/2006/main" xmlns:p="http://schemas.openxmlformats.org/presentationml/2006/main" xmlns:r="http://schemas.openxmlformats.org/officeDocument/2006/relationships">
-  <p:cSld>
-    <p:spTree>
-      <p:nvGrpSpPr>
-        <p:cNvPr id="1" name=""/>
-        <p:cNvGrpSpPr/>
-        <p:nvPr/>
-      </p:nvGrpSpPr>
-      <p:grpSpPr/>
-      <p:sp>
-        <p:nvSpPr>
-          <p:cNvPr id="2" name="Rectangle 1"/>
-          <p:cNvSpPr/>
+          <a:bodyPr rtlCol="0" anchor="ctr"/>
+          <a:lstStyle/>
+          <a:p>
+            <a:pPr algn="ctr"/>
+            <a:endParaRPr/>
+          </a:p>
+        </p:txBody>
+      </p:sp>
+      <p:sp>
+        <p:nvSpPr>
+          <p:cNvPr id="8" name="TextBox 7"/>
+          <p:cNvSpPr txBox="1"/>
           <p:nvPr/>
         </p:nvSpPr>
         <p:spPr>
           <a:xfrm>
-            <a:off x="0" y="0"/>
-            <a:ext cx="12191695" cy="6858000"/>
+            <a:off x="3611880" y="1554480"/>
+            <a:ext cx="2194560" cy="4480560"/>
           </a:xfrm>
           <a:prstGeom prst="rect">
             <a:avLst/>
           </a:prstGeom>
+          <a:noFill/>
+        </p:spPr>
+        <p:txBody>
+          <a:bodyPr wrap="square">
+            <a:spAutoFit/>
+          </a:bodyPr>
+          <a:lstStyle/>
+          <a:p>
+            <a:pPr>
+              <a:defRPr sz="1400" b="1">
+                <a:solidFill>
+                  <a:srgbClr val="7C3AED"/>
+                </a:solidFill>
+              </a:defRPr>
+            </a:pPr>
+            <a:r>
+              <a:t>Method B: SABRE Routing</a:t>
+            </a:r>
+          </a:p>
+          <a:p>
+            <a:br/>
+            <a:r>
+              <a:t>• Concept: </a:t>
+            </a:r>
+          </a:p>
+          <a:p>
+            <a:pPr>
+              <a:defRPr sz="1000">
+                <a:solidFill>
+                  <a:srgbClr val="475569"/>
+                </a:solidFill>
+              </a:defRPr>
+            </a:pPr>
+            <a:r>
+              <a:t>Qiskit's industry-standard SabreSwap with decay lookahead.</a:t>
+            </a:r>
+          </a:p>
+          <a:p>
+            <a:br/>
+            <a:r>
+              <a:t>• Strengths: </a:t>
+            </a:r>
+          </a:p>
+          <a:p>
+            <a:pPr>
+              <a:defRPr sz="1000">
+                <a:solidFill>
+                  <a:srgbClr val="475569"/>
+                </a:solidFill>
+              </a:defRPr>
+            </a:pPr>
+            <a:r>
+              <a:t>Optimizes global circuit depth and SWAP count via lookahead.</a:t>
+            </a:r>
+          </a:p>
+          <a:p>
+            <a:br/>
+            <a:r>
+              <a:t>• Limitation: </a:t>
+            </a:r>
+          </a:p>
+          <a:p>
+            <a:pPr>
+              <a:defRPr sz="1000">
+                <a:solidFill>
+                  <a:srgbClr val="475569"/>
+                </a:solidFill>
+              </a:defRPr>
+            </a:pPr>
+            <a:r>
+              <a:t>Does not explicitly optimize for calibrated gate error rates.</a:t>
+            </a:r>
+          </a:p>
+        </p:txBody>
+      </p:sp>
+      <p:sp>
+        <p:nvSpPr>
+          <p:cNvPr id="9" name="Rounded Rectangle 8"/>
+          <p:cNvSpPr/>
+          <p:nvPr/>
+        </p:nvSpPr>
+        <p:spPr>
+          <a:xfrm>
+            <a:off x="6126480" y="1371600"/>
+            <a:ext cx="2560320" cy="4937760"/>
+          </a:xfrm>
+          <a:prstGeom prst="roundRect">
+            <a:avLst/>
+          </a:prstGeom>
           <a:solidFill>
-            <a:srgbClr val="F8FAFC"/>
+            <a:srgbClr val="FFFFFF"/>
           </a:solidFill>
-          <a:ln>
-            <a:noFill/>
+          <a:ln w="12700">
+            <a:solidFill>
+              <a:srgbClr val="E2E8F0"/>
+            </a:solidFill>
           </a:ln>
         </p:spPr>
         <p:style>
@@ -9151,19 +9042,20 @@
           <a:lstStyle/>
           <a:p>
             <a:pPr algn="ctr"/>
-          </a:p>
-        </p:txBody>
-      </p:sp>
-      <p:sp>
-        <p:nvSpPr>
-          <p:cNvPr id="3" name="TextBox 2"/>
+            <a:endParaRPr/>
+          </a:p>
+        </p:txBody>
+      </p:sp>
+      <p:sp>
+        <p:nvSpPr>
+          <p:cNvPr id="10" name="TextBox 9"/>
           <p:cNvSpPr txBox="1"/>
           <p:nvPr/>
         </p:nvSpPr>
         <p:spPr>
           <a:xfrm>
-            <a:off x="731520" y="365760"/>
-            <a:ext cx="10698480" cy="292608"/>
+            <a:off x="6309360" y="1554480"/>
+            <a:ext cx="2194560" cy="4480560"/>
           </a:xfrm>
           <a:prstGeom prst="rect">
             <a:avLst/>
@@ -9171,83 +9063,87 @@
           <a:noFill/>
         </p:spPr>
         <p:txBody>
-          <a:bodyPr wrap="square" lIns="0" tIns="0" rIns="0" bIns="0">
+          <a:bodyPr wrap="square">
             <a:spAutoFit/>
           </a:bodyPr>
           <a:lstStyle/>
           <a:p>
             <a:pPr>
-              <a:defRPr sz="1100" b="1">
-                <a:solidFill>
-                  <a:srgbClr val="2563EB"/>
-                </a:solidFill>
-                <a:latin typeface="Calibri"/>
-              </a:defRPr>
-            </a:pPr>
-            <a:r>
-              <a:t>07 BENCHMARK METHODOLOGY</a:t>
-            </a:r>
-          </a:p>
-        </p:txBody>
-      </p:sp>
-      <p:sp>
-        <p:nvSpPr>
-          <p:cNvPr id="4" name="TextBox 3"/>
-          <p:cNvSpPr txBox="1"/>
-          <p:nvPr/>
-        </p:nvSpPr>
-        <p:spPr>
-          <a:xfrm>
-            <a:off x="731520" y="621792"/>
-            <a:ext cx="10698480" cy="594360"/>
-          </a:xfrm>
-          <a:prstGeom prst="rect">
-            <a:avLst/>
-          </a:prstGeom>
-          <a:noFill/>
-        </p:spPr>
-        <p:txBody>
-          <a:bodyPr wrap="square" lIns="0" tIns="0" rIns="0" bIns="0">
-            <a:spAutoFit/>
-          </a:bodyPr>
-          <a:lstStyle/>
-          <a:p>
-            <a:pPr>
-              <a:defRPr sz="2200" b="1">
-                <a:solidFill>
-                  <a:srgbClr val="0F172A"/>
-                </a:solidFill>
-                <a:latin typeface="Calibri"/>
-              </a:defRPr>
-            </a:pPr>
-            <a:r>
-              <a:t>Deliverable 04: Why We Evaluated Multiple Routing Baselines</a:t>
-            </a:r>
-          </a:p>
-          <a:p>
-            <a:pPr>
-              <a:defRPr sz="1200">
+              <a:defRPr sz="1400" b="1">
+                <a:solidFill>
+                  <a:srgbClr val="0D9488"/>
+                </a:solidFill>
+              </a:defRPr>
+            </a:pPr>
+            <a:r>
+              <a:t>Method C &amp; C-MC: Noise-Aware</a:t>
+            </a:r>
+          </a:p>
+          <a:p>
+            <a:br/>
+            <a:r>
+              <a:t>• C (Static Calibration): </a:t>
+            </a:r>
+          </a:p>
+          <a:p>
+            <a:pPr>
+              <a:defRPr sz="1000">
                 <a:solidFill>
                   <a:srgbClr val="475569"/>
                 </a:solidFill>
-                <a:latin typeface="Calibri"/>
-              </a:defRPr>
-            </a:pPr>
-            <a:r>
-              <a:t>Benchmarking against industry-standard lookahead and calibration-adaptive routing to avoid strawman comparisons.</a:t>
-            </a:r>
-          </a:p>
-        </p:txBody>
-      </p:sp>
-      <p:sp>
-        <p:nvSpPr>
-          <p:cNvPr id="5" name="Rounded Rectangle 4"/>
+              </a:defRPr>
+            </a:pPr>
+            <a:r>
+              <a:t>ASPLOS '19 (Murali et al.) weights edges by -log(1 - ε_gate).</a:t>
+            </a:r>
+          </a:p>
+          <a:p>
+            <a:br/>
+            <a:r>
+              <a:t>• C-MC (Simulation-Assisted): </a:t>
+            </a:r>
+          </a:p>
+          <a:p>
+            <a:pPr>
+              <a:defRPr sz="1000">
+                <a:solidFill>
+                  <a:srgbClr val="475569"/>
+                </a:solidFill>
+              </a:defRPr>
+            </a:pPr>
+            <a:r>
+              <a:t>Pre-screens candidate paths using Monte Carlo trial shots on the simulator to discover best route empirically!</a:t>
+            </a:r>
+          </a:p>
+          <a:p>
+            <a:br/>
+            <a:r>
+              <a:t>• Key Impact: </a:t>
+            </a:r>
+          </a:p>
+          <a:p>
+            <a:pPr>
+              <a:defRPr sz="1000">
+                <a:solidFill>
+                  <a:srgbClr val="475569"/>
+                </a:solidFill>
+              </a:defRPr>
+            </a:pPr>
+            <a:r>
+              <a:t>On Hyperbolic, C-MC avoided bad detours (6 vs 7 SWAPs), lifting fidelity from 0.9028 to 0.9185.</a:t>
+            </a:r>
+          </a:p>
+        </p:txBody>
+      </p:sp>
+      <p:sp>
+        <p:nvSpPr>
+          <p:cNvPr id="11" name="Rounded Rectangle 10"/>
           <p:cNvSpPr/>
           <p:nvPr/>
         </p:nvSpPr>
         <p:spPr>
           <a:xfrm>
-            <a:off x="731520" y="1371600"/>
+            <a:off x="8823960" y="1371600"/>
             <a:ext cx="2560320" cy="4937760"/>
           </a:xfrm>
           <a:prstGeom prst="roundRect">
@@ -9281,18 +9177,19 @@
           <a:lstStyle/>
           <a:p>
             <a:pPr algn="ctr"/>
-          </a:p>
-        </p:txBody>
-      </p:sp>
-      <p:sp>
-        <p:nvSpPr>
-          <p:cNvPr id="6" name="TextBox 5"/>
+            <a:endParaRPr/>
+          </a:p>
+        </p:txBody>
+      </p:sp>
+      <p:sp>
+        <p:nvSpPr>
+          <p:cNvPr id="12" name="TextBox 11"/>
           <p:cNvSpPr txBox="1"/>
           <p:nvPr/>
         </p:nvSpPr>
         <p:spPr>
           <a:xfrm>
-            <a:off x="914400" y="1554480"/>
+            <a:off x="9006840" y="1554480"/>
             <a:ext cx="2194560" cy="4480560"/>
           </a:xfrm>
           <a:prstGeom prst="rect">
@@ -9309,23 +9206,16 @@
             <a:pPr>
               <a:defRPr sz="1400" b="1">
                 <a:solidFill>
-                  <a:srgbClr val="2563EB"/>
-                </a:solidFill>
-              </a:defRPr>
-            </a:pPr>
-            <a:r>
-              <a:t>Method A: Shortest Path</a:t>
+                  <a:srgbClr val="D97706"/>
+                </a:solidFill>
+              </a:defRPr>
+            </a:pPr>
+            <a:r>
+              <a:t>Method D: QMRP Protected</a:t>
             </a:r>
           </a:p>
           <a:p>
             <a:br/>
-            <a:pPr>
-              <a:defRPr sz="1100" b="1">
-                <a:solidFill>
-                  <a:srgbClr val="0F172A"/>
-                </a:solidFill>
-              </a:defRPr>
-            </a:pPr>
             <a:r>
               <a:t>• Concept: </a:t>
             </a:r>
@@ -9339,20 +9229,13 @@
               </a:defRPr>
             </a:pPr>
             <a:r>
-              <a:t>Dijkstra minimum hop count.</a:t>
+              <a:t>Two-rail repetition encoding with destination parity postselection.</a:t>
             </a:r>
           </a:p>
           <a:p>
             <a:br/>
-            <a:pPr>
-              <a:defRPr sz="1100" b="1">
-                <a:solidFill>
-                  <a:srgbClr val="0F172A"/>
-                </a:solidFill>
-              </a:defRPr>
-            </a:pPr>
-            <a:r>
-              <a:t>• Strengths: </a:t>
+            <a:r>
+              <a:t>• Mechanism: </a:t>
             </a:r>
           </a:p>
           <a:p>
@@ -9364,18 +9247,11 @@
               </a:defRPr>
             </a:pPr>
             <a:r>
-              <a:t>Minimal compile time; topological shortest path.</a:t>
+              <a:t>Encodes state on 2 rails; discards shots if parity syndrome = 1.</a:t>
             </a:r>
           </a:p>
           <a:p>
             <a:br/>
-            <a:pPr>
-              <a:defRPr sz="1100" b="1">
-                <a:solidFill>
-                  <a:srgbClr val="0F172A"/>
-                </a:solidFill>
-              </a:defRPr>
-            </a:pPr>
             <a:r>
               <a:t>• Limitation: </a:t>
             </a:r>
@@ -9389,32 +9265,55 @@
               </a:defRPr>
             </a:pPr>
             <a:r>
-              <a:t>Blind to hardware calibration noise; may route through bad links.</a:t>
-            </a:r>
-          </a:p>
-        </p:txBody>
-      </p:sp>
-      <p:sp>
-        <p:nvSpPr>
-          <p:cNvPr id="7" name="Rounded Rectangle 6"/>
+              <a:t>Doubles 2-qubit gate count and discards 9–13% of shots.</a:t>
+            </a:r>
+          </a:p>
+        </p:txBody>
+      </p:sp>
+    </p:spTree>
+  </p:cSld>
+  <p:clrMapOvr>
+    <a:masterClrMapping/>
+  </p:clrMapOvr>
+</p:sld>
+</file>
+
+<file path=ppt/slides/slide9.xml><?xml version="1.0" encoding="utf-8"?>
+<p:sld xmlns:a="http://schemas.openxmlformats.org/drawingml/2006/main" xmlns:r="http://schemas.openxmlformats.org/officeDocument/2006/relationships" xmlns:p="http://schemas.openxmlformats.org/presentationml/2006/main">
+  <p:cSld>
+    <p:spTree>
+      <p:nvGrpSpPr>
+        <p:cNvPr id="1" name=""/>
+        <p:cNvGrpSpPr/>
+        <p:nvPr/>
+      </p:nvGrpSpPr>
+      <p:grpSpPr>
+        <a:xfrm>
+          <a:off x="0" y="0"/>
+          <a:ext cx="0" cy="0"/>
+          <a:chOff x="0" y="0"/>
+          <a:chExt cx="0" cy="0"/>
+        </a:xfrm>
+      </p:grpSpPr>
+      <p:sp>
+        <p:nvSpPr>
+          <p:cNvPr id="2" name="Rectangle 1"/>
           <p:cNvSpPr/>
           <p:nvPr/>
         </p:nvSpPr>
         <p:spPr>
           <a:xfrm>
-            <a:off x="3429000" y="1371600"/>
-            <a:ext cx="2560320" cy="4937760"/>
-          </a:xfrm>
-          <a:prstGeom prst="roundRect">
+            <a:off x="0" y="0"/>
+            <a:ext cx="12191695" cy="6858000"/>
+          </a:xfrm>
+          <a:prstGeom prst="rect">
             <a:avLst/>
           </a:prstGeom>
           <a:solidFill>
-            <a:srgbClr val="FFFFFF"/>
+            <a:srgbClr val="F8FAFC"/>
           </a:solidFill>
-          <a:ln w="12700">
-            <a:solidFill>
-              <a:srgbClr val="E2E8F0"/>
-            </a:solidFill>
+          <a:ln>
+            <a:noFill/>
           </a:ln>
         </p:spPr>
         <p:style>
@@ -9436,19 +9335,20 @@
           <a:lstStyle/>
           <a:p>
             <a:pPr algn="ctr"/>
-          </a:p>
-        </p:txBody>
-      </p:sp>
-      <p:sp>
-        <p:nvSpPr>
-          <p:cNvPr id="8" name="TextBox 7"/>
+            <a:endParaRPr/>
+          </a:p>
+        </p:txBody>
+      </p:sp>
+      <p:sp>
+        <p:nvSpPr>
+          <p:cNvPr id="3" name="TextBox 2"/>
           <p:cNvSpPr txBox="1"/>
           <p:nvPr/>
         </p:nvSpPr>
         <p:spPr>
           <a:xfrm>
-            <a:off x="3611880" y="1554480"/>
-            <a:ext cx="2194560" cy="4480560"/>
+            <a:off x="731520" y="365760"/>
+            <a:ext cx="10698480" cy="292608"/>
           </a:xfrm>
           <a:prstGeom prst="rect">
             <a:avLst/>
@@ -9456,109 +9356,84 @@
           <a:noFill/>
         </p:spPr>
         <p:txBody>
-          <a:bodyPr wrap="square">
+          <a:bodyPr wrap="square" lIns="0" tIns="0" rIns="0" bIns="0">
             <a:spAutoFit/>
           </a:bodyPr>
           <a:lstStyle/>
           <a:p>
             <a:pPr>
-              <a:defRPr sz="1400" b="1">
-                <a:solidFill>
-                  <a:srgbClr val="7C3AED"/>
-                </a:solidFill>
-              </a:defRPr>
-            </a:pPr>
-            <a:r>
-              <a:t>Method B: SABRE Routing</a:t>
-            </a:r>
-          </a:p>
-          <a:p>
-            <a:br/>
-            <a:pPr>
               <a:defRPr sz="1100" b="1">
                 <a:solidFill>
+                  <a:srgbClr val="2563EB"/>
+                </a:solidFill>
+                <a:latin typeface="Calibri"/>
+              </a:defRPr>
+            </a:pPr>
+            <a:r>
+              <a:t>08 QUANTITATIVE COMPARISON</a:t>
+            </a:r>
+          </a:p>
+        </p:txBody>
+      </p:sp>
+      <p:sp>
+        <p:nvSpPr>
+          <p:cNvPr id="4" name="TextBox 3"/>
+          <p:cNvSpPr txBox="1"/>
+          <p:nvPr/>
+        </p:nvSpPr>
+        <p:spPr>
+          <a:xfrm>
+            <a:off x="731520" y="621792"/>
+            <a:ext cx="10698480" cy="594360"/>
+          </a:xfrm>
+          <a:prstGeom prst="rect">
+            <a:avLst/>
+          </a:prstGeom>
+          <a:noFill/>
+        </p:spPr>
+        <p:txBody>
+          <a:bodyPr wrap="square" lIns="0" tIns="0" rIns="0" bIns="0">
+            <a:spAutoFit/>
+          </a:bodyPr>
+          <a:lstStyle/>
+          <a:p>
+            <a:pPr>
+              <a:defRPr sz="2200" b="1">
+                <a:solidFill>
                   <a:srgbClr val="0F172A"/>
                 </a:solidFill>
-              </a:defRPr>
-            </a:pPr>
-            <a:r>
-              <a:t>• Concept: </a:t>
-            </a:r>
-          </a:p>
-          <a:p>
-            <a:pPr>
-              <a:defRPr sz="1000">
+                <a:latin typeface="Calibri"/>
+              </a:defRPr>
+            </a:pPr>
+            <a:r>
+              <a:t>Deliverable 03: Comprehensive Benchmark Results Across All Core Cases</a:t>
+            </a:r>
+          </a:p>
+          <a:p>
+            <a:pPr>
+              <a:defRPr sz="1200">
                 <a:solidFill>
                   <a:srgbClr val="475569"/>
                 </a:solidFill>
-              </a:defRPr>
-            </a:pPr>
-            <a:r>
-              <a:t>Qiskit's industry-standard SabreSwap with decay lookahead.</a:t>
-            </a:r>
-          </a:p>
-          <a:p>
-            <a:br/>
-            <a:pPr>
-              <a:defRPr sz="1100" b="1">
-                <a:solidFill>
-                  <a:srgbClr val="0F172A"/>
-                </a:solidFill>
-              </a:defRPr>
-            </a:pPr>
-            <a:r>
-              <a:t>• Strengths: </a:t>
-            </a:r>
-          </a:p>
-          <a:p>
-            <a:pPr>
-              <a:defRPr sz="1000">
-                <a:solidFill>
-                  <a:srgbClr val="475569"/>
-                </a:solidFill>
-              </a:defRPr>
-            </a:pPr>
-            <a:r>
-              <a:t>Optimizes global circuit depth and SWAP count via lookahead.</a:t>
-            </a:r>
-          </a:p>
-          <a:p>
-            <a:br/>
-            <a:pPr>
-              <a:defRPr sz="1100" b="1">
-                <a:solidFill>
-                  <a:srgbClr val="0F172A"/>
-                </a:solidFill>
-              </a:defRPr>
-            </a:pPr>
-            <a:r>
-              <a:t>• Limitation: </a:t>
-            </a:r>
-          </a:p>
-          <a:p>
-            <a:pPr>
-              <a:defRPr sz="1000">
-                <a:solidFill>
-                  <a:srgbClr val="475569"/>
-                </a:solidFill>
-              </a:defRPr>
-            </a:pPr>
-            <a:r>
-              <a:t>Does not explicitly optimize for calibrated gate error rates.</a:t>
-            </a:r>
-          </a:p>
-        </p:txBody>
-      </p:sp>
-      <p:sp>
-        <p:nvSpPr>
-          <p:cNvPr id="9" name="Rounded Rectangle 8"/>
+                <a:latin typeface="Calibri"/>
+              </a:defRPr>
+            </a:pPr>
+            <a:r>
+              <a:t>Audited under identical experimental controls: 3,072 shots per algorithm, seeds 42 / 1234.</a:t>
+            </a:r>
+          </a:p>
+        </p:txBody>
+      </p:sp>
+      <p:sp>
+        <p:nvSpPr>
+          <p:cNvPr id="5" name="Rounded Rectangle 4"/>
           <p:cNvSpPr/>
           <p:nvPr/>
         </p:nvSpPr>
         <p:spPr>
           <a:xfrm>
-            <a:off x="6126480" y="1371600"/>
-            <a:ext cx="2560320" cy="4937760"/>
+            <a:off x="731520" y="1371600"/>
+            <a:ext cx="4023360" cy="4937760"/>
           </a:xfrm>
           <a:prstGeom prst="roundRect">
             <a:avLst/>
@@ -9591,19 +9466,20 @@
           <a:lstStyle/>
           <a:p>
             <a:pPr algn="ctr"/>
-          </a:p>
-        </p:txBody>
-      </p:sp>
-      <p:sp>
-        <p:nvSpPr>
-          <p:cNvPr id="10" name="TextBox 9"/>
+            <a:endParaRPr/>
+          </a:p>
+        </p:txBody>
+      </p:sp>
+      <p:sp>
+        <p:nvSpPr>
+          <p:cNvPr id="6" name="TextBox 5"/>
           <p:cNvSpPr txBox="1"/>
           <p:nvPr/>
         </p:nvSpPr>
         <p:spPr>
           <a:xfrm>
-            <a:off x="6309360" y="1554480"/>
-            <a:ext cx="2194560" cy="4480560"/>
+            <a:off x="914400" y="1508760"/>
+            <a:ext cx="3657600" cy="4663440"/>
           </a:xfrm>
           <a:prstGeom prst="rect">
             <a:avLst/>
@@ -9617,671 +9493,160 @@
           <a:lstStyle/>
           <a:p>
             <a:pPr>
-              <a:defRPr sz="1400" b="1">
-                <a:solidFill>
-                  <a:srgbClr val="0D9488"/>
-                </a:solidFill>
-              </a:defRPr>
-            </a:pPr>
-            <a:r>
-              <a:t>Method C &amp; C-MC: Noise-Aware</a:t>
+              <a:defRPr sz="1600" b="1">
+                <a:solidFill>
+                  <a:srgbClr val="0F172A"/>
+                </a:solidFill>
+              </a:defRPr>
+            </a:pPr>
+            <a:r>
+              <a:t>Audit Summary (3,072 Shots)</a:t>
             </a:r>
           </a:p>
           <a:p>
             <a:br/>
-            <a:pPr>
-              <a:defRPr sz="1100" b="1">
+            <a:r>
+              <a:t>Five-Node Multipath:</a:t>
+            </a:r>
+          </a:p>
+          <a:p>
+            <a:pPr>
+              <a:defRPr sz="950">
                 <a:solidFill>
                   <a:srgbClr val="0F172A"/>
                 </a:solidFill>
               </a:defRPr>
             </a:pPr>
             <a:r>
-              <a:t>• C (Static Calibration): </a:t>
-            </a:r>
-          </a:p>
-          <a:p>
-            <a:pPr>
-              <a:defRPr sz="1000">
-                <a:solidFill>
-                  <a:srgbClr val="475569"/>
-                </a:solidFill>
-              </a:defRPr>
-            </a:pPr>
-            <a:r>
-              <a:t>ASPLOS '19 (Murali et al.) weights edges by -log(1 - ε_gate).</a:t>
-            </a:r>
-          </a:p>
-          <a:p>
+              <a:t>• Baselines (A, B, C, C-MC): 0.9751 | Depth: 8 | Qubits: 3/5 (60%) | Yield: 100%</a:t>
+            </a:r>
             <a:br/>
-            <a:pPr>
-              <a:defRPr sz="1100" b="1">
+            <a:r>
+              <a:t>• QMRP Protected (D): 0.9711 | Depth: 11 | Qubits: 5/5 (100%) | Yield: 98.05%</a:t>
+            </a:r>
+          </a:p>
+          <a:p>
+            <a:br/>
+            <a:r>
+              <a:t>IBM Heavy-Hex (FakeSherbrooke):</a:t>
+            </a:r>
+          </a:p>
+          <a:p>
+            <a:pPr>
+              <a:defRPr sz="950">
                 <a:solidFill>
                   <a:srgbClr val="0F172A"/>
                 </a:solidFill>
               </a:defRPr>
             </a:pPr>
             <a:r>
-              <a:t>• C-MC (Simulation-Assisted): </a:t>
-            </a:r>
-          </a:p>
-          <a:p>
-            <a:pPr>
-              <a:defRPr sz="1000">
-                <a:solidFill>
-                  <a:srgbClr val="475569"/>
-                </a:solidFill>
-              </a:defRPr>
-            </a:pPr>
-            <a:r>
-              <a:t>Pre-screens candidate paths using Monte Carlo trial shots on the simulator to discover best route empirically!</a:t>
-            </a:r>
-          </a:p>
-          <a:p>
+              <a:t>• Shortest (A) / Noise-Aware (C, C-MC): 0.7842 | Depth: 56 | Qubits: 6/127 (4.7%)</a:t>
+            </a:r>
             <a:br/>
-            <a:pPr>
-              <a:defRPr sz="1100" b="1">
+            <a:r>
+              <a:t>• SABRE (B): 0.7710 | Depth: 30 | Qubits: 6/127 (4.7%) | Yield: 100%</a:t>
+            </a:r>
+            <a:br/>
+            <a:r>
+              <a:t>• QMRP Protected (D): 0.7709 | Depth: 113 | Qubits: 8/127 (6.3%) | Yield: 87.43%</a:t>
+            </a:r>
+          </a:p>
+          <a:p>
+            <a:br/>
+            <a:r>
+              <a:t>Hyperbolic {7,3} Lattice:</a:t>
+            </a:r>
+          </a:p>
+          <a:p>
+            <a:pPr>
+              <a:defRPr sz="950">
                 <a:solidFill>
                   <a:srgbClr val="0F172A"/>
                 </a:solidFill>
               </a:defRPr>
             </a:pPr>
             <a:r>
-              <a:t>• Key Impact: </a:t>
-            </a:r>
-          </a:p>
-          <a:p>
-            <a:pPr>
-              <a:defRPr sz="1000">
-                <a:solidFill>
-                  <a:srgbClr val="475569"/>
-                </a:solidFill>
-              </a:defRPr>
-            </a:pPr>
-            <a:r>
-              <a:t>On Hyperbolic, C-MC avoided bad detours (6 vs 7 SWAPs), lifting fidelity from 0.9028 to 0.9185.</a:t>
-            </a:r>
-          </a:p>
-        </p:txBody>
-      </p:sp>
-      <p:sp>
-        <p:nvSpPr>
-          <p:cNvPr id="11" name="Rounded Rectangle 10"/>
-          <p:cNvSpPr/>
+              <a:t>• SABRE (B): 0.9258 (HIGHEST!) | Depth: 22 | Qubits: 7/85 (8.2%)</a:t>
+            </a:r>
+            <a:br/>
+            <a:r>
+              <a:t>• Shortest Path (A): 0.9219 | Depth: 34 | Qubits: 7/85 (8.2%)</a:t>
+            </a:r>
+            <a:br/>
+            <a:r>
+              <a:t>• Simulation-Assisted (C-MC): 0.9185 | Depth: 54 | Qubits: 7/85</a:t>
+            </a:r>
+            <a:br/>
+            <a:r>
+              <a:t>• Static Noise-Aware (C): 0.9028 | Depth: 58 | Qubits: 8/85</a:t>
+            </a:r>
+            <a:br/>
+            <a:r>
+              <a:t>• QMRP Protected (D): 0.9208 | Depth: 93 | Qubits: 9/85 (10.6%) | Yield: 90.69%</a:t>
+            </a:r>
+          </a:p>
+        </p:txBody>
+      </p:sp>
+      <p:pic>
+        <p:nvPicPr>
+          <p:cNvPr id="9" name="Picture 8">
+            <a:extLst>
+              <a:ext uri="{FF2B5EF4-FFF2-40B4-BE49-F238E27FC236}">
+                <a16:creationId xmlns:a16="http://schemas.microsoft.com/office/drawing/2014/main" id="{28DF79C0-2B45-CADF-64B7-CF481615DAF4}"/>
+              </a:ext>
+            </a:extLst>
+          </p:cNvPr>
+          <p:cNvPicPr>
+            <a:picLocks noChangeAspect="1"/>
+          </p:cNvPicPr>
           <p:nvPr/>
-        </p:nvSpPr>
-        <p:spPr>
-          <a:xfrm>
-            <a:off x="8823960" y="1371600"/>
-            <a:ext cx="2560320" cy="4937760"/>
-          </a:xfrm>
-          <a:prstGeom prst="roundRect">
-            <a:avLst/>
-          </a:prstGeom>
-          <a:solidFill>
-            <a:srgbClr val="FFFFFF"/>
-          </a:solidFill>
-          <a:ln w="12700">
-            <a:solidFill>
-              <a:srgbClr val="E2E8F0"/>
-            </a:solidFill>
-          </a:ln>
-        </p:spPr>
-        <p:style>
-          <a:lnRef idx="1">
-            <a:schemeClr val="accent1"/>
-          </a:lnRef>
-          <a:fillRef idx="3">
-            <a:schemeClr val="accent1"/>
-          </a:fillRef>
-          <a:effectRef idx="2">
-            <a:schemeClr val="accent1"/>
-          </a:effectRef>
-          <a:fontRef idx="minor">
-            <a:schemeClr val="lt1"/>
-          </a:fontRef>
-        </p:style>
-        <p:txBody>
-          <a:bodyPr rtlCol="0" anchor="ctr"/>
-          <a:lstStyle/>
-          <a:p>
-            <a:pPr algn="ctr"/>
-          </a:p>
-        </p:txBody>
-      </p:sp>
-      <p:sp>
-        <p:nvSpPr>
-          <p:cNvPr id="12" name="TextBox 11"/>
-          <p:cNvSpPr txBox="1"/>
-          <p:nvPr/>
-        </p:nvSpPr>
-        <p:spPr>
-          <a:xfrm>
-            <a:off x="9006840" y="1554480"/>
-            <a:ext cx="2194560" cy="4480560"/>
+        </p:nvPicPr>
+        <p:blipFill>
+          <a:blip r:embed="rId3"/>
+          <a:stretch>
+            <a:fillRect/>
+          </a:stretch>
+        </p:blipFill>
+        <p:spPr>
+          <a:xfrm>
+            <a:off x="4937760" y="1472184"/>
+            <a:ext cx="7014548" cy="2486345"/>
           </a:xfrm>
           <a:prstGeom prst="rect">
             <a:avLst/>
           </a:prstGeom>
-          <a:noFill/>
-        </p:spPr>
-        <p:txBody>
-          <a:bodyPr wrap="square">
-            <a:spAutoFit/>
-          </a:bodyPr>
-          <a:lstStyle/>
-          <a:p>
-            <a:pPr>
-              <a:defRPr sz="1400" b="1">
-                <a:solidFill>
-                  <a:srgbClr val="D97706"/>
-                </a:solidFill>
-              </a:defRPr>
-            </a:pPr>
-            <a:r>
-              <a:t>Method D: QMRP Protected</a:t>
-            </a:r>
-          </a:p>
-          <a:p>
-            <a:br/>
-            <a:pPr>
-              <a:defRPr sz="1100" b="1">
-                <a:solidFill>
-                  <a:srgbClr val="0F172A"/>
-                </a:solidFill>
-              </a:defRPr>
-            </a:pPr>
-            <a:r>
-              <a:t>• Concept: </a:t>
-            </a:r>
-          </a:p>
-          <a:p>
-            <a:pPr>
-              <a:defRPr sz="1000">
-                <a:solidFill>
-                  <a:srgbClr val="475569"/>
-                </a:solidFill>
-              </a:defRPr>
-            </a:pPr>
-            <a:r>
-              <a:t>Two-rail repetition encoding with destination parity postselection.</a:t>
-            </a:r>
-          </a:p>
-          <a:p>
-            <a:br/>
-            <a:pPr>
-              <a:defRPr sz="1100" b="1">
-                <a:solidFill>
-                  <a:srgbClr val="0F172A"/>
-                </a:solidFill>
-              </a:defRPr>
-            </a:pPr>
-            <a:r>
-              <a:t>• Mechanism: </a:t>
-            </a:r>
-          </a:p>
-          <a:p>
-            <a:pPr>
-              <a:defRPr sz="1000">
-                <a:solidFill>
-                  <a:srgbClr val="475569"/>
-                </a:solidFill>
-              </a:defRPr>
-            </a:pPr>
-            <a:r>
-              <a:t>Encodes state on 2 rails; discards shots if parity syndrome = 1.</a:t>
-            </a:r>
-          </a:p>
-          <a:p>
-            <a:br/>
-            <a:pPr>
-              <a:defRPr sz="1100" b="1">
-                <a:solidFill>
-                  <a:srgbClr val="0F172A"/>
-                </a:solidFill>
-              </a:defRPr>
-            </a:pPr>
-            <a:r>
-              <a:t>• Limitation: </a:t>
-            </a:r>
-          </a:p>
-          <a:p>
-            <a:pPr>
-              <a:defRPr sz="1000">
-                <a:solidFill>
-                  <a:srgbClr val="475569"/>
-                </a:solidFill>
-              </a:defRPr>
-            </a:pPr>
-            <a:r>
-              <a:t>Doubles 2-qubit gate count and discards 9–13% of shots.</a:t>
-            </a:r>
-          </a:p>
-        </p:txBody>
-      </p:sp>
-    </p:spTree>
-  </p:cSld>
-  <p:clrMapOvr>
-    <a:masterClrMapping/>
-  </p:clrMapOvr>
-</p:sld>
-</file>
-
-<file path=ppt/slides/slide9.xml><?xml version="1.0" encoding="utf-8"?>
-<p:sld xmlns:a="http://schemas.openxmlformats.org/drawingml/2006/main" xmlns:p="http://schemas.openxmlformats.org/presentationml/2006/main" xmlns:r="http://schemas.openxmlformats.org/officeDocument/2006/relationships">
-  <p:cSld>
-    <p:spTree>
-      <p:nvGrpSpPr>
-        <p:cNvPr id="1" name=""/>
-        <p:cNvGrpSpPr/>
-        <p:nvPr/>
-      </p:nvGrpSpPr>
-      <p:grpSpPr/>
-      <p:sp>
-        <p:nvSpPr>
-          <p:cNvPr id="2" name="Rectangle 1"/>
-          <p:cNvSpPr/>
+        </p:spPr>
+      </p:pic>
+      <p:pic>
+        <p:nvPicPr>
+          <p:cNvPr id="11" name="Picture 10">
+            <a:extLst>
+              <a:ext uri="{FF2B5EF4-FFF2-40B4-BE49-F238E27FC236}">
+                <a16:creationId xmlns:a16="http://schemas.microsoft.com/office/drawing/2014/main" id="{E28F4A73-A473-F129-8B3C-7D275D2E6579}"/>
+              </a:ext>
+            </a:extLst>
+          </p:cNvPr>
+          <p:cNvPicPr>
+            <a:picLocks noChangeAspect="1"/>
+          </p:cNvPicPr>
           <p:nvPr/>
-        </p:nvSpPr>
-        <p:spPr>
-          <a:xfrm>
-            <a:off x="0" y="0"/>
-            <a:ext cx="12191695" cy="6858000"/>
+        </p:nvPicPr>
+        <p:blipFill>
+          <a:blip r:embed="rId4"/>
+          <a:stretch>
+            <a:fillRect/>
+          </a:stretch>
+        </p:blipFill>
+        <p:spPr>
+          <a:xfrm>
+            <a:off x="5192639" y="3958529"/>
+            <a:ext cx="6561296" cy="2416122"/>
           </a:xfrm>
           <a:prstGeom prst="rect">
             <a:avLst/>
           </a:prstGeom>
-          <a:solidFill>
-            <a:srgbClr val="F8FAFC"/>
-          </a:solidFill>
-          <a:ln>
-            <a:noFill/>
-          </a:ln>
-        </p:spPr>
-        <p:style>
-          <a:lnRef idx="1">
-            <a:schemeClr val="accent1"/>
-          </a:lnRef>
-          <a:fillRef idx="3">
-            <a:schemeClr val="accent1"/>
-          </a:fillRef>
-          <a:effectRef idx="2">
-            <a:schemeClr val="accent1"/>
-          </a:effectRef>
-          <a:fontRef idx="minor">
-            <a:schemeClr val="lt1"/>
-          </a:fontRef>
-        </p:style>
-        <p:txBody>
-          <a:bodyPr rtlCol="0" anchor="ctr"/>
-          <a:lstStyle/>
-          <a:p>
-            <a:pPr algn="ctr"/>
-          </a:p>
-        </p:txBody>
-      </p:sp>
-      <p:sp>
-        <p:nvSpPr>
-          <p:cNvPr id="3" name="TextBox 2"/>
-          <p:cNvSpPr txBox="1"/>
-          <p:nvPr/>
-        </p:nvSpPr>
-        <p:spPr>
-          <a:xfrm>
-            <a:off x="731520" y="365760"/>
-            <a:ext cx="10698480" cy="292608"/>
-          </a:xfrm>
-          <a:prstGeom prst="rect">
-            <a:avLst/>
-          </a:prstGeom>
-          <a:noFill/>
-        </p:spPr>
-        <p:txBody>
-          <a:bodyPr wrap="square" lIns="0" tIns="0" rIns="0" bIns="0">
-            <a:spAutoFit/>
-          </a:bodyPr>
-          <a:lstStyle/>
-          <a:p>
-            <a:pPr>
-              <a:defRPr sz="1100" b="1">
-                <a:solidFill>
-                  <a:srgbClr val="2563EB"/>
-                </a:solidFill>
-                <a:latin typeface="Calibri"/>
-              </a:defRPr>
-            </a:pPr>
-            <a:r>
-              <a:t>08 QUANTITATIVE COMPARISON</a:t>
-            </a:r>
-          </a:p>
-        </p:txBody>
-      </p:sp>
-      <p:sp>
-        <p:nvSpPr>
-          <p:cNvPr id="4" name="TextBox 3"/>
-          <p:cNvSpPr txBox="1"/>
-          <p:nvPr/>
-        </p:nvSpPr>
-        <p:spPr>
-          <a:xfrm>
-            <a:off x="731520" y="621792"/>
-            <a:ext cx="10698480" cy="594360"/>
-          </a:xfrm>
-          <a:prstGeom prst="rect">
-            <a:avLst/>
-          </a:prstGeom>
-          <a:noFill/>
-        </p:spPr>
-        <p:txBody>
-          <a:bodyPr wrap="square" lIns="0" tIns="0" rIns="0" bIns="0">
-            <a:spAutoFit/>
-          </a:bodyPr>
-          <a:lstStyle/>
-          <a:p>
-            <a:pPr>
-              <a:defRPr sz="2200" b="1">
-                <a:solidFill>
-                  <a:srgbClr val="0F172A"/>
-                </a:solidFill>
-                <a:latin typeface="Calibri"/>
-              </a:defRPr>
-            </a:pPr>
-            <a:r>
-              <a:t>Deliverable 03: Comprehensive Benchmark Results Across All Core Cases</a:t>
-            </a:r>
-          </a:p>
-          <a:p>
-            <a:pPr>
-              <a:defRPr sz="1200">
-                <a:solidFill>
-                  <a:srgbClr val="475569"/>
-                </a:solidFill>
-                <a:latin typeface="Calibri"/>
-              </a:defRPr>
-            </a:pPr>
-            <a:r>
-              <a:t>Audited under identical experimental controls: 3,072 shots per algorithm, seeds 42 / 1234.</a:t>
-            </a:r>
-          </a:p>
-        </p:txBody>
-      </p:sp>
-      <p:sp>
-        <p:nvSpPr>
-          <p:cNvPr id="5" name="Rounded Rectangle 4"/>
-          <p:cNvSpPr/>
-          <p:nvPr/>
-        </p:nvSpPr>
-        <p:spPr>
-          <a:xfrm>
-            <a:off x="731520" y="1371600"/>
-            <a:ext cx="4023360" cy="4937760"/>
-          </a:xfrm>
-          <a:prstGeom prst="roundRect">
-            <a:avLst/>
-          </a:prstGeom>
-          <a:solidFill>
-            <a:srgbClr val="FFFFFF"/>
-          </a:solidFill>
-          <a:ln w="12700">
-            <a:solidFill>
-              <a:srgbClr val="E2E8F0"/>
-            </a:solidFill>
-          </a:ln>
-        </p:spPr>
-        <p:style>
-          <a:lnRef idx="1">
-            <a:schemeClr val="accent1"/>
-          </a:lnRef>
-          <a:fillRef idx="3">
-            <a:schemeClr val="accent1"/>
-          </a:fillRef>
-          <a:effectRef idx="2">
-            <a:schemeClr val="accent1"/>
-          </a:effectRef>
-          <a:fontRef idx="minor">
-            <a:schemeClr val="lt1"/>
-          </a:fontRef>
-        </p:style>
-        <p:txBody>
-          <a:bodyPr rtlCol="0" anchor="ctr"/>
-          <a:lstStyle/>
-          <a:p>
-            <a:pPr algn="ctr"/>
-          </a:p>
-        </p:txBody>
-      </p:sp>
-      <p:sp>
-        <p:nvSpPr>
-          <p:cNvPr id="6" name="TextBox 5"/>
-          <p:cNvSpPr txBox="1"/>
-          <p:nvPr/>
-        </p:nvSpPr>
-        <p:spPr>
-          <a:xfrm>
-            <a:off x="914400" y="1508760"/>
-            <a:ext cx="3657600" cy="4663440"/>
-          </a:xfrm>
-          <a:prstGeom prst="rect">
-            <a:avLst/>
-          </a:prstGeom>
-          <a:noFill/>
-        </p:spPr>
-        <p:txBody>
-          <a:bodyPr wrap="square">
-            <a:spAutoFit/>
-          </a:bodyPr>
-          <a:lstStyle/>
-          <a:p>
-            <a:pPr>
-              <a:defRPr sz="1600" b="1">
-                <a:solidFill>
-                  <a:srgbClr val="0F172A"/>
-                </a:solidFill>
-              </a:defRPr>
-            </a:pPr>
-            <a:r>
-              <a:t>Audit Summary (3,072 Shots)</a:t>
-            </a:r>
-          </a:p>
-          <a:p>
-            <a:br/>
-            <a:pPr>
-              <a:defRPr sz="1100" b="1">
-                <a:solidFill>
-                  <a:srgbClr val="2563EB"/>
-                </a:solidFill>
-              </a:defRPr>
-            </a:pPr>
-            <a:r>
-              <a:t>Five-Node Multipath:</a:t>
-            </a:r>
-          </a:p>
-          <a:p>
-            <a:pPr>
-              <a:defRPr sz="950">
-                <a:solidFill>
-                  <a:srgbClr val="0F172A"/>
-                </a:solidFill>
-              </a:defRPr>
-            </a:pPr>
-            <a:r>
-              <a:t>• Baselines (A, B, C, C-MC): 0.9751 | Depth: 8 | Qubits: 3/5 (60%) | Yield: 100%</a:t>
-            </a:r>
-            <a:br/>
-            <a:r>
-              <a:t>• QMRP Protected (D): 0.9711 | Depth: 11 | Qubits: 5/5 (100%) | Yield: 98.05%</a:t>
-            </a:r>
-          </a:p>
-          <a:p>
-            <a:br/>
-            <a:pPr>
-              <a:defRPr sz="1100" b="1">
-                <a:solidFill>
-                  <a:srgbClr val="2563EB"/>
-                </a:solidFill>
-              </a:defRPr>
-            </a:pPr>
-            <a:r>
-              <a:t>IBM Heavy-Hex (FakeSherbrooke):</a:t>
-            </a:r>
-          </a:p>
-          <a:p>
-            <a:pPr>
-              <a:defRPr sz="950">
-                <a:solidFill>
-                  <a:srgbClr val="0F172A"/>
-                </a:solidFill>
-              </a:defRPr>
-            </a:pPr>
-            <a:r>
-              <a:t>• Shortest (A) / Noise-Aware (C, C-MC): 0.7842 | Depth: 56 | Qubits: 6/127 (4.7%)</a:t>
-            </a:r>
-            <a:br/>
-            <a:r>
-              <a:t>• SABRE (B): 0.7710 | Depth: 30 | Qubits: 6/127 (4.7%) | Yield: 100%</a:t>
-            </a:r>
-            <a:br/>
-            <a:r>
-              <a:t>• QMRP Protected (D): 0.7709 | Depth: 113 | Qubits: 8/127 (6.3%) | Yield: 87.43%</a:t>
-            </a:r>
-          </a:p>
-          <a:p>
-            <a:br/>
-            <a:pPr>
-              <a:defRPr sz="1100" b="1">
-                <a:solidFill>
-                  <a:srgbClr val="2563EB"/>
-                </a:solidFill>
-              </a:defRPr>
-            </a:pPr>
-            <a:r>
-              <a:t>Hyperbolic {7,3} Lattice:</a:t>
-            </a:r>
-          </a:p>
-          <a:p>
-            <a:pPr>
-              <a:defRPr sz="950">
-                <a:solidFill>
-                  <a:srgbClr val="0F172A"/>
-                </a:solidFill>
-              </a:defRPr>
-            </a:pPr>
-            <a:r>
-              <a:t>• SABRE (B): 0.9258 (HIGHEST!) | Depth: 22 | Qubits: 7/85 (8.2%)</a:t>
-            </a:r>
-            <a:br/>
-            <a:r>
-              <a:t>• Shortest Path (A): 0.9219 | Depth: 34 | Qubits: 7/85 (8.2%)</a:t>
-            </a:r>
-            <a:br/>
-            <a:r>
-              <a:t>• Simulation-Assisted (C-MC): 0.9185 | Depth: 54 | Qubits: 7/85</a:t>
-            </a:r>
-            <a:br/>
-            <a:r>
-              <a:t>• Static Noise-Aware (C): 0.9028 | Depth: 58 | Qubits: 8/85</a:t>
-            </a:r>
-            <a:br/>
-            <a:r>
-              <a:t>• QMRP Protected (D): 0.9208 | Depth: 93 | Qubits: 9/85 (10.6%) | Yield: 90.69%</a:t>
-            </a:r>
-          </a:p>
-        </p:txBody>
-      </p:sp>
-      <p:sp>
-        <p:nvSpPr>
-          <p:cNvPr id="7" name="Rounded Rectangle 6"/>
-          <p:cNvSpPr/>
-          <p:nvPr/>
-        </p:nvSpPr>
-        <p:spPr>
-          <a:xfrm>
-            <a:off x="4937760" y="1371600"/>
-            <a:ext cx="6492240" cy="4937760"/>
-          </a:xfrm>
-          <a:prstGeom prst="roundRect">
-            <a:avLst/>
-          </a:prstGeom>
-          <a:solidFill>
-            <a:srgbClr val="EFF6FF"/>
-          </a:solidFill>
-          <a:ln w="19050">
-            <a:solidFill>
-              <a:srgbClr val="BFDBFE"/>
-            </a:solidFill>
-          </a:ln>
-        </p:spPr>
-        <p:style>
-          <a:lnRef idx="1">
-            <a:schemeClr val="accent1"/>
-          </a:lnRef>
-          <a:fillRef idx="3">
-            <a:schemeClr val="accent1"/>
-          </a:fillRef>
-          <a:effectRef idx="2">
-            <a:schemeClr val="accent1"/>
-          </a:effectRef>
-          <a:fontRef idx="minor">
-            <a:schemeClr val="lt1"/>
-          </a:fontRef>
-        </p:style>
-        <p:txBody>
-          <a:bodyPr rtlCol="0" anchor="ctr" wrap="square" lIns="228600" rIns="228600"/>
-          <a:lstStyle/>
-          <a:p>
-            <a:pPr algn="ctr">
-              <a:defRPr sz="1200" b="1">
-                <a:solidFill>
-                  <a:srgbClr val="2563EB"/>
-                </a:solidFill>
-                <a:latin typeface="Calibri"/>
-              </a:defRPr>
-            </a:pPr>
-            <a:r>
-              <a:t>🖼️  LARGE SCREENSHOT PLACEHOLDER</a:t>
-            </a:r>
-          </a:p>
-          <a:p>
-            <a:pPr algn="ctr">
-              <a:defRPr sz="1500" b="1">
-                <a:solidFill>
-                  <a:srgbClr val="0F172A"/>
-                </a:solidFill>
-                <a:latin typeface="Calibri"/>
-              </a:defRPr>
-            </a:pPr>
-            <a:r>
-              <a:t>Fidelity &amp; Hardware Overhead Visual Charts</a:t>
-            </a:r>
-          </a:p>
-          <a:p>
-            <a:pPr algn="ctr">
-              <a:defRPr sz="1100">
-                <a:solidFill>
-                  <a:srgbClr val="475569"/>
-                </a:solidFill>
-                <a:latin typeface="Calibri"/>
-              </a:defRPr>
-            </a:pPr>
-            <a:br/>
-            <a:r>
-              <a:t>Insert the Plotly comparison charts here:</a:t>
-            </a:r>
-            <a:br/>
-            <a:r>
-              <a:t>• Top: Measured Bell State Fidelity with 95% Confidence Intervals</a:t>
-            </a:r>
-            <a:br/>
-            <a:r>
-              <a:t>• Bottom: Circuit Depth and Native 2-Qubit Gate Count Comparison</a:t>
-            </a:r>
-            <a:br/>
-            <a:r>
-              <a:t>(Exported from results/visual_summary.html)</a:t>
-            </a:r>
-          </a:p>
-        </p:txBody>
-      </p:sp>
+        </p:spPr>
+      </p:pic>
     </p:spTree>
   </p:cSld>
   <p:clrMapOvr>
@@ -10621,44 +9986,44 @@
         <a:sysClr val="window" lastClr="FFFFFF"/>
       </a:lt1>
       <a:dk2>
-        <a:srgbClr val="1F497D"/>
+        <a:srgbClr val="0E2841"/>
       </a:dk2>
       <a:lt2>
-        <a:srgbClr val="EEECE1"/>
+        <a:srgbClr val="E8E8E8"/>
       </a:lt2>
       <a:accent1>
-        <a:srgbClr val="4F81BD"/>
+        <a:srgbClr val="156082"/>
       </a:accent1>
       <a:accent2>
-        <a:srgbClr val="C0504D"/>
+        <a:srgbClr val="E97132"/>
       </a:accent2>
       <a:accent3>
-        <a:srgbClr val="9BBB59"/>
+        <a:srgbClr val="196B24"/>
       </a:accent3>
       <a:accent4>
-        <a:srgbClr val="8064A2"/>
+        <a:srgbClr val="0F9ED5"/>
       </a:accent4>
       <a:accent5>
-        <a:srgbClr val="4BACC6"/>
+        <a:srgbClr val="A02B93"/>
       </a:accent5>
       <a:accent6>
-        <a:srgbClr val="F79646"/>
+        <a:srgbClr val="4EA72E"/>
       </a:accent6>
       <a:hlink>
-        <a:srgbClr val="0000FF"/>
+        <a:srgbClr val="467886"/>
       </a:hlink>
       <a:folHlink>
-        <a:srgbClr val="800080"/>
+        <a:srgbClr val="96607D"/>
       </a:folHlink>
     </a:clrScheme>
     <a:fontScheme name="Office">
       <a:majorFont>
-        <a:latin typeface="Calibri"/>
+        <a:latin typeface="Aptos Display" panose="02110004020202020204"/>
         <a:ea typeface=""/>
         <a:cs typeface=""/>
-        <a:font script="Jpan" typeface="ＭＳ Ｐゴシック"/>
+        <a:font script="Jpan" typeface="游ゴシック Light"/>
         <a:font script="Hang" typeface="맑은 고딕"/>
-        <a:font script="Hans" typeface="宋体"/>
+        <a:font script="Hans" typeface="等线 Light"/>
         <a:font script="Hant" typeface="新細明體"/>
         <a:font script="Arab" typeface="Times New Roman"/>
         <a:font script="Hebr" typeface="Times New Roman"/>
@@ -10686,14 +10051,31 @@
         <a:font script="Viet" typeface="Times New Roman"/>
         <a:font script="Uigh" typeface="Microsoft Uighur"/>
         <a:font script="Geor" typeface="Sylfaen"/>
+        <a:font script="Armn" typeface="Arial"/>
+        <a:font script="Bugi" typeface="Leelawadee UI"/>
+        <a:font script="Bopo" typeface="Microsoft JhengHei"/>
+        <a:font script="Java" typeface="Javanese Text"/>
+        <a:font script="Lisu" typeface="Segoe UI"/>
+        <a:font script="Mymr" typeface="Myanmar Text"/>
+        <a:font script="Nkoo" typeface="Ebrima"/>
+        <a:font script="Olck" typeface="Nirmala UI"/>
+        <a:font script="Osma" typeface="Ebrima"/>
+        <a:font script="Phag" typeface="Phagspa"/>
+        <a:font script="Syrn" typeface="Estrangelo Edessa"/>
+        <a:font script="Syrj" typeface="Estrangelo Edessa"/>
+        <a:font script="Syre" typeface="Estrangelo Edessa"/>
+        <a:font script="Sora" typeface="Nirmala UI"/>
+        <a:font script="Tale" typeface="Microsoft Tai Le"/>
+        <a:font script="Talu" typeface="Microsoft New Tai Lue"/>
+        <a:font script="Tfng" typeface="Ebrima"/>
       </a:majorFont>
       <a:minorFont>
-        <a:latin typeface="Calibri"/>
+        <a:latin typeface="Aptos" panose="02110004020202020204"/>
         <a:ea typeface=""/>
         <a:cs typeface=""/>
-        <a:font script="Jpan" typeface="ＭＳ Ｐゴシック"/>
+        <a:font script="Jpan" typeface="游ゴシック"/>
         <a:font script="Hang" typeface="맑은 고딕"/>
-        <a:font script="Hans" typeface="宋体"/>
+        <a:font script="Hans" typeface="等线"/>
         <a:font script="Hant" typeface="新細明體"/>
         <a:font script="Arab" typeface="Arial"/>
         <a:font script="Hebr" typeface="Arial"/>
@@ -10721,6 +10103,23 @@
         <a:font script="Viet" typeface="Arial"/>
         <a:font script="Uigh" typeface="Microsoft Uighur"/>
         <a:font script="Geor" typeface="Sylfaen"/>
+        <a:font script="Armn" typeface="Arial"/>
+        <a:font script="Bugi" typeface="Leelawadee UI"/>
+        <a:font script="Bopo" typeface="Microsoft JhengHei"/>
+        <a:font script="Java" typeface="Javanese Text"/>
+        <a:font script="Lisu" typeface="Segoe UI"/>
+        <a:font script="Mymr" typeface="Myanmar Text"/>
+        <a:font script="Nkoo" typeface="Ebrima"/>
+        <a:font script="Olck" typeface="Nirmala UI"/>
+        <a:font script="Osma" typeface="Ebrima"/>
+        <a:font script="Phag" typeface="Phagspa"/>
+        <a:font script="Syrn" typeface="Estrangelo Edessa"/>
+        <a:font script="Syrj" typeface="Estrangelo Edessa"/>
+        <a:font script="Syre" typeface="Estrangelo Edessa"/>
+        <a:font script="Sora" typeface="Nirmala UI"/>
+        <a:font script="Tale" typeface="Microsoft Tai Le"/>
+        <a:font script="Talu" typeface="Microsoft New Tai Lue"/>
+        <a:font script="Tfng" typeface="Ebrima"/>
       </a:minorFont>
     </a:fontScheme>
     <a:fmtScheme name="Office">
@@ -10732,180 +10131,136 @@
           <a:gsLst>
             <a:gs pos="0">
               <a:schemeClr val="phClr">
-                <a:tint val="50000"/>
-                <a:satMod val="300000"/>
+                <a:lumMod val="110000"/>
+                <a:satMod val="105000"/>
+                <a:tint val="67000"/>
               </a:schemeClr>
             </a:gs>
-            <a:gs pos="35000">
+            <a:gs pos="50000">
               <a:schemeClr val="phClr">
-                <a:tint val="37000"/>
-                <a:satMod val="300000"/>
+                <a:lumMod val="105000"/>
+                <a:satMod val="103000"/>
+                <a:tint val="73000"/>
               </a:schemeClr>
             </a:gs>
             <a:gs pos="100000">
               <a:schemeClr val="phClr">
-                <a:tint val="15000"/>
-                <a:satMod val="350000"/>
+                <a:lumMod val="105000"/>
+                <a:satMod val="109000"/>
+                <a:tint val="81000"/>
               </a:schemeClr>
             </a:gs>
           </a:gsLst>
-          <a:lin ang="16200000" scaled="1"/>
+          <a:lin ang="5400000" scaled="0"/>
         </a:gradFill>
         <a:gradFill rotWithShape="1">
           <a:gsLst>
             <a:gs pos="0">
               <a:schemeClr val="phClr">
-                <a:tint val="100000"/>
+                <a:satMod val="103000"/>
+                <a:lumMod val="102000"/>
+                <a:tint val="94000"/>
+              </a:schemeClr>
+            </a:gs>
+            <a:gs pos="50000">
+              <a:schemeClr val="phClr">
+                <a:satMod val="110000"/>
+                <a:lumMod val="100000"/>
                 <a:shade val="100000"/>
-                <a:satMod val="130000"/>
               </a:schemeClr>
             </a:gs>
             <a:gs pos="100000">
               <a:schemeClr val="phClr">
-                <a:tint val="50000"/>
-                <a:shade val="100000"/>
-                <a:satMod val="350000"/>
+                <a:lumMod val="99000"/>
+                <a:satMod val="120000"/>
+                <a:shade val="78000"/>
               </a:schemeClr>
             </a:gs>
           </a:gsLst>
-          <a:lin ang="16200000" scaled="0"/>
+          <a:lin ang="5400000" scaled="0"/>
         </a:gradFill>
       </a:fillStyleLst>
       <a:lnStyleLst>
-        <a:ln w="9525" cap="flat" cmpd="sng" algn="ctr">
+        <a:ln w="12700" cap="flat" cmpd="sng" algn="ctr">
           <a:solidFill>
-            <a:schemeClr val="phClr">
-              <a:shade val="95000"/>
-              <a:satMod val="105000"/>
-            </a:schemeClr>
+            <a:schemeClr val="phClr"/>
           </a:solidFill>
           <a:prstDash val="solid"/>
+          <a:miter lim="800000"/>
+        </a:ln>
+        <a:ln w="19050" cap="flat" cmpd="sng" algn="ctr">
+          <a:solidFill>
+            <a:schemeClr val="phClr"/>
+          </a:solidFill>
+          <a:prstDash val="solid"/>
+          <a:miter lim="800000"/>
         </a:ln>
         <a:ln w="25400" cap="flat" cmpd="sng" algn="ctr">
           <a:solidFill>
             <a:schemeClr val="phClr"/>
           </a:solidFill>
           <a:prstDash val="solid"/>
-        </a:ln>
-        <a:ln w="38100" cap="flat" cmpd="sng" algn="ctr">
-          <a:solidFill>
-            <a:schemeClr val="phClr"/>
-          </a:solidFill>
-          <a:prstDash val="solid"/>
+          <a:miter lim="800000"/>
         </a:ln>
       </a:lnStyleLst>
       <a:effectStyleLst>
         <a:effectStyle>
+          <a:effectLst/>
+        </a:effectStyle>
+        <a:effectStyle>
+          <a:effectLst/>
+        </a:effectStyle>
+        <a:effectStyle>
           <a:effectLst>
-            <a:outerShdw blurRad="40000" dist="20000" dir="5400000" rotWithShape="0">
+            <a:outerShdw blurRad="57150" dist="19050" dir="5400000" algn="ctr" rotWithShape="0">
               <a:srgbClr val="000000">
-                <a:alpha val="38000"/>
+                <a:alpha val="63000"/>
               </a:srgbClr>
             </a:outerShdw>
           </a:effectLst>
-        </a:effectStyle>
-        <a:effectStyle>
-          <a:effectLst>
-            <a:outerShdw blurRad="40000" dist="23000" dir="5400000" rotWithShape="0">
-              <a:srgbClr val="000000">
-                <a:alpha val="35000"/>
-              </a:srgbClr>
-            </a:outerShdw>
-          </a:effectLst>
-        </a:effectStyle>
-        <a:effectStyle>
-          <a:effectLst>
-            <a:outerShdw blurRad="40000" dist="23000" dir="5400000" rotWithShape="0">
-              <a:srgbClr val="000000">
-                <a:alpha val="35000"/>
-              </a:srgbClr>
-            </a:outerShdw>
-          </a:effectLst>
-          <a:scene3d>
-            <a:camera prst="orthographicFront">
-              <a:rot lat="0" lon="0" rev="0"/>
-            </a:camera>
-            <a:lightRig rig="threePt" dir="t">
-              <a:rot lat="0" lon="0" rev="1200000"/>
-            </a:lightRig>
-          </a:scene3d>
-          <a:sp3d>
-            <a:bevelT w="63500" h="25400"/>
-          </a:sp3d>
         </a:effectStyle>
       </a:effectStyleLst>
       <a:bgFillStyleLst>
         <a:solidFill>
           <a:schemeClr val="phClr"/>
         </a:solidFill>
+        <a:solidFill>
+          <a:schemeClr val="phClr">
+            <a:tint val="95000"/>
+            <a:satMod val="170000"/>
+          </a:schemeClr>
+        </a:solidFill>
         <a:gradFill rotWithShape="1">
           <a:gsLst>
             <a:gs pos="0">
               <a:schemeClr val="phClr">
-                <a:tint val="40000"/>
-                <a:satMod val="350000"/>
+                <a:tint val="93000"/>
+                <a:satMod val="150000"/>
+                <a:shade val="98000"/>
+                <a:lumMod val="102000"/>
               </a:schemeClr>
             </a:gs>
-            <a:gs pos="40000">
+            <a:gs pos="50000">
               <a:schemeClr val="phClr">
-                <a:tint val="45000"/>
-                <a:shade val="99000"/>
-                <a:satMod val="350000"/>
+                <a:tint val="98000"/>
+                <a:satMod val="130000"/>
+                <a:shade val="90000"/>
+                <a:lumMod val="103000"/>
               </a:schemeClr>
             </a:gs>
             <a:gs pos="100000">
               <a:schemeClr val="phClr">
-                <a:shade val="20000"/>
-                <a:satMod val="255000"/>
+                <a:shade val="63000"/>
+                <a:satMod val="120000"/>
               </a:schemeClr>
             </a:gs>
           </a:gsLst>
-          <a:path path="circle">
-            <a:fillToRect l="50000" t="-80000" r="50000" b="180000"/>
-          </a:path>
-        </a:gradFill>
-        <a:gradFill rotWithShape="1">
-          <a:gsLst>
-            <a:gs pos="0">
-              <a:schemeClr val="phClr">
-                <a:tint val="80000"/>
-                <a:satMod val="300000"/>
-              </a:schemeClr>
-            </a:gs>
-            <a:gs pos="100000">
-              <a:schemeClr val="phClr">
-                <a:shade val="30000"/>
-                <a:satMod val="200000"/>
-              </a:schemeClr>
-            </a:gs>
-          </a:gsLst>
-          <a:path path="circle">
-            <a:fillToRect l="50000" t="50000" r="50000" b="50000"/>
-          </a:path>
+          <a:lin ang="5400000" scaled="0"/>
         </a:gradFill>
       </a:bgFillStyleLst>
     </a:fmtScheme>
   </a:themeElements>
   <a:objectDefaults>
-    <a:spDef>
-      <a:spPr/>
-      <a:bodyPr/>
-      <a:lstStyle/>
-      <a:style>
-        <a:lnRef idx="1">
-          <a:schemeClr val="accent1"/>
-        </a:lnRef>
-        <a:fillRef idx="3">
-          <a:schemeClr val="accent1"/>
-        </a:fillRef>
-        <a:effectRef idx="2">
-          <a:schemeClr val="accent1"/>
-        </a:effectRef>
-        <a:fontRef idx="minor">
-          <a:schemeClr val="lt1"/>
-        </a:fontRef>
-      </a:style>
-    </a:spDef>
     <a:lnDef>
       <a:spPr/>
       <a:bodyPr/>
@@ -10927,5 +10282,10 @@
     </a:lnDef>
   </a:objectDefaults>
   <a:extraClrSchemeLst/>
+  <a:extLst>
+    <a:ext uri="{05A4C25C-085E-4340-85A3-A5531E510DB2}">
+      <thm15:themeFamily xmlns:thm15="http://schemas.microsoft.com/office/thememl/2012/main" name="Office Theme" id="{2E142A2C-CD16-42D6-873A-C26D2A0506FA}" vid="{1BDDFF52-6CD6-40A5-AB3C-68EB2F1E4D0A}"/>
+    </a:ext>
+  </a:extLst>
 </a:theme>
 </file>